--- a/lecons/USA/Population Geography/16_USA_POP_L12_The_Demographic_Transition_Model.pptx
+++ b/lecons/USA/Population Geography/16_USA_POP_L12_The_Demographic_Transition_Model.pptx
@@ -71,10 +71,9 @@
     <p:sldId id="319" r:id="rId65"/>
     <p:sldId id="320" r:id="rId66"/>
     <p:sldId id="321" r:id="rId67"/>
-    <p:sldId id="322" r:id="rId68"/>
   </p:sldIdLst>
   <p:notesMasterIdLst>
-    <p:notesMasterId r:id="rId69"/>
+    <p:notesMasterId r:id="rId68"/>
   </p:notesMasterIdLst>
   <p:sldSz cx="12192000" cy="6858000"/>
   <p:notesSz cx="6858000" cy="12192000"/>
@@ -3296,7 +3295,7 @@
           <a:p>
             <a:r>
               <a:rPr lang="en-US" dirty="0"/>
-              <a:t>Let us copy Meaning of the Model. The demographic transition model is presented as follows. Copy the point on Origin on the left, then draw the diagram on the right: the demographic transition model. Give it a title and label it clearly.</a:t>
+              <a:t>Let us copy Meaning of the Model. The demographic transition model is explained as follows. Copy the point on Origin on the left, then draw the diagram on the right: the demographic transition model. Give it a title and label it clearly.</a:t>
             </a:r>
             <a:endParaRPr lang="en-US" dirty="0"/>
           </a:p>
@@ -3384,7 +3383,7 @@
           <a:p>
             <a:r>
               <a:rPr lang="en-US" dirty="0"/>
-              <a:t>We continue with Meaning of the Model. On this slide we have Principle. Write each point on a new line, with the key term first, and explain it in your own words when we revise.</a:t>
+              <a:t>We continue with Meaning of the Model. Copy the point on Principle: write the key term first, then its explanation.</a:t>
             </a:r>
             <a:endParaRPr lang="en-US" dirty="0"/>
           </a:p>
@@ -3560,7 +3559,7 @@
           <a:p>
             <a:r>
               <a:rPr lang="en-US" dirty="0"/>
-              <a:t>Copy the point on Five stages on the left, then draw the diagram on the right: rostow's stages. Give it a title and label it clearly.</a:t>
+              <a:t>Copy the point on Link with Rostow's model on the left, then draw the diagram on the right: rostow's model. Give it a title and label it clearly.</a:t>
             </a:r>
             <a:endParaRPr lang="en-US" dirty="0"/>
           </a:p>
@@ -3648,7 +3647,7 @@
           <a:p>
             <a:r>
               <a:rPr lang="en-US" dirty="0"/>
-              <a:t>Let us copy Stages 1 and 2. The first two stages have the following characteristics. On this slide we have Stage 1 (high stationary). Write each point on a new line, with the key term first, and explain it in your own words when we revise. When you finish, we go to the next slide.</a:t>
+              <a:t>Let us copy Stages 1 and 2. The first two stages have the following characteristics. Copy the point on Stage 1, high stationary: write the key term first, then its explanation.</a:t>
             </a:r>
             <a:endParaRPr lang="en-US" dirty="0"/>
           </a:p>
@@ -3736,7 +3735,7 @@
           <a:p>
             <a:r>
               <a:rPr lang="en-US" dirty="0"/>
-              <a:t>We continue with Stages 1 and 2. On this slide we have Society in Stage 1. Write each point on a new line, with the key term first, and explain it in your own words when we revise.</a:t>
+              <a:t>Copy the point on Stage 2, early expanding on the left, then draw the diagram on the right: countries at each stage. Give it a title and label it clearly.</a:t>
             </a:r>
             <a:endParaRPr lang="en-US" dirty="0"/>
           </a:p>
@@ -3824,7 +3823,7 @@
           <a:p>
             <a:r>
               <a:rPr lang="en-US" dirty="0"/>
-              <a:t>Copy the point on Stage 2 (early expanding) on the left, then draw the diagram on the right: stages and examples. Give it a title and label it clearly.</a:t>
+              <a:t>Let us copy Stages 3, 4 and 5. The last three stages have the following characteristics. Copy the point on Stage 3, late expanding: write the key term first, then its explanation.</a:t>
             </a:r>
             <a:endParaRPr lang="en-US" dirty="0"/>
           </a:p>
@@ -3912,7 +3911,7 @@
           <a:p>
             <a:r>
               <a:rPr lang="en-US" dirty="0"/>
-              <a:t>We continue with Stages 1 and 2. On this slide we have Society in Stage 2. Write each point on a new line, with the key term first, and explain it in your own words when we revise.</a:t>
+              <a:t>We continue with Stages 3, 4 and 5. Copy the point on Stage 4, low stationary: write the key term first, then its explanation.</a:t>
             </a:r>
             <a:endParaRPr lang="en-US" dirty="0"/>
           </a:p>
@@ -4000,7 +3999,7 @@
           <a:p>
             <a:r>
               <a:rPr lang="en-US" dirty="0"/>
-              <a:t>Let us copy Stages 3, 4 and 5. The last three stages have the following characteristics. On this slide we have Stage 3 (late expanding). Write each point on a new line, with the key term first, and explain it in your own words when we revise. When you finish, we go to the next slide.</a:t>
+              <a:t>We continue with Stages 3, 4 and 5. Copy the point on Stage 5, declining: write the key term first, then its explanation.</a:t>
             </a:r>
             <a:endParaRPr lang="en-US" dirty="0"/>
           </a:p>
@@ -4088,7 +4087,7 @@
           <a:p>
             <a:r>
               <a:rPr lang="en-US" dirty="0"/>
-              <a:t>We continue with Stages 3, 4 and 5. On this slide we have Society in Stage 3. Write each point on a new line, with the key term first, and explain it in your own words when we revise. When you finish, we go to the next slide.</a:t>
+              <a:t>Let us copy Strengths. The model has the following strengths. Copy the point on A simple framework: write the key term first, then its explanation.</a:t>
             </a:r>
             <a:endParaRPr lang="en-US" dirty="0"/>
           </a:p>
@@ -4176,7 +4175,7 @@
           <a:p>
             <a:r>
               <a:rPr lang="en-US" dirty="0"/>
-              <a:t>We continue with Stages 3, 4 and 5. On this slide we have Stage 4 (low stationary). Write each point on a new line, with the key term first, and explain it in your own words when we revise. When you finish, we go to the next slide.</a:t>
+              <a:t>We continue with Strengths. Copy the point on The role of development: write the key term first, then its explanation.</a:t>
             </a:r>
             <a:endParaRPr lang="en-US" dirty="0"/>
           </a:p>
@@ -4264,7 +4263,7 @@
           <a:p>
             <a:r>
               <a:rPr lang="en-US" dirty="0"/>
-              <a:t>We continue with Stages 3, 4 and 5. On this slide we have Stage 5 (declining). Write each point on a new line, with the key term first, and explain it in your own words when we revise.</a:t>
+              <a:t>Let us copy Weaknesses. The model has the following weaknesses. Copy the point on It is Eurocentric: write the key term first, then its explanation.</a:t>
             </a:r>
             <a:endParaRPr lang="en-US" dirty="0"/>
           </a:p>
@@ -4352,7 +4351,7 @@
           <a:p>
             <a:r>
               <a:rPr lang="en-US" dirty="0"/>
-              <a:t>Let us copy Appraisal of the Model. The strengths and weaknesses of the model are the following. On this slide we have Strengths. Write each point on a new line, with the key term first, and explain it in your own words when we revise. When you finish, we go to the next slide.</a:t>
+              <a:t>Copy the point on It ignores other causes on the left, then draw the diagram on the right: the one-child policy. Give it a title and label it clearly.</a:t>
             </a:r>
             <a:endParaRPr lang="en-US" dirty="0"/>
           </a:p>
@@ -4528,7 +4527,7 @@
           <a:p>
             <a:r>
               <a:rPr lang="en-US" dirty="0"/>
-              <a:t>We continue with Appraisal of the Model. On this slide we have Eurocentric. Write each point on a new line, with the key term first, and explain it in your own words when we revise.</a:t>
+              <a:t>We continue with Weaknesses. Copy the point on Time scales and stage 5: write the key term first, then its explanation.</a:t>
             </a:r>
             <a:endParaRPr lang="en-US" dirty="0"/>
           </a:p>
@@ -4616,7 +4615,7 @@
           <a:p>
             <a:r>
               <a:rPr lang="en-US" dirty="0"/>
-              <a:t>Copy the point on Ignores other causes on the left, then draw the diagram on the right: a population policy. Give it a title and label it clearly.</a:t>
+              <a:t>Let us copy Application to Cameroon. The model applies to Cameroon as follows. Copy the point on Current stage on the left, then draw the diagram on the right: birth and death rates of Cameroon. Give it a title and label it clearly.</a:t>
             </a:r>
             <a:endParaRPr lang="en-US" dirty="0"/>
           </a:p>
@@ -4704,7 +4703,7 @@
           <a:p>
             <a:r>
               <a:rPr lang="en-US" dirty="0"/>
-              <a:t>We continue with Appraisal of the Model. On this slide we have Time scales and Stage 5 added later. Write each point on a new line, with the key term first, and explain it in your own words when we revise.</a:t>
+              <a:t>We continue with Application to Cameroon. Copy the point on A high birth rate: write the key term first, then its explanation.</a:t>
             </a:r>
             <a:endParaRPr lang="en-US" dirty="0"/>
           </a:p>
@@ -4792,7 +4791,7 @@
           <a:p>
             <a:r>
               <a:rPr lang="en-US" dirty="0"/>
-              <a:t>Let us copy Application to Cameroon. The model applies to Cameroon as follows. Copy the point on Current stage on the left, then draw the diagram on the right: rates of Cameroon. Give it a title and label it clearly.</a:t>
+              <a:t>We continue with Application to Cameroon. Copy the point on A low death rate and rapid growth: write the key term first, then its explanation.</a:t>
             </a:r>
             <a:endParaRPr lang="en-US" dirty="0"/>
           </a:p>
@@ -4880,7 +4879,7 @@
           <a:p>
             <a:r>
               <a:rPr lang="en-US" dirty="0"/>
-              <a:t>We continue with Application to Cameroon. On this slide we have High birth rate and Falling death rate. Write each point on a new line, with the key term first, and explain it in your own words when we revise. When you finish, we go to the next slide.</a:t>
+              <a:t>We continue with Application to Cameroon. Copy the point on Future: write the key term first, then its explanation.</a:t>
             </a:r>
             <a:endParaRPr lang="en-US" dirty="0"/>
           </a:p>
@@ -4968,7 +4967,7 @@
           <a:p>
             <a:r>
               <a:rPr lang="en-US" dirty="0"/>
-              <a:t>We continue with Application to Cameroon. On this slide we have Rapid growth and Future. Write each point on a new line, with the key term first, and explain it in your own words when we revise.</a:t>
+              <a:t>Now let us check what you have understood. Question 1: Describe Stage 2 of the demographic transition model. Answer in your exercise book.</a:t>
             </a:r>
             <a:endParaRPr lang="en-US" dirty="0"/>
           </a:p>
@@ -5056,7 +5055,7 @@
           <a:p>
             <a:r>
               <a:rPr lang="en-US" dirty="0"/>
-              <a:t>Now let us check what you have understood. Question 1: Describe Stage 2 of the demographic transition model. Answer in your exercise book.</a:t>
+              <a:t>The expected answer is: death rates fall quickly while birth rates remain high, so the population grows very fast. If you got it right, well done.</a:t>
             </a:r>
             <a:endParaRPr lang="en-US" dirty="0"/>
           </a:p>
@@ -5144,7 +5143,7 @@
           <a:p>
             <a:r>
               <a:rPr lang="en-US" dirty="0"/>
-              <a:t>The expected answer is: death rates fall quickly while birth rates remain high, so the population grows very fast. If you got it right, well done.</a:t>
+              <a:t>Now let us check what you have understood. Question 2: Give two weaknesses of the demographic transition model. Answer in your exercise book.</a:t>
             </a:r>
             <a:endParaRPr lang="en-US" dirty="0"/>
           </a:p>
@@ -5232,7 +5231,7 @@
           <a:p>
             <a:r>
               <a:rPr lang="en-US" dirty="0"/>
-              <a:t>Now let us check what you have understood. Question 2: Give two weaknesses of the demographic transition model. Answer in your exercise book.</a:t>
+              <a:t>The expected answer is: it is Eurocentric; it ignores wars, epidemics, migration and policies; countries move at different speeds (any two). If you got it right, well done.</a:t>
             </a:r>
             <a:endParaRPr lang="en-US" dirty="0"/>
           </a:p>
@@ -5320,7 +5319,7 @@
           <a:p>
             <a:r>
               <a:rPr lang="en-US" dirty="0"/>
-              <a:t>The expected answer is: it is Eurocentric; it ignores wars, epidemics, migration and policies; countries move at different speeds (any two). If you got it right, well done.</a:t>
+              <a:t>For those who need more practice, fill in the blanks in your exercise book. The answers are: number 1, high; number 2, 5; number 3, 3.</a:t>
             </a:r>
             <a:endParaRPr lang="en-US" dirty="0"/>
           </a:p>
@@ -5496,7 +5495,7 @@
           <a:p>
             <a:r>
               <a:rPr lang="en-US" dirty="0"/>
-              <a:t>For those who need more practice, fill in the blanks in your exercise book. The answers are: number 1, high; number 2, 5; number 3, 3.</a:t>
+              <a:t>For your homework: Define migration. We shall correct it at the beginning of our next lesson.</a:t>
             </a:r>
             <a:endParaRPr lang="en-US" dirty="0"/>
           </a:p>
@@ -5584,7 +5583,7 @@
           <a:p>
             <a:r>
               <a:rPr lang="en-US" dirty="0"/>
-              <a:t>For your homework: Define migration. We shall correct it at the beginning of our next lesson.</a:t>
+              <a:t>Our next lesson will be on Lesson 13: Migration: Characteristics, Laws and Models. Thank you for your attention, and see you next time.</a:t>
             </a:r>
             <a:endParaRPr lang="en-US" dirty="0"/>
           </a:p>
@@ -5672,7 +5671,7 @@
           <a:p>
             <a:r>
               <a:rPr lang="en-US" dirty="0"/>
-              <a:t>Our next lesson will be on Lesson 13: Migration: Characteristics, Laws and Models. Thank you for your attention, and see you next time.</a:t>
+              <a:t>Let us play the bilingual game. I say a word in English, and you give me the French word. Then we do the reverse.</a:t>
             </a:r>
             <a:endParaRPr lang="en-US" dirty="0"/>
           </a:p>
@@ -5760,7 +5759,7 @@
           <a:p>
             <a:r>
               <a:rPr lang="en-US" dirty="0"/>
-              <a:t>Let us play the bilingual game. I say a word in English, and you give me the French word. Then we do the reverse.</a:t>
+              <a:t>I record this information in the official logbook of the class after the lesson.</a:t>
             </a:r>
             <a:endParaRPr lang="en-US" dirty="0"/>
           </a:p>
@@ -5848,7 +5847,7 @@
           <a:p>
             <a:r>
               <a:rPr lang="en-US" dirty="0"/>
-              <a:t>I record this information in the official logbook of the class after the lesson.</a:t>
+              <a:t>I complete the second page of the logbook: the matter taught, the evaluation, the homework and the attendance.</a:t>
             </a:r>
             <a:endParaRPr lang="en-US" dirty="0"/>
           </a:p>
@@ -5936,7 +5935,7 @@
           <a:p>
             <a:r>
               <a:rPr lang="en-US" dirty="0"/>
-              <a:t>I complete the second page of the logbook: the matter taught, the evaluation, the homework and the attendance.</a:t>
+              <a:t>This slide is for me, the teacher: it gives the timing of the lesson and what to do if the projector is not available.</a:t>
             </a:r>
             <a:endParaRPr lang="en-US" dirty="0"/>
           </a:p>
@@ -6024,7 +6023,7 @@
           <a:p>
             <a:r>
               <a:rPr lang="en-US" dirty="0"/>
-              <a:t>This slide is for me, the teacher: it gives the timing of the lesson and what to do if the projector is not available.</a:t>
+              <a:t>These are the references and picture credits used to prepare this lesson.</a:t>
             </a:r>
             <a:endParaRPr lang="en-US" dirty="0"/>
           </a:p>
@@ -6048,94 +6047,6 @@
             <a:fld id="{F7021451-1387-4CA6-816F-3879F97B5CBC}" type="slidenum">
               <a:rPr lang="en-US"/>
               <a:t>66</a:t>
-            </a:fld>
-            <a:endParaRPr lang="en-US"/>
-          </a:p>
-        </p:txBody>
-      </p:sp>
-    </p:spTree>
-    <p:extLst>
-      <p:ext uri="{BB962C8B-B14F-4D97-AF65-F5344CB8AC3E}">
-        <p14:creationId xmlns:p14="http://schemas.microsoft.com/office/powerpoint/2010/main" val="1024086991"/>
-      </p:ext>
-    </p:extLst>
-  </p:cSld>
-  <p:clrMapOvr>
-    <a:masterClrMapping/>
-  </p:clrMapOvr>
-</p:notes>
-</file>
-
-<file path=ppt/notesSlides/notesSlide67.xml><?xml version="1.0" encoding="utf-8"?>
-<p:notes xmlns:a="http://schemas.openxmlformats.org/drawingml/2006/main" xmlns:r="http://schemas.openxmlformats.org/officeDocument/2006/relationships" xmlns:p="http://schemas.openxmlformats.org/presentationml/2006/main">
-  <p:cSld>
-    <p:spTree>
-      <p:nvGrpSpPr>
-        <p:cNvPr id="1" name=""/>
-        <p:cNvGrpSpPr/>
-        <p:nvPr/>
-      </p:nvGrpSpPr>
-      <p:grpSpPr>
-        <a:xfrm>
-          <a:off x="0" y="0"/>
-          <a:ext cx="0" cy="0"/>
-          <a:chOff x="0" y="0"/>
-          <a:chExt cx="0" cy="0"/>
-        </a:xfrm>
-      </p:grpSpPr>
-      <p:sp>
-        <p:nvSpPr>
-          <p:cNvPr id="2" name="Slide Image Placeholder 1"/>
-          <p:cNvSpPr>
-            <a:spLocks noGrp="1" noRot="1" noChangeAspect="1"/>
-          </p:cNvSpPr>
-          <p:nvPr>
-            <p:ph type="sldImg"/>
-          </p:nvPr>
-        </p:nvSpPr>
-        <p:spPr/>
-      </p:sp>
-      <p:sp>
-        <p:nvSpPr>
-          <p:cNvPr id="3" name="Notes Placeholder 2"/>
-          <p:cNvSpPr>
-            <a:spLocks noGrp="1"/>
-          </p:cNvSpPr>
-          <p:nvPr>
-            <p:ph type="body" idx="1"/>
-          </p:nvPr>
-        </p:nvSpPr>
-        <p:spPr/>
-        <p:txBody>
-          <a:bodyPr/>
-          <a:lstStyle/>
-          <a:p>
-            <a:r>
-              <a:rPr lang="en-US" dirty="0"/>
-              <a:t>These are the references and picture credits used to prepare this lesson.</a:t>
-            </a:r>
-            <a:endParaRPr lang="en-US" dirty="0"/>
-          </a:p>
-        </p:txBody>
-      </p:sp>
-      <p:sp>
-        <p:nvSpPr>
-          <p:cNvPr id="4" name="Slide Number Placeholder 3"/>
-          <p:cNvSpPr>
-            <a:spLocks noGrp="1"/>
-          </p:cNvSpPr>
-          <p:nvPr>
-            <p:ph type="sldNum" sz="quarter" idx="10"/>
-          </p:nvPr>
-        </p:nvSpPr>
-        <p:spPr/>
-        <p:txBody>
-          <a:bodyPr/>
-          <a:lstStyle/>
-          <a:p>
-            <a:fld id="{F7021451-1387-4CA6-816F-3879F97B5CBC}" type="slidenum">
-              <a:rPr lang="en-US"/>
-              <a:t>67</a:t>
             </a:fld>
             <a:endParaRPr lang="en-US"/>
           </a:p>
@@ -15671,7 +15582,7 @@
         <p:spPr>
           <a:xfrm>
             <a:off x="365760" y="1783080"/>
-            <a:ext cx="4846320" cy="4617720"/>
+            <a:ext cx="6035040" cy="4617720"/>
           </a:xfrm>
           <a:prstGeom prst="rect">
             <a:avLst/>
@@ -15690,7 +15601,7 @@
               <a:buNone/>
             </a:pPr>
             <a:r>
-              <a:rPr lang="en-US" sz="3600" i="1" dirty="0">
+              <a:rPr lang="en-US" sz="3200" i="1" dirty="0">
                 <a:solidFill>
                   <a:srgbClr val="111111"/>
                 </a:solidFill>
@@ -15698,9 +15609,9 @@
                 <a:ea typeface="Times New Roman" pitchFamily="34" charset="-122"/>
                 <a:cs typeface="Times New Roman" pitchFamily="34" charset="-120"/>
               </a:rPr>
-              <a:t>The demographic transition model is presented as follows:</a:t>
-            </a:r>
-            <a:endParaRPr lang="en-US" sz="3600" dirty="0"/>
+              <a:t>The demographic transition model is explained as follows:</a:t>
+            </a:r>
+            <a:endParaRPr lang="en-US" sz="3200" dirty="0"/>
           </a:p>
           <a:p>
             <a:pPr algn="l" indent="0" marL="0">
@@ -15710,7 +15621,7 @@
               <a:buNone/>
             </a:pPr>
             <a:r>
-              <a:rPr lang="en-US" sz="3600" b="1" dirty="0">
+              <a:rPr lang="en-US" sz="3200" b="1" dirty="0">
                 <a:solidFill>
                   <a:srgbClr val="111111"/>
                 </a:solidFill>
@@ -15727,7 +15638,7 @@
               <a:buNone/>
             </a:pPr>
             <a:r>
-              <a:rPr lang="en-US" sz="3600" dirty="0">
+              <a:rPr lang="en-US" sz="3200" dirty="0">
                 <a:solidFill>
                   <a:srgbClr val="111111"/>
                 </a:solidFill>
@@ -15735,9 +15646,9 @@
                 <a:ea typeface="Times New Roman" pitchFamily="34" charset="-122"/>
                 <a:cs typeface="Times New Roman" pitchFamily="34" charset="-120"/>
               </a:rPr>
-              <a:t>It is based on the history of Western Europe and North America during industrialisation.</a:t>
-            </a:r>
-            <a:endParaRPr lang="en-US" sz="3600" dirty="0"/>
+              <a:t>The model is based on the history of Western Europe and North America during industrialisation. It was proposed by Warren Thompson in 1929 and developed by Frank Notestein.</a:t>
+            </a:r>
+            <a:endParaRPr lang="en-US" sz="3200" dirty="0"/>
           </a:p>
         </p:txBody>
       </p:sp>
@@ -15757,8 +15668,8 @@
         </p:blipFill>
         <p:spPr>
           <a:xfrm>
-            <a:off x="5349240" y="2409394"/>
-            <a:ext cx="6659575" cy="3017620"/>
+            <a:off x="6537960" y="2678713"/>
+            <a:ext cx="5470855" cy="2478981"/>
           </a:xfrm>
           <a:prstGeom prst="rect">
             <a:avLst/>
@@ -15773,8 +15684,8 @@
         </p:nvSpPr>
         <p:spPr>
           <a:xfrm>
-            <a:off x="5349240" y="6089904"/>
-            <a:ext cx="6659575" cy="347472"/>
+            <a:off x="6537960" y="6089904"/>
+            <a:ext cx="5470855" cy="347472"/>
           </a:xfrm>
           <a:prstGeom prst="rect">
             <a:avLst/>
@@ -16034,7 +15945,7 @@
                 <a:ea typeface="Times New Roman" pitchFamily="34" charset="-122"/>
                 <a:cs typeface="Times New Roman" pitchFamily="34" charset="-120"/>
               </a:rPr>
-              <a:t>As a country develops, death rates fall first, then birth rates, so population growth rises and then slows.</a:t>
+              <a:t>As a country develops, death rates fall first and birth rates fall later. Population growth therefore rises and then slows down.</a:t>
             </a:r>
             <a:endParaRPr lang="en-US" sz="4000" dirty="0"/>
           </a:p>
@@ -16441,7 +16352,7 @@
         <p:spPr>
           <a:xfrm>
             <a:off x="365760" y="1783080"/>
-            <a:ext cx="4846320" cy="4617720"/>
+            <a:ext cx="6035040" cy="4617720"/>
           </a:xfrm>
           <a:prstGeom prst="rect">
             <a:avLst/>
@@ -16468,7 +16379,7 @@
                 <a:ea typeface="Times New Roman" pitchFamily="34" charset="-122"/>
                 <a:cs typeface="Times New Roman" pitchFamily="34" charset="-120"/>
               </a:rPr>
-              <a:t>Five stages: </a:t>
+              <a:t>Link with Rostow's model: </a:t>
             </a:r>
             <a:pPr algn="l" indent="0" marL="0">
               <a:spcAft>
@@ -16485,7 +16396,7 @@
                 <a:ea typeface="Times New Roman" pitchFamily="34" charset="-122"/>
                 <a:cs typeface="Times New Roman" pitchFamily="34" charset="-120"/>
               </a:rPr>
-              <a:t>The model has five stages, which can be linked with Rostow's stages of economic growth.</a:t>
+              <a:t>The five demographic stages can be linked with the five stages of economic growth of Rostow. Each fall in birth or death rates goes with a change in the economy and society.</a:t>
             </a:r>
             <a:endParaRPr lang="en-US" sz="3600" dirty="0"/>
           </a:p>
@@ -16507,8 +16418,8 @@
         </p:blipFill>
         <p:spPr>
           <a:xfrm>
-            <a:off x="5349240" y="2617506"/>
-            <a:ext cx="6659575" cy="2601397"/>
+            <a:off x="6537960" y="2849678"/>
+            <a:ext cx="5470855" cy="2137053"/>
           </a:xfrm>
           <a:prstGeom prst="rect">
             <a:avLst/>
@@ -16523,8 +16434,8 @@
         </p:nvSpPr>
         <p:spPr>
           <a:xfrm>
-            <a:off x="5349240" y="6089904"/>
-            <a:ext cx="6659575" cy="347472"/>
+            <a:off x="6537960" y="6089904"/>
+            <a:ext cx="5470855" cy="347472"/>
           </a:xfrm>
           <a:prstGeom prst="rect">
             <a:avLst/>
@@ -16548,7 +16459,7 @@
                 <a:ea typeface="Times New Roman" pitchFamily="34" charset="-122"/>
                 <a:cs typeface="Times New Roman" pitchFamily="34" charset="-120"/>
               </a:rPr>
-              <a:t>Illustration: Rostow's stages</a:t>
+              <a:t>Illustration: Rostow's model</a:t>
             </a:r>
             <a:endParaRPr lang="en-US" sz="1600" dirty="0"/>
           </a:p>
@@ -16683,7 +16594,7 @@
         <p:spPr>
           <a:xfrm>
             <a:off x="0" y="658368"/>
-            <a:ext cx="3840480" cy="5833872"/>
+            <a:ext cx="2468880" cy="5833872"/>
           </a:xfrm>
           <a:prstGeom prst="rect">
             <a:avLst/>
@@ -16698,8 +16609,8 @@
         </p:nvSpPr>
         <p:spPr>
           <a:xfrm>
-            <a:off x="4069080" y="1005840"/>
-            <a:ext cx="7802575" cy="731520"/>
+            <a:off x="2697480" y="1005840"/>
+            <a:ext cx="9174175" cy="731520"/>
           </a:xfrm>
           <a:prstGeom prst="rect">
             <a:avLst/>
@@ -16739,8 +16650,8 @@
         </p:nvSpPr>
         <p:spPr>
           <a:xfrm>
-            <a:off x="4069080" y="1737360"/>
-            <a:ext cx="7802575" cy="457200"/>
+            <a:off x="2697480" y="1737360"/>
+            <a:ext cx="9174175" cy="457200"/>
           </a:xfrm>
           <a:prstGeom prst="rect">
             <a:avLst/>
@@ -16778,8 +16689,8 @@
         </p:nvSpPr>
         <p:spPr>
           <a:xfrm>
-            <a:off x="4069080" y="2240280"/>
-            <a:ext cx="7802575" cy="4206240"/>
+            <a:off x="2697480" y="2240280"/>
+            <a:ext cx="9174175" cy="4206240"/>
           </a:xfrm>
           <a:prstGeom prst="rect">
             <a:avLst/>
@@ -16798,7 +16709,7 @@
               <a:buNone/>
             </a:pPr>
             <a:r>
-              <a:rPr lang="en-US" sz="4000" i="1" dirty="0">
+              <a:rPr lang="en-US" sz="3200" i="1" dirty="0">
                 <a:solidFill>
                   <a:srgbClr val="111111"/>
                 </a:solidFill>
@@ -16808,7 +16719,7 @@
               </a:rPr>
               <a:t>The first two stages have the following characteristics:</a:t>
             </a:r>
-            <a:endParaRPr lang="en-US" sz="4000" dirty="0"/>
+            <a:endParaRPr lang="en-US" sz="3200" dirty="0"/>
           </a:p>
           <a:p>
             <a:pPr algn="l" indent="0" marL="0">
@@ -16818,7 +16729,7 @@
               <a:buNone/>
             </a:pPr>
             <a:r>
-              <a:rPr lang="en-US" sz="4000" b="1" dirty="0">
+              <a:rPr lang="en-US" sz="3200" b="1" dirty="0">
                 <a:solidFill>
                   <a:srgbClr val="111111"/>
                 </a:solidFill>
@@ -16826,7 +16737,7 @@
                 <a:ea typeface="Times New Roman" pitchFamily="34" charset="-122"/>
                 <a:cs typeface="Times New Roman" pitchFamily="34" charset="-120"/>
               </a:rPr>
-              <a:t>Stage 1 (high stationary): </a:t>
+              <a:t>Stage 1, high stationary: </a:t>
             </a:r>
             <a:pPr algn="l" indent="0" marL="0">
               <a:spcAft>
@@ -16835,7 +16746,7 @@
               <a:buNone/>
             </a:pPr>
             <a:r>
-              <a:rPr lang="en-US" sz="4000" dirty="0">
+              <a:rPr lang="en-US" sz="3200" dirty="0">
                 <a:solidFill>
                   <a:srgbClr val="111111"/>
                 </a:solidFill>
@@ -16843,9 +16754,9 @@
                 <a:ea typeface="Times New Roman" pitchFamily="34" charset="-122"/>
                 <a:cs typeface="Times New Roman" pitchFamily="34" charset="-120"/>
               </a:rPr>
-              <a:t>Birth and death rates are both very high (35–45 ‰), so growth is slow and irregular.</a:t>
-            </a:r>
-            <a:endParaRPr lang="en-US" sz="4000" dirty="0"/>
+              <a:t>Birth and death rates are both very high (35 to 45 per 1,000), so growth is slow and irregular. It is a traditional farming society with famine, disease and high infant mortality, like Rostow's traditional society, and only isolated groups remain in it today.</a:t>
+            </a:r>
+            <a:endParaRPr lang="en-US" sz="3200" dirty="0"/>
           </a:p>
         </p:txBody>
       </p:sp>
@@ -16961,9 +16872,150 @@
           </a:p>
         </p:txBody>
       </p:sp>
+      <p:sp>
+        <p:nvSpPr>
+          <p:cNvPr id="3" name="Text 1"/>
+          <p:cNvSpPr/>
+          <p:nvPr/>
+        </p:nvSpPr>
+        <p:spPr>
+          <a:xfrm>
+            <a:off x="365760" y="1005840"/>
+            <a:ext cx="11460175" cy="731520"/>
+          </a:xfrm>
+          <a:prstGeom prst="rect">
+            <a:avLst/>
+          </a:prstGeom>
+          <a:noFill/>
+          <a:ln/>
+        </p:spPr>
+        <p:txBody>
+          <a:bodyPr wrap="square" lIns="0" tIns="0" rIns="0" bIns="0" rtlCol="0" anchor="ctr">
+            <a:normAutofit/>
+          </a:bodyPr>
+          <a:lstStyle/>
+          <a:p>
+            <a:pPr algn="ctr" indent="0" marL="0">
+              <a:buNone/>
+            </a:pPr>
+            <a:r>
+              <a:rPr lang="en-US" sz="3600" b="1" dirty="0">
+                <a:solidFill>
+                  <a:srgbClr val="990011"/>
+                </a:solidFill>
+                <a:latin typeface="Times New Roman" pitchFamily="34" charset="0"/>
+                <a:ea typeface="Times New Roman" pitchFamily="34" charset="-122"/>
+                <a:cs typeface="Times New Roman" pitchFamily="34" charset="-120"/>
+              </a:rPr>
+              <a:t>2. The Stages of the Model</a:t>
+            </a:r>
+            <a:endParaRPr lang="en-US" sz="3600" dirty="0"/>
+          </a:p>
+        </p:txBody>
+      </p:sp>
+      <p:sp>
+        <p:nvSpPr>
+          <p:cNvPr id="4" name="Text 2"/>
+          <p:cNvSpPr/>
+          <p:nvPr/>
+        </p:nvSpPr>
+        <p:spPr>
+          <a:xfrm>
+            <a:off x="365760" y="1737360"/>
+            <a:ext cx="6035040" cy="457200"/>
+          </a:xfrm>
+          <a:prstGeom prst="rect">
+            <a:avLst/>
+          </a:prstGeom>
+          <a:noFill/>
+          <a:ln/>
+        </p:spPr>
+        <p:txBody>
+          <a:bodyPr wrap="square" lIns="0" tIns="0" rIns="0" bIns="0" rtlCol="0" anchor="ctr">
+            <a:normAutofit/>
+          </a:bodyPr>
+          <a:lstStyle/>
+          <a:p>
+            <a:pPr algn="l" indent="0" marL="0">
+              <a:buNone/>
+            </a:pPr>
+            <a:r>
+              <a:rPr lang="en-US" sz="3000" b="1" dirty="0">
+                <a:solidFill>
+                  <a:srgbClr val="990011"/>
+                </a:solidFill>
+                <a:latin typeface="Times New Roman" pitchFamily="34" charset="0"/>
+                <a:ea typeface="Times New Roman" pitchFamily="34" charset="-122"/>
+                <a:cs typeface="Times New Roman" pitchFamily="34" charset="-120"/>
+              </a:rPr>
+              <a:t>A) Stages 1 and 2</a:t>
+            </a:r>
+            <a:endParaRPr lang="en-US" sz="3000" dirty="0"/>
+          </a:p>
+        </p:txBody>
+      </p:sp>
+      <p:sp>
+        <p:nvSpPr>
+          <p:cNvPr id="5" name="Text 3"/>
+          <p:cNvSpPr/>
+          <p:nvPr/>
+        </p:nvSpPr>
+        <p:spPr>
+          <a:xfrm>
+            <a:off x="365760" y="2240280"/>
+            <a:ext cx="6035040" cy="4160520"/>
+          </a:xfrm>
+          <a:prstGeom prst="rect">
+            <a:avLst/>
+          </a:prstGeom>
+          <a:noFill/>
+          <a:ln/>
+        </p:spPr>
+        <p:txBody>
+          <a:bodyPr wrap="square" lIns="0" tIns="0" rIns="0" bIns="0" rtlCol="0" anchor="t"/>
+          <a:lstStyle/>
+          <a:p>
+            <a:pPr algn="l" indent="0" marL="0">
+              <a:spcAft>
+                <a:spcPts val="800"/>
+              </a:spcAft>
+              <a:buNone/>
+            </a:pPr>
+            <a:r>
+              <a:rPr lang="en-US" sz="3000" b="1" dirty="0">
+                <a:solidFill>
+                  <a:srgbClr val="111111"/>
+                </a:solidFill>
+                <a:latin typeface="Times New Roman" pitchFamily="34" charset="0"/>
+                <a:ea typeface="Times New Roman" pitchFamily="34" charset="-122"/>
+                <a:cs typeface="Times New Roman" pitchFamily="34" charset="-120"/>
+              </a:rPr>
+              <a:t>Stage 2, early expanding: </a:t>
+            </a:r>
+            <a:pPr algn="l" indent="0" marL="0">
+              <a:spcAft>
+                <a:spcPts val="800"/>
+              </a:spcAft>
+              <a:buNone/>
+            </a:pPr>
+            <a:r>
+              <a:rPr lang="en-US" sz="3000" dirty="0">
+                <a:solidFill>
+                  <a:srgbClr val="111111"/>
+                </a:solidFill>
+                <a:latin typeface="Times New Roman" pitchFamily="34" charset="0"/>
+                <a:ea typeface="Times New Roman" pitchFamily="34" charset="-122"/>
+                <a:cs typeface="Times New Roman" pitchFamily="34" charset="-120"/>
+              </a:rPr>
+              <a:t>Death rates fall quickly because health, food supply and sanitation improve, while birth rates stay high. The population grows very fast as industry and towns begin, like Rostow's pre-conditions and take-off, as in Niger and Chad.</a:t>
+            </a:r>
+            <a:endParaRPr lang="en-US" sz="3000" dirty="0"/>
+          </a:p>
+        </p:txBody>
+      </p:sp>
       <p:pic>
         <p:nvPicPr>
-          <p:cNvPr id="3" name="Image 0" descr="/home/claude/f4/img/minesec_sheet.png">    </p:cNvPr>
+          <p:cNvPr id="6" name="Image 0" descr="/home/claude/f4/img/v2/dtm_countries_big.png">    </p:cNvPr>
           <p:cNvPicPr>
             <a:picLocks noChangeAspect="1"/>
           </p:cNvPicPr>
@@ -16977,8 +17029,8 @@
         </p:blipFill>
         <p:spPr>
           <a:xfrm>
-            <a:off x="0" y="658368"/>
-            <a:ext cx="3840480" cy="5833872"/>
+            <a:off x="6537960" y="2849678"/>
+            <a:ext cx="5470855" cy="2137053"/>
           </a:xfrm>
           <a:prstGeom prst="rect">
             <a:avLst/>
@@ -16987,14 +17039,14 @@
       </p:pic>
       <p:sp>
         <p:nvSpPr>
-          <p:cNvPr id="4" name="Text 1"/>
+          <p:cNvPr id="7" name="Text 4"/>
           <p:cNvSpPr/>
           <p:nvPr/>
         </p:nvSpPr>
         <p:spPr>
           <a:xfrm>
-            <a:off x="4069080" y="1005840"/>
-            <a:ext cx="7802575" cy="731520"/>
+            <a:off x="6537960" y="6089904"/>
+            <a:ext cx="5470855" cy="347472"/>
           </a:xfrm>
           <a:prstGeom prst="rect">
             <a:avLst/>
@@ -17003,124 +17055,24 @@
           <a:ln/>
         </p:spPr>
         <p:txBody>
-          <a:bodyPr wrap="square" lIns="0" tIns="0" rIns="0" bIns="0" rtlCol="0" anchor="ctr">
-            <a:normAutofit/>
-          </a:bodyPr>
+          <a:bodyPr wrap="square" lIns="0" tIns="0" rIns="0" bIns="0" rtlCol="0" anchor="ctr"/>
           <a:lstStyle/>
           <a:p>
             <a:pPr algn="ctr" indent="0" marL="0">
               <a:buNone/>
             </a:pPr>
             <a:r>
-              <a:rPr lang="en-US" sz="3600" b="1" dirty="0">
-                <a:solidFill>
-                  <a:srgbClr val="990011"/>
+              <a:rPr lang="en-US" sz="1600" i="1" dirty="0">
+                <a:solidFill>
+                  <a:srgbClr val="555555"/>
                 </a:solidFill>
                 <a:latin typeface="Times New Roman" pitchFamily="34" charset="0"/>
                 <a:ea typeface="Times New Roman" pitchFamily="34" charset="-122"/>
                 <a:cs typeface="Times New Roman" pitchFamily="34" charset="-120"/>
               </a:rPr>
-              <a:t>2. The Stages of the Model</a:t>
-            </a:r>
-            <a:endParaRPr lang="en-US" sz="3600" dirty="0"/>
-          </a:p>
-        </p:txBody>
-      </p:sp>
-      <p:sp>
-        <p:nvSpPr>
-          <p:cNvPr id="5" name="Text 2"/>
-          <p:cNvSpPr/>
-          <p:nvPr/>
-        </p:nvSpPr>
-        <p:spPr>
-          <a:xfrm>
-            <a:off x="4069080" y="1737360"/>
-            <a:ext cx="7802575" cy="457200"/>
-          </a:xfrm>
-          <a:prstGeom prst="rect">
-            <a:avLst/>
-          </a:prstGeom>
-          <a:noFill/>
-          <a:ln/>
-        </p:spPr>
-        <p:txBody>
-          <a:bodyPr wrap="square" lIns="0" tIns="0" rIns="0" bIns="0" rtlCol="0" anchor="ctr"/>
-          <a:lstStyle/>
-          <a:p>
-            <a:pPr algn="l" indent="0" marL="0">
-              <a:buNone/>
-            </a:pPr>
-            <a:r>
-              <a:rPr lang="en-US" sz="3200" b="1" dirty="0">
-                <a:solidFill>
-                  <a:srgbClr val="990011"/>
-                </a:solidFill>
-                <a:latin typeface="Times New Roman" pitchFamily="34" charset="0"/>
-                <a:ea typeface="Times New Roman" pitchFamily="34" charset="-122"/>
-                <a:cs typeface="Times New Roman" pitchFamily="34" charset="-120"/>
-              </a:rPr>
-              <a:t>A) Stages 1 and 2 (continued)</a:t>
-            </a:r>
-            <a:endParaRPr lang="en-US" sz="3200" dirty="0"/>
-          </a:p>
-        </p:txBody>
-      </p:sp>
-      <p:sp>
-        <p:nvSpPr>
-          <p:cNvPr id="6" name="Text 3"/>
-          <p:cNvSpPr/>
-          <p:nvPr/>
-        </p:nvSpPr>
-        <p:spPr>
-          <a:xfrm>
-            <a:off x="4069080" y="2240280"/>
-            <a:ext cx="7802575" cy="4206240"/>
-          </a:xfrm>
-          <a:prstGeom prst="rect">
-            <a:avLst/>
-          </a:prstGeom>
-          <a:noFill/>
-          <a:ln/>
-        </p:spPr>
-        <p:txBody>
-          <a:bodyPr wrap="square" lIns="0" tIns="0" rIns="0" bIns="0" rtlCol="0" anchor="t"/>
-          <a:lstStyle/>
-          <a:p>
-            <a:pPr algn="l" indent="0" marL="0">
-              <a:spcAft>
-                <a:spcPts val="800"/>
-              </a:spcAft>
-              <a:buNone/>
-            </a:pPr>
-            <a:r>
-              <a:rPr lang="en-US" sz="4000" b="1" dirty="0">
-                <a:solidFill>
-                  <a:srgbClr val="111111"/>
-                </a:solidFill>
-                <a:latin typeface="Times New Roman" pitchFamily="34" charset="0"/>
-                <a:ea typeface="Times New Roman" pitchFamily="34" charset="-122"/>
-                <a:cs typeface="Times New Roman" pitchFamily="34" charset="-120"/>
-              </a:rPr>
-              <a:t>Society in Stage 1: </a:t>
-            </a:r>
-            <a:pPr algn="l" indent="0" marL="0">
-              <a:spcAft>
-                <a:spcPts val="800"/>
-              </a:spcAft>
-              <a:buNone/>
-            </a:pPr>
-            <a:r>
-              <a:rPr lang="en-US" sz="4000" dirty="0">
-                <a:solidFill>
-                  <a:srgbClr val="111111"/>
-                </a:solidFill>
-                <a:latin typeface="Times New Roman" pitchFamily="34" charset="0"/>
-                <a:ea typeface="Times New Roman" pitchFamily="34" charset="-122"/>
-                <a:cs typeface="Times New Roman" pitchFamily="34" charset="-120"/>
-              </a:rPr>
-              <a:t>It is a traditional farming society with famine, disease, wars and high infant mortality (Rostow's traditional society); only isolated groups remain in it.</a:t>
-            </a:r>
-            <a:endParaRPr lang="en-US" sz="4000" dirty="0"/>
+              <a:t>Illustration: countries at each stage</a:t>
+            </a:r>
+            <a:endParaRPr lang="en-US" sz="1600" dirty="0"/>
           </a:p>
         </p:txBody>
       </p:sp>
@@ -17236,150 +17188,9 @@
           </a:p>
         </p:txBody>
       </p:sp>
-      <p:sp>
-        <p:nvSpPr>
-          <p:cNvPr id="3" name="Text 1"/>
-          <p:cNvSpPr/>
-          <p:nvPr/>
-        </p:nvSpPr>
-        <p:spPr>
-          <a:xfrm>
-            <a:off x="365760" y="1005840"/>
-            <a:ext cx="11460175" cy="731520"/>
-          </a:xfrm>
-          <a:prstGeom prst="rect">
-            <a:avLst/>
-          </a:prstGeom>
-          <a:noFill/>
-          <a:ln/>
-        </p:spPr>
-        <p:txBody>
-          <a:bodyPr wrap="square" lIns="0" tIns="0" rIns="0" bIns="0" rtlCol="0" anchor="ctr">
-            <a:normAutofit/>
-          </a:bodyPr>
-          <a:lstStyle/>
-          <a:p>
-            <a:pPr algn="ctr" indent="0" marL="0">
-              <a:buNone/>
-            </a:pPr>
-            <a:r>
-              <a:rPr lang="en-US" sz="3600" b="1" dirty="0">
-                <a:solidFill>
-                  <a:srgbClr val="990011"/>
-                </a:solidFill>
-                <a:latin typeface="Times New Roman" pitchFamily="34" charset="0"/>
-                <a:ea typeface="Times New Roman" pitchFamily="34" charset="-122"/>
-                <a:cs typeface="Times New Roman" pitchFamily="34" charset="-120"/>
-              </a:rPr>
-              <a:t>2. The Stages of the Model</a:t>
-            </a:r>
-            <a:endParaRPr lang="en-US" sz="3600" dirty="0"/>
-          </a:p>
-        </p:txBody>
-      </p:sp>
-      <p:sp>
-        <p:nvSpPr>
-          <p:cNvPr id="4" name="Text 2"/>
-          <p:cNvSpPr/>
-          <p:nvPr/>
-        </p:nvSpPr>
-        <p:spPr>
-          <a:xfrm>
-            <a:off x="365760" y="1737360"/>
-            <a:ext cx="5120640" cy="457200"/>
-          </a:xfrm>
-          <a:prstGeom prst="rect">
-            <a:avLst/>
-          </a:prstGeom>
-          <a:noFill/>
-          <a:ln/>
-        </p:spPr>
-        <p:txBody>
-          <a:bodyPr wrap="square" lIns="0" tIns="0" rIns="0" bIns="0" rtlCol="0" anchor="ctr">
-            <a:normAutofit/>
-          </a:bodyPr>
-          <a:lstStyle/>
-          <a:p>
-            <a:pPr algn="l" indent="0" marL="0">
-              <a:buNone/>
-            </a:pPr>
-            <a:r>
-              <a:rPr lang="en-US" sz="3000" b="1" dirty="0">
-                <a:solidFill>
-                  <a:srgbClr val="990011"/>
-                </a:solidFill>
-                <a:latin typeface="Times New Roman" pitchFamily="34" charset="0"/>
-                <a:ea typeface="Times New Roman" pitchFamily="34" charset="-122"/>
-                <a:cs typeface="Times New Roman" pitchFamily="34" charset="-120"/>
-              </a:rPr>
-              <a:t>A) Stages 1 and 2</a:t>
-            </a:r>
-            <a:endParaRPr lang="en-US" sz="3000" dirty="0"/>
-          </a:p>
-        </p:txBody>
-      </p:sp>
-      <p:sp>
-        <p:nvSpPr>
-          <p:cNvPr id="5" name="Text 3"/>
-          <p:cNvSpPr/>
-          <p:nvPr/>
-        </p:nvSpPr>
-        <p:spPr>
-          <a:xfrm>
-            <a:off x="365760" y="2240280"/>
-            <a:ext cx="4846320" cy="4160520"/>
-          </a:xfrm>
-          <a:prstGeom prst="rect">
-            <a:avLst/>
-          </a:prstGeom>
-          <a:noFill/>
-          <a:ln/>
-        </p:spPr>
-        <p:txBody>
-          <a:bodyPr wrap="square" lIns="0" tIns="0" rIns="0" bIns="0" rtlCol="0" anchor="t"/>
-          <a:lstStyle/>
-          <a:p>
-            <a:pPr algn="l" indent="0" marL="0">
-              <a:spcAft>
-                <a:spcPts val="800"/>
-              </a:spcAft>
-              <a:buNone/>
-            </a:pPr>
-            <a:r>
-              <a:rPr lang="en-US" sz="3600" b="1" dirty="0">
-                <a:solidFill>
-                  <a:srgbClr val="111111"/>
-                </a:solidFill>
-                <a:latin typeface="Times New Roman" pitchFamily="34" charset="0"/>
-                <a:ea typeface="Times New Roman" pitchFamily="34" charset="-122"/>
-                <a:cs typeface="Times New Roman" pitchFamily="34" charset="-120"/>
-              </a:rPr>
-              <a:t>Stage 2 (early expanding): </a:t>
-            </a:r>
-            <a:pPr algn="l" indent="0" marL="0">
-              <a:spcAft>
-                <a:spcPts val="800"/>
-              </a:spcAft>
-              <a:buNone/>
-            </a:pPr>
-            <a:r>
-              <a:rPr lang="en-US" sz="3600" dirty="0">
-                <a:solidFill>
-                  <a:srgbClr val="111111"/>
-                </a:solidFill>
-                <a:latin typeface="Times New Roman" pitchFamily="34" charset="0"/>
-                <a:ea typeface="Times New Roman" pitchFamily="34" charset="-122"/>
-                <a:cs typeface="Times New Roman" pitchFamily="34" charset="-120"/>
-              </a:rPr>
-              <a:t>Death rates fall quickly while birth rates stay high, so population grows very fast.</a:t>
-            </a:r>
-            <a:endParaRPr lang="en-US" sz="3600" dirty="0"/>
-          </a:p>
-        </p:txBody>
-      </p:sp>
       <p:pic>
         <p:nvPicPr>
-          <p:cNvPr id="6" name="Image 0" descr="/home/claude/f4/img/v2/dtm_countries_big.png">    </p:cNvPr>
+          <p:cNvPr id="3" name="Image 0" descr="/home/claude/f4/img/minesec_sheet.png">    </p:cNvPr>
           <p:cNvPicPr>
             <a:picLocks noChangeAspect="1"/>
           </p:cNvPicPr>
@@ -17393,8 +17204,8 @@
         </p:blipFill>
         <p:spPr>
           <a:xfrm>
-            <a:off x="5349240" y="2617506"/>
-            <a:ext cx="6659575" cy="2601397"/>
+            <a:off x="0" y="658368"/>
+            <a:ext cx="1463040" cy="5833872"/>
           </a:xfrm>
           <a:prstGeom prst="rect">
             <a:avLst/>
@@ -17403,14 +17214,14 @@
       </p:pic>
       <p:sp>
         <p:nvSpPr>
-          <p:cNvPr id="7" name="Text 4"/>
+          <p:cNvPr id="4" name="Text 1"/>
           <p:cNvSpPr/>
           <p:nvPr/>
         </p:nvSpPr>
         <p:spPr>
           <a:xfrm>
-            <a:off x="5349240" y="6089904"/>
-            <a:ext cx="6659575" cy="347472"/>
+            <a:off x="1691640" y="1005840"/>
+            <a:ext cx="10180015" cy="731520"/>
           </a:xfrm>
           <a:prstGeom prst="rect">
             <a:avLst/>
@@ -17419,24 +17230,144 @@
           <a:ln/>
         </p:spPr>
         <p:txBody>
-          <a:bodyPr wrap="square" lIns="0" tIns="0" rIns="0" bIns="0" rtlCol="0" anchor="ctr"/>
+          <a:bodyPr wrap="square" lIns="0" tIns="0" rIns="0" bIns="0" rtlCol="0" anchor="ctr">
+            <a:normAutofit/>
+          </a:bodyPr>
           <a:lstStyle/>
           <a:p>
             <a:pPr algn="ctr" indent="0" marL="0">
               <a:buNone/>
             </a:pPr>
             <a:r>
-              <a:rPr lang="en-US" sz="1600" i="1" dirty="0">
-                <a:solidFill>
-                  <a:srgbClr val="555555"/>
+              <a:rPr lang="en-US" sz="3600" b="1" dirty="0">
+                <a:solidFill>
+                  <a:srgbClr val="990011"/>
                 </a:solidFill>
                 <a:latin typeface="Times New Roman" pitchFamily="34" charset="0"/>
                 <a:ea typeface="Times New Roman" pitchFamily="34" charset="-122"/>
                 <a:cs typeface="Times New Roman" pitchFamily="34" charset="-120"/>
               </a:rPr>
-              <a:t>Illustration: stages and examples</a:t>
-            </a:r>
-            <a:endParaRPr lang="en-US" sz="1600" dirty="0"/>
+              <a:t>2. The Stages of the Model</a:t>
+            </a:r>
+            <a:endParaRPr lang="en-US" sz="3600" dirty="0"/>
+          </a:p>
+        </p:txBody>
+      </p:sp>
+      <p:sp>
+        <p:nvSpPr>
+          <p:cNvPr id="5" name="Text 2"/>
+          <p:cNvSpPr/>
+          <p:nvPr/>
+        </p:nvSpPr>
+        <p:spPr>
+          <a:xfrm>
+            <a:off x="1691640" y="1737360"/>
+            <a:ext cx="10180015" cy="457200"/>
+          </a:xfrm>
+          <a:prstGeom prst="rect">
+            <a:avLst/>
+          </a:prstGeom>
+          <a:noFill/>
+          <a:ln/>
+        </p:spPr>
+        <p:txBody>
+          <a:bodyPr wrap="square" lIns="0" tIns="0" rIns="0" bIns="0" rtlCol="0" anchor="ctr"/>
+          <a:lstStyle/>
+          <a:p>
+            <a:pPr algn="l" indent="0" marL="0">
+              <a:buNone/>
+            </a:pPr>
+            <a:r>
+              <a:rPr lang="en-US" sz="3200" b="1" dirty="0">
+                <a:solidFill>
+                  <a:srgbClr val="990011"/>
+                </a:solidFill>
+                <a:latin typeface="Times New Roman" pitchFamily="34" charset="0"/>
+                <a:ea typeface="Times New Roman" pitchFamily="34" charset="-122"/>
+                <a:cs typeface="Times New Roman" pitchFamily="34" charset="-120"/>
+              </a:rPr>
+              <a:t>B) Stages 3, 4 and 5</a:t>
+            </a:r>
+            <a:endParaRPr lang="en-US" sz="3200" dirty="0"/>
+          </a:p>
+        </p:txBody>
+      </p:sp>
+      <p:sp>
+        <p:nvSpPr>
+          <p:cNvPr id="6" name="Text 3"/>
+          <p:cNvSpPr/>
+          <p:nvPr/>
+        </p:nvSpPr>
+        <p:spPr>
+          <a:xfrm>
+            <a:off x="1691640" y="2240280"/>
+            <a:ext cx="10180015" cy="4206240"/>
+          </a:xfrm>
+          <a:prstGeom prst="rect">
+            <a:avLst/>
+          </a:prstGeom>
+          <a:noFill/>
+          <a:ln/>
+        </p:spPr>
+        <p:txBody>
+          <a:bodyPr wrap="square" lIns="0" tIns="0" rIns="0" bIns="0" rtlCol="0" anchor="t"/>
+          <a:lstStyle/>
+          <a:p>
+            <a:pPr algn="l" indent="0" marL="0">
+              <a:spcAft>
+                <a:spcPts val="800"/>
+              </a:spcAft>
+              <a:buNone/>
+            </a:pPr>
+            <a:r>
+              <a:rPr lang="en-US" sz="3600" i="1" dirty="0">
+                <a:solidFill>
+                  <a:srgbClr val="111111"/>
+                </a:solidFill>
+                <a:latin typeface="Times New Roman" pitchFamily="34" charset="0"/>
+                <a:ea typeface="Times New Roman" pitchFamily="34" charset="-122"/>
+                <a:cs typeface="Times New Roman" pitchFamily="34" charset="-120"/>
+              </a:rPr>
+              <a:t>The last three stages have the following characteristics:</a:t>
+            </a:r>
+            <a:endParaRPr lang="en-US" sz="3600" dirty="0"/>
+          </a:p>
+          <a:p>
+            <a:pPr algn="l" indent="0" marL="0">
+              <a:spcAft>
+                <a:spcPts val="800"/>
+              </a:spcAft>
+              <a:buNone/>
+            </a:pPr>
+            <a:r>
+              <a:rPr lang="en-US" sz="3600" b="1" dirty="0">
+                <a:solidFill>
+                  <a:srgbClr val="111111"/>
+                </a:solidFill>
+                <a:latin typeface="Times New Roman" pitchFamily="34" charset="0"/>
+                <a:ea typeface="Times New Roman" pitchFamily="34" charset="-122"/>
+                <a:cs typeface="Times New Roman" pitchFamily="34" charset="-120"/>
+              </a:rPr>
+              <a:t>Stage 3, late expanding: </a:t>
+            </a:r>
+            <a:pPr algn="l" indent="0" marL="0">
+              <a:spcAft>
+                <a:spcPts val="800"/>
+              </a:spcAft>
+              <a:buNone/>
+            </a:pPr>
+            <a:r>
+              <a:rPr lang="en-US" sz="3600" dirty="0">
+                <a:solidFill>
+                  <a:srgbClr val="111111"/>
+                </a:solidFill>
+                <a:latin typeface="Times New Roman" pitchFamily="34" charset="0"/>
+                <a:ea typeface="Times New Roman" pitchFamily="34" charset="-122"/>
+                <a:cs typeface="Times New Roman" pitchFamily="34" charset="-120"/>
+              </a:rPr>
+              <a:t>Birth rates fall quickly and death rates slowly, so growth is still strong but slows down, as in India and Brazil. Towns and industry grow and women gain education and contraception, like Rostow's drive to maturity.</a:t>
+            </a:r>
+            <a:endParaRPr lang="en-US" sz="3600" dirty="0"/>
           </a:p>
         </p:txBody>
       </p:sp>
@@ -17650,7 +17581,7 @@
                 <a:ea typeface="Times New Roman" pitchFamily="34" charset="-122"/>
                 <a:cs typeface="Times New Roman" pitchFamily="34" charset="-120"/>
               </a:rPr>
-              <a:t>A) Stages 1 and 2</a:t>
+              <a:t>B) Stages 3, 4 and 5</a:t>
             </a:r>
             <a:endParaRPr lang="en-US" sz="3200" dirty="0"/>
           </a:p>
@@ -17692,7 +17623,7 @@
                 <a:ea typeface="Times New Roman" pitchFamily="34" charset="-122"/>
                 <a:cs typeface="Times New Roman" pitchFamily="34" charset="-120"/>
               </a:rPr>
-              <a:t>Society in Stage 2: </a:t>
+              <a:t>Stage 4, low stationary: </a:t>
             </a:r>
             <a:pPr algn="l" indent="0" marL="0">
               <a:spcAft>
@@ -17709,7 +17640,7 @@
                 <a:ea typeface="Times New Roman" pitchFamily="34" charset="-122"/>
                 <a:cs typeface="Times New Roman" pitchFamily="34" charset="-120"/>
               </a:rPr>
-              <a:t>Health, food supply and sanitation improve, and industry and towns begin (Rostow's pre-conditions and take-off); Niger and Chad are examples.</a:t>
+              <a:t>Birth and death rates are both low, so growth is very slow or zero, as in the USA and France. It corresponds to Rostow's age of high mass consumption.</a:t>
             </a:r>
             <a:endParaRPr lang="en-US" sz="4000" dirty="0"/>
           </a:p>
@@ -17844,7 +17775,7 @@
         <p:spPr>
           <a:xfrm>
             <a:off x="0" y="658368"/>
-            <a:ext cx="2468880" cy="5833872"/>
+            <a:ext cx="5120640" cy="5833872"/>
           </a:xfrm>
           <a:prstGeom prst="rect">
             <a:avLst/>
@@ -17859,8 +17790,8 @@
         </p:nvSpPr>
         <p:spPr>
           <a:xfrm>
-            <a:off x="2697480" y="1005840"/>
-            <a:ext cx="9174175" cy="731520"/>
+            <a:off x="5349240" y="1005840"/>
+            <a:ext cx="6522415" cy="731520"/>
           </a:xfrm>
           <a:prstGeom prst="rect">
             <a:avLst/>
@@ -17900,8 +17831,8 @@
         </p:nvSpPr>
         <p:spPr>
           <a:xfrm>
-            <a:off x="2697480" y="1737360"/>
-            <a:ext cx="9174175" cy="457200"/>
+            <a:off x="5349240" y="1737360"/>
+            <a:ext cx="6522415" cy="457200"/>
           </a:xfrm>
           <a:prstGeom prst="rect">
             <a:avLst/>
@@ -17939,8 +17870,8 @@
         </p:nvSpPr>
         <p:spPr>
           <a:xfrm>
-            <a:off x="2697480" y="2240280"/>
-            <a:ext cx="9174175" cy="4206240"/>
+            <a:off x="5349240" y="2240280"/>
+            <a:ext cx="6522415" cy="4206240"/>
           </a:xfrm>
           <a:prstGeom prst="rect">
             <a:avLst/>
@@ -17959,7 +17890,7 @@
               <a:buNone/>
             </a:pPr>
             <a:r>
-              <a:rPr lang="en-US" sz="4000" i="1" dirty="0">
+              <a:rPr lang="en-US" sz="4000" b="1" dirty="0">
                 <a:solidFill>
                   <a:srgbClr val="111111"/>
                 </a:solidFill>
@@ -17967,11 +17898,8 @@
                 <a:ea typeface="Times New Roman" pitchFamily="34" charset="-122"/>
                 <a:cs typeface="Times New Roman" pitchFamily="34" charset="-120"/>
               </a:rPr>
-              <a:t>The last three stages have the following characteristics:</a:t>
-            </a:r>
-            <a:endParaRPr lang="en-US" sz="4000" dirty="0"/>
-          </a:p>
-          <a:p>
+              <a:t>Stage 5, declining: </a:t>
+            </a:r>
             <a:pPr algn="l" indent="0" marL="0">
               <a:spcAft>
                 <a:spcPts val="800"/>
@@ -17979,7 +17907,7 @@
               <a:buNone/>
             </a:pPr>
             <a:r>
-              <a:rPr lang="en-US" sz="4000" b="1" dirty="0">
+              <a:rPr lang="en-US" sz="4000" dirty="0">
                 <a:solidFill>
                   <a:srgbClr val="111111"/>
                 </a:solidFill>
@@ -17987,24 +17915,7 @@
                 <a:ea typeface="Times New Roman" pitchFamily="34" charset="-122"/>
                 <a:cs typeface="Times New Roman" pitchFamily="34" charset="-120"/>
               </a:rPr>
-              <a:t>Stage 3 (late expanding): </a:t>
-            </a:r>
-            <a:pPr algn="l" indent="0" marL="0">
-              <a:spcAft>
-                <a:spcPts val="800"/>
-              </a:spcAft>
-              <a:buNone/>
-            </a:pPr>
-            <a:r>
-              <a:rPr lang="en-US" sz="4000" dirty="0">
-                <a:solidFill>
-                  <a:srgbClr val="111111"/>
-                </a:solidFill>
-                <a:latin typeface="Times New Roman" pitchFamily="34" charset="0"/>
-                <a:ea typeface="Times New Roman" pitchFamily="34" charset="-122"/>
-                <a:cs typeface="Times New Roman" pitchFamily="34" charset="-120"/>
-              </a:rPr>
-              <a:t>Birth rates fall quickly and death rates fall slowly, so growth is still strong but slows down, as in India and Brazil.</a:t>
+              <a:t>Birth rates fall below death rates, so the population declines and ages. Japan, Germany and Italy are in this stage.</a:t>
             </a:r>
             <a:endParaRPr lang="en-US" sz="4000" dirty="0"/>
           </a:p>
@@ -18139,7 +18050,7 @@
         <p:spPr>
           <a:xfrm>
             <a:off x="0" y="658368"/>
-            <a:ext cx="5120640" cy="5833872"/>
+            <a:ext cx="2468880" cy="5833872"/>
           </a:xfrm>
           <a:prstGeom prst="rect">
             <a:avLst/>
@@ -18154,8 +18065,8 @@
         </p:nvSpPr>
         <p:spPr>
           <a:xfrm>
-            <a:off x="5349240" y="1005840"/>
-            <a:ext cx="6522415" cy="731520"/>
+            <a:off x="2697480" y="1005840"/>
+            <a:ext cx="9174175" cy="731520"/>
           </a:xfrm>
           <a:prstGeom prst="rect">
             <a:avLst/>
@@ -18181,7 +18092,7 @@
                 <a:ea typeface="Times New Roman" pitchFamily="34" charset="-122"/>
                 <a:cs typeface="Times New Roman" pitchFamily="34" charset="-120"/>
               </a:rPr>
-              <a:t>2. The Stages of the Model</a:t>
+              <a:t>3. Appraisal of the Model</a:t>
             </a:r>
             <a:endParaRPr lang="en-US" sz="3600" dirty="0"/>
           </a:p>
@@ -18195,8 +18106,8 @@
         </p:nvSpPr>
         <p:spPr>
           <a:xfrm>
-            <a:off x="5349240" y="1737360"/>
-            <a:ext cx="6522415" cy="457200"/>
+            <a:off x="2697480" y="1737360"/>
+            <a:ext cx="9174175" cy="457200"/>
           </a:xfrm>
           <a:prstGeom prst="rect">
             <a:avLst/>
@@ -18220,7 +18131,7 @@
                 <a:ea typeface="Times New Roman" pitchFamily="34" charset="-122"/>
                 <a:cs typeface="Times New Roman" pitchFamily="34" charset="-120"/>
               </a:rPr>
-              <a:t>B) Stages 3, 4 and 5 (continued)</a:t>
+              <a:t>A) Strengths</a:t>
             </a:r>
             <a:endParaRPr lang="en-US" sz="3200" dirty="0"/>
           </a:p>
@@ -18234,8 +18145,8 @@
         </p:nvSpPr>
         <p:spPr>
           <a:xfrm>
-            <a:off x="5349240" y="2240280"/>
-            <a:ext cx="6522415" cy="4206240"/>
+            <a:off x="2697480" y="2240280"/>
+            <a:ext cx="9174175" cy="4206240"/>
           </a:xfrm>
           <a:prstGeom prst="rect">
             <a:avLst/>
@@ -18254,7 +18165,7 @@
               <a:buNone/>
             </a:pPr>
             <a:r>
-              <a:rPr lang="en-US" sz="4000" b="1" dirty="0">
+              <a:rPr lang="en-US" sz="4000" i="1" dirty="0">
                 <a:solidFill>
                   <a:srgbClr val="111111"/>
                 </a:solidFill>
@@ -18262,8 +18173,11 @@
                 <a:ea typeface="Times New Roman" pitchFamily="34" charset="-122"/>
                 <a:cs typeface="Times New Roman" pitchFamily="34" charset="-120"/>
               </a:rPr>
-              <a:t>Society in Stage 3: </a:t>
-            </a:r>
+              <a:t>The model has the following strengths:</a:t>
+            </a:r>
+            <a:endParaRPr lang="en-US" sz="4000" dirty="0"/>
+          </a:p>
+          <a:p>
             <a:pPr algn="l" indent="0" marL="0">
               <a:spcAft>
                 <a:spcPts val="800"/>
@@ -18271,7 +18185,7 @@
               <a:buNone/>
             </a:pPr>
             <a:r>
-              <a:rPr lang="en-US" sz="4000" dirty="0">
+              <a:rPr lang="en-US" sz="4000" b="1" dirty="0">
                 <a:solidFill>
                   <a:srgbClr val="111111"/>
                 </a:solidFill>
@@ -18279,7 +18193,24 @@
                 <a:ea typeface="Times New Roman" pitchFamily="34" charset="-122"/>
                 <a:cs typeface="Times New Roman" pitchFamily="34" charset="-120"/>
               </a:rPr>
-              <a:t>Towns and industry grow, and women gain education and contraception (Rostow's drive to maturity).</a:t>
+              <a:t>A simple framework: </a:t>
+            </a:r>
+            <a:pPr algn="l" indent="0" marL="0">
+              <a:spcAft>
+                <a:spcPts val="800"/>
+              </a:spcAft>
+              <a:buNone/>
+            </a:pPr>
+            <a:r>
+              <a:rPr lang="en-US" sz="4000" dirty="0">
+                <a:solidFill>
+                  <a:srgbClr val="111111"/>
+                </a:solidFill>
+                <a:latin typeface="Times New Roman" pitchFamily="34" charset="0"/>
+                <a:ea typeface="Times New Roman" pitchFamily="34" charset="-122"/>
+                <a:cs typeface="Times New Roman" pitchFamily="34" charset="-120"/>
+              </a:rPr>
+              <a:t>It gives a simple way to understand how population changes with development. It is easy to apply to most countries and to compare them.</a:t>
             </a:r>
             <a:endParaRPr lang="en-US" sz="4000" dirty="0"/>
           </a:p>
@@ -18414,7 +18345,7 @@
         <p:spPr>
           <a:xfrm>
             <a:off x="0" y="658368"/>
-            <a:ext cx="5120640" cy="5833872"/>
+            <a:ext cx="2468880" cy="5833872"/>
           </a:xfrm>
           <a:prstGeom prst="rect">
             <a:avLst/>
@@ -18429,8 +18360,8 @@
         </p:nvSpPr>
         <p:spPr>
           <a:xfrm>
-            <a:off x="5349240" y="1005840"/>
-            <a:ext cx="6522415" cy="731520"/>
+            <a:off x="2697480" y="1005840"/>
+            <a:ext cx="9174175" cy="731520"/>
           </a:xfrm>
           <a:prstGeom prst="rect">
             <a:avLst/>
@@ -18456,7 +18387,7 @@
                 <a:ea typeface="Times New Roman" pitchFamily="34" charset="-122"/>
                 <a:cs typeface="Times New Roman" pitchFamily="34" charset="-120"/>
               </a:rPr>
-              <a:t>2. The Stages of the Model</a:t>
+              <a:t>3. Appraisal of the Model</a:t>
             </a:r>
             <a:endParaRPr lang="en-US" sz="3600" dirty="0"/>
           </a:p>
@@ -18470,8 +18401,8 @@
         </p:nvSpPr>
         <p:spPr>
           <a:xfrm>
-            <a:off x="5349240" y="1737360"/>
-            <a:ext cx="6522415" cy="457200"/>
+            <a:off x="2697480" y="1737360"/>
+            <a:ext cx="9174175" cy="457200"/>
           </a:xfrm>
           <a:prstGeom prst="rect">
             <a:avLst/>
@@ -18495,7 +18426,7 @@
                 <a:ea typeface="Times New Roman" pitchFamily="34" charset="-122"/>
                 <a:cs typeface="Times New Roman" pitchFamily="34" charset="-120"/>
               </a:rPr>
-              <a:t>B) Stages 3, 4 and 5 (continued)</a:t>
+              <a:t>A) Strengths</a:t>
             </a:r>
             <a:endParaRPr lang="en-US" sz="3200" dirty="0"/>
           </a:p>
@@ -18509,8 +18440,8 @@
         </p:nvSpPr>
         <p:spPr>
           <a:xfrm>
-            <a:off x="5349240" y="2240280"/>
-            <a:ext cx="6522415" cy="4206240"/>
+            <a:off x="2697480" y="2240280"/>
+            <a:ext cx="9174175" cy="4206240"/>
           </a:xfrm>
           <a:prstGeom prst="rect">
             <a:avLst/>
@@ -18537,7 +18468,7 @@
                 <a:ea typeface="Times New Roman" pitchFamily="34" charset="-122"/>
                 <a:cs typeface="Times New Roman" pitchFamily="34" charset="-120"/>
               </a:rPr>
-              <a:t>Stage 4 (low stationary): </a:t>
+              <a:t>The role of development: </a:t>
             </a:r>
             <a:pPr algn="l" indent="0" marL="0">
               <a:spcAft>
@@ -18554,7 +18485,7 @@
                 <a:ea typeface="Times New Roman" pitchFamily="34" charset="-122"/>
                 <a:cs typeface="Times New Roman" pitchFamily="34" charset="-120"/>
               </a:rPr>
-              <a:t>Birth and death rates are both low, so growth is very slow or zero, as in the USA and France (high mass consumption).</a:t>
+              <a:t>It shows the importance of social and economic factors, such as health, education and urbanisation. It helps to predict how the population of a country will change.</a:t>
             </a:r>
             <a:endParaRPr lang="en-US" sz="4000" dirty="0"/>
           </a:p>
@@ -18689,7 +18620,7 @@
         <p:spPr>
           <a:xfrm>
             <a:off x="0" y="658368"/>
-            <a:ext cx="5120640" cy="5833872"/>
+            <a:ext cx="1463040" cy="5833872"/>
           </a:xfrm>
           <a:prstGeom prst="rect">
             <a:avLst/>
@@ -18704,8 +18635,8 @@
         </p:nvSpPr>
         <p:spPr>
           <a:xfrm>
-            <a:off x="5349240" y="1005840"/>
-            <a:ext cx="6522415" cy="731520"/>
+            <a:off x="1691640" y="1005840"/>
+            <a:ext cx="10180015" cy="731520"/>
           </a:xfrm>
           <a:prstGeom prst="rect">
             <a:avLst/>
@@ -18731,7 +18662,7 @@
                 <a:ea typeface="Times New Roman" pitchFamily="34" charset="-122"/>
                 <a:cs typeface="Times New Roman" pitchFamily="34" charset="-120"/>
               </a:rPr>
-              <a:t>2. The Stages of the Model</a:t>
+              <a:t>3. Appraisal of the Model</a:t>
             </a:r>
             <a:endParaRPr lang="en-US" sz="3600" dirty="0"/>
           </a:p>
@@ -18745,8 +18676,8 @@
         </p:nvSpPr>
         <p:spPr>
           <a:xfrm>
-            <a:off x="5349240" y="1737360"/>
-            <a:ext cx="6522415" cy="457200"/>
+            <a:off x="1691640" y="1737360"/>
+            <a:ext cx="10180015" cy="457200"/>
           </a:xfrm>
           <a:prstGeom prst="rect">
             <a:avLst/>
@@ -18770,7 +18701,7 @@
                 <a:ea typeface="Times New Roman" pitchFamily="34" charset="-122"/>
                 <a:cs typeface="Times New Roman" pitchFamily="34" charset="-120"/>
               </a:rPr>
-              <a:t>B) Stages 3, 4 and 5 (continued)</a:t>
+              <a:t>B) Weaknesses</a:t>
             </a:r>
             <a:endParaRPr lang="en-US" sz="3200" dirty="0"/>
           </a:p>
@@ -18784,8 +18715,8 @@
         </p:nvSpPr>
         <p:spPr>
           <a:xfrm>
-            <a:off x="5349240" y="2240280"/>
-            <a:ext cx="6522415" cy="4206240"/>
+            <a:off x="1691640" y="2240280"/>
+            <a:ext cx="10180015" cy="4206240"/>
           </a:xfrm>
           <a:prstGeom prst="rect">
             <a:avLst/>
@@ -18804,7 +18735,7 @@
               <a:buNone/>
             </a:pPr>
             <a:r>
-              <a:rPr lang="en-US" sz="4000" b="1" dirty="0">
+              <a:rPr lang="en-US" sz="4000" i="1" dirty="0">
                 <a:solidFill>
                   <a:srgbClr val="111111"/>
                 </a:solidFill>
@@ -18812,8 +18743,11 @@
                 <a:ea typeface="Times New Roman" pitchFamily="34" charset="-122"/>
                 <a:cs typeface="Times New Roman" pitchFamily="34" charset="-120"/>
               </a:rPr>
-              <a:t>Stage 5 (declining): </a:t>
-            </a:r>
+              <a:t>The model has the following weaknesses:</a:t>
+            </a:r>
+            <a:endParaRPr lang="en-US" sz="4000" dirty="0"/>
+          </a:p>
+          <a:p>
             <a:pPr algn="l" indent="0" marL="0">
               <a:spcAft>
                 <a:spcPts val="800"/>
@@ -18821,7 +18755,7 @@
               <a:buNone/>
             </a:pPr>
             <a:r>
-              <a:rPr lang="en-US" sz="4000" dirty="0">
+              <a:rPr lang="en-US" sz="4000" b="1" dirty="0">
                 <a:solidFill>
                   <a:srgbClr val="111111"/>
                 </a:solidFill>
@@ -18829,7 +18763,24 @@
                 <a:ea typeface="Times New Roman" pitchFamily="34" charset="-122"/>
                 <a:cs typeface="Times New Roman" pitchFamily="34" charset="-120"/>
               </a:rPr>
-              <a:t>Birth rates fall below death rates, so the population declines and ages, as in Japan, Germany and Italy.</a:t>
+              <a:t>It is Eurocentric: </a:t>
+            </a:r>
+            <a:pPr algn="l" indent="0" marL="0">
+              <a:spcAft>
+                <a:spcPts val="800"/>
+              </a:spcAft>
+              <a:buNone/>
+            </a:pPr>
+            <a:r>
+              <a:rPr lang="en-US" sz="4000" dirty="0">
+                <a:solidFill>
+                  <a:srgbClr val="111111"/>
+                </a:solidFill>
+                <a:latin typeface="Times New Roman" pitchFamily="34" charset="0"/>
+                <a:ea typeface="Times New Roman" pitchFamily="34" charset="-122"/>
+                <a:cs typeface="Times New Roman" pitchFamily="34" charset="-120"/>
+              </a:rPr>
+              <a:t>It is based on the history of Western countries. In Africa, deaths fell because of imported medicine, not because of industrialisation, so the stages do not happen in the same way.</a:t>
             </a:r>
             <a:endParaRPr lang="en-US" sz="4000" dirty="0"/>
           </a:p>
@@ -18947,9 +18898,150 @@
           </a:p>
         </p:txBody>
       </p:sp>
+      <p:sp>
+        <p:nvSpPr>
+          <p:cNvPr id="3" name="Text 1"/>
+          <p:cNvSpPr/>
+          <p:nvPr/>
+        </p:nvSpPr>
+        <p:spPr>
+          <a:xfrm>
+            <a:off x="365760" y="1005840"/>
+            <a:ext cx="11460175" cy="731520"/>
+          </a:xfrm>
+          <a:prstGeom prst="rect">
+            <a:avLst/>
+          </a:prstGeom>
+          <a:noFill/>
+          <a:ln/>
+        </p:spPr>
+        <p:txBody>
+          <a:bodyPr wrap="square" lIns="0" tIns="0" rIns="0" bIns="0" rtlCol="0" anchor="ctr">
+            <a:normAutofit/>
+          </a:bodyPr>
+          <a:lstStyle/>
+          <a:p>
+            <a:pPr algn="ctr" indent="0" marL="0">
+              <a:buNone/>
+            </a:pPr>
+            <a:r>
+              <a:rPr lang="en-US" sz="3600" b="1" dirty="0">
+                <a:solidFill>
+                  <a:srgbClr val="990011"/>
+                </a:solidFill>
+                <a:latin typeface="Times New Roman" pitchFamily="34" charset="0"/>
+                <a:ea typeface="Times New Roman" pitchFamily="34" charset="-122"/>
+                <a:cs typeface="Times New Roman" pitchFamily="34" charset="-120"/>
+              </a:rPr>
+              <a:t>3. Appraisal of the Model</a:t>
+            </a:r>
+            <a:endParaRPr lang="en-US" sz="3600" dirty="0"/>
+          </a:p>
+        </p:txBody>
+      </p:sp>
+      <p:sp>
+        <p:nvSpPr>
+          <p:cNvPr id="4" name="Text 2"/>
+          <p:cNvSpPr/>
+          <p:nvPr/>
+        </p:nvSpPr>
+        <p:spPr>
+          <a:xfrm>
+            <a:off x="365760" y="1737360"/>
+            <a:ext cx="6035040" cy="457200"/>
+          </a:xfrm>
+          <a:prstGeom prst="rect">
+            <a:avLst/>
+          </a:prstGeom>
+          <a:noFill/>
+          <a:ln/>
+        </p:spPr>
+        <p:txBody>
+          <a:bodyPr wrap="square" lIns="0" tIns="0" rIns="0" bIns="0" rtlCol="0" anchor="ctr">
+            <a:normAutofit/>
+          </a:bodyPr>
+          <a:lstStyle/>
+          <a:p>
+            <a:pPr algn="l" indent="0" marL="0">
+              <a:buNone/>
+            </a:pPr>
+            <a:r>
+              <a:rPr lang="en-US" sz="3000" b="1" dirty="0">
+                <a:solidFill>
+                  <a:srgbClr val="990011"/>
+                </a:solidFill>
+                <a:latin typeface="Times New Roman" pitchFamily="34" charset="0"/>
+                <a:ea typeface="Times New Roman" pitchFamily="34" charset="-122"/>
+                <a:cs typeface="Times New Roman" pitchFamily="34" charset="-120"/>
+              </a:rPr>
+              <a:t>B) Weaknesses</a:t>
+            </a:r>
+            <a:endParaRPr lang="en-US" sz="3000" dirty="0"/>
+          </a:p>
+        </p:txBody>
+      </p:sp>
+      <p:sp>
+        <p:nvSpPr>
+          <p:cNvPr id="5" name="Text 3"/>
+          <p:cNvSpPr/>
+          <p:nvPr/>
+        </p:nvSpPr>
+        <p:spPr>
+          <a:xfrm>
+            <a:off x="365760" y="2240280"/>
+            <a:ext cx="6035040" cy="4160520"/>
+          </a:xfrm>
+          <a:prstGeom prst="rect">
+            <a:avLst/>
+          </a:prstGeom>
+          <a:noFill/>
+          <a:ln/>
+        </p:spPr>
+        <p:txBody>
+          <a:bodyPr wrap="square" lIns="0" tIns="0" rIns="0" bIns="0" rtlCol="0" anchor="t"/>
+          <a:lstStyle/>
+          <a:p>
+            <a:pPr algn="l" indent="0" marL="0">
+              <a:spcAft>
+                <a:spcPts val="800"/>
+              </a:spcAft>
+              <a:buNone/>
+            </a:pPr>
+            <a:r>
+              <a:rPr lang="en-US" sz="3600" b="1" dirty="0">
+                <a:solidFill>
+                  <a:srgbClr val="111111"/>
+                </a:solidFill>
+                <a:latin typeface="Times New Roman" pitchFamily="34" charset="0"/>
+                <a:ea typeface="Times New Roman" pitchFamily="34" charset="-122"/>
+                <a:cs typeface="Times New Roman" pitchFamily="34" charset="-120"/>
+              </a:rPr>
+              <a:t>It ignores other causes: </a:t>
+            </a:r>
+            <a:pPr algn="l" indent="0" marL="0">
+              <a:spcAft>
+                <a:spcPts val="800"/>
+              </a:spcAft>
+              <a:buNone/>
+            </a:pPr>
+            <a:r>
+              <a:rPr lang="en-US" sz="3600" dirty="0">
+                <a:solidFill>
+                  <a:srgbClr val="111111"/>
+                </a:solidFill>
+                <a:latin typeface="Times New Roman" pitchFamily="34" charset="0"/>
+                <a:ea typeface="Times New Roman" pitchFamily="34" charset="-122"/>
+                <a:cs typeface="Times New Roman" pitchFamily="34" charset="-120"/>
+              </a:rPr>
+              <a:t>It does not include wars, epidemics such as HIV/AIDS, migration or policies such as China's one-child policy. These can change population very quickly.</a:t>
+            </a:r>
+            <a:endParaRPr lang="en-US" sz="3600" dirty="0"/>
+          </a:p>
+        </p:txBody>
+      </p:sp>
       <p:pic>
         <p:nvPicPr>
-          <p:cNvPr id="3" name="Image 0" descr="/home/claude/f4/img/minesec_sheet.png">    </p:cNvPr>
+          <p:cNvPr id="6" name="Image 0" descr="/home/claude/f4/img/v2/usa_onechild.jpg">    </p:cNvPr>
           <p:cNvPicPr>
             <a:picLocks noChangeAspect="1"/>
           </p:cNvPicPr>
@@ -18963,8 +19055,8 @@
         </p:blipFill>
         <p:spPr>
           <a:xfrm>
-            <a:off x="0" y="658368"/>
-            <a:ext cx="1463040" cy="5833872"/>
+            <a:off x="6537960" y="2400897"/>
+            <a:ext cx="5470855" cy="3034615"/>
           </a:xfrm>
           <a:prstGeom prst="rect">
             <a:avLst/>
@@ -18973,14 +19065,14 @@
       </p:pic>
       <p:sp>
         <p:nvSpPr>
-          <p:cNvPr id="4" name="Text 1"/>
+          <p:cNvPr id="7" name="Text 4"/>
           <p:cNvSpPr/>
           <p:nvPr/>
         </p:nvSpPr>
         <p:spPr>
           <a:xfrm>
-            <a:off x="1691640" y="1005840"/>
-            <a:ext cx="10180015" cy="731520"/>
+            <a:off x="6537960" y="6089904"/>
+            <a:ext cx="5470855" cy="347472"/>
           </a:xfrm>
           <a:prstGeom prst="rect">
             <a:avLst/>
@@ -18989,130 +19081,24 @@
           <a:ln/>
         </p:spPr>
         <p:txBody>
-          <a:bodyPr wrap="square" lIns="0" tIns="0" rIns="0" bIns="0" rtlCol="0" anchor="ctr">
-            <a:normAutofit/>
-          </a:bodyPr>
+          <a:bodyPr wrap="square" lIns="0" tIns="0" rIns="0" bIns="0" rtlCol="0" anchor="ctr"/>
           <a:lstStyle/>
           <a:p>
             <a:pPr algn="ctr" indent="0" marL="0">
               <a:buNone/>
             </a:pPr>
             <a:r>
-              <a:rPr lang="en-US" sz="3600" b="1" dirty="0">
-                <a:solidFill>
-                  <a:srgbClr val="990011"/>
+              <a:rPr lang="en-US" sz="1600" i="1" dirty="0">
+                <a:solidFill>
+                  <a:srgbClr val="555555"/>
                 </a:solidFill>
                 <a:latin typeface="Times New Roman" pitchFamily="34" charset="0"/>
                 <a:ea typeface="Times New Roman" pitchFamily="34" charset="-122"/>
                 <a:cs typeface="Times New Roman" pitchFamily="34" charset="-120"/>
               </a:rPr>
-              <a:t>3. Appraisal of the Model</a:t>
-            </a:r>
-            <a:endParaRPr lang="en-US" sz="3600" dirty="0"/>
-          </a:p>
-        </p:txBody>
-      </p:sp>
-      <p:sp>
-        <p:nvSpPr>
-          <p:cNvPr id="5" name="Text 2"/>
-          <p:cNvSpPr/>
-          <p:nvPr/>
-        </p:nvSpPr>
-        <p:spPr>
-          <a:xfrm>
-            <a:off x="1691640" y="1783080"/>
-            <a:ext cx="10180015" cy="4663440"/>
-          </a:xfrm>
-          <a:prstGeom prst="rect">
-            <a:avLst/>
-          </a:prstGeom>
-          <a:noFill/>
-          <a:ln/>
-        </p:spPr>
-        <p:txBody>
-          <a:bodyPr wrap="square" lIns="0" tIns="0" rIns="0" bIns="0" rtlCol="0" anchor="t"/>
-          <a:lstStyle/>
-          <a:p>
-            <a:pPr algn="l" indent="0" marL="0">
-              <a:spcAft>
-                <a:spcPts val="800"/>
-              </a:spcAft>
-              <a:buNone/>
-            </a:pPr>
-            <a:r>
-              <a:rPr lang="en-US" sz="4000" i="1" dirty="0">
-                <a:solidFill>
-                  <a:srgbClr val="111111"/>
-                </a:solidFill>
-                <a:latin typeface="Times New Roman" pitchFamily="34" charset="0"/>
-                <a:ea typeface="Times New Roman" pitchFamily="34" charset="-122"/>
-                <a:cs typeface="Times New Roman" pitchFamily="34" charset="-120"/>
-              </a:rPr>
-              <a:t>The strengths and weaknesses of the model are the following:</a:t>
-            </a:r>
-            <a:endParaRPr lang="en-US" sz="4000" dirty="0"/>
-          </a:p>
-          <a:p>
-            <a:pPr algn="l" indent="0" marL="0">
-              <a:spcAft>
-                <a:spcPts val="800"/>
-              </a:spcAft>
-              <a:buNone/>
-            </a:pPr>
-            <a:r>
-              <a:rPr lang="en-US" sz="4000" b="1" dirty="0">
-                <a:solidFill>
-                  <a:srgbClr val="111111"/>
-                </a:solidFill>
-                <a:latin typeface="Times New Roman" pitchFamily="34" charset="0"/>
-                <a:ea typeface="Times New Roman" pitchFamily="34" charset="-122"/>
-                <a:cs typeface="Times New Roman" pitchFamily="34" charset="-120"/>
-              </a:rPr>
-              <a:t>Strengths:</a:t>
-            </a:r>
-            <a:endParaRPr lang="en-US" sz="4000" dirty="0"/>
-          </a:p>
-          <a:p>
-            <a:pPr algn="l" marL="342900" indent="-342900">
-              <a:spcAft>
-                <a:spcPts val="800"/>
-              </a:spcAft>
-              <a:buSzPct val="100000"/>
-              <a:buChar char="•"/>
-            </a:pPr>
-            <a:r>
-              <a:rPr lang="en-US" sz="4000" dirty="0">
-                <a:solidFill>
-                  <a:srgbClr val="111111"/>
-                </a:solidFill>
-                <a:latin typeface="Times New Roman" pitchFamily="34" charset="0"/>
-                <a:ea typeface="Times New Roman" pitchFamily="34" charset="-122"/>
-                <a:cs typeface="Times New Roman" pitchFamily="34" charset="-120"/>
-              </a:rPr>
-              <a:t>It gives a simple framework to understand population change with development.</a:t>
-            </a:r>
-            <a:endParaRPr lang="en-US" sz="4000" dirty="0"/>
-          </a:p>
-          <a:p>
-            <a:pPr algn="l" marL="342900" indent="-342900">
-              <a:spcAft>
-                <a:spcPts val="800"/>
-              </a:spcAft>
-              <a:buSzPct val="100000"/>
-              <a:buChar char="•"/>
-            </a:pPr>
-            <a:r>
-              <a:rPr lang="en-US" sz="4000" dirty="0">
-                <a:solidFill>
-                  <a:srgbClr val="111111"/>
-                </a:solidFill>
-                <a:latin typeface="Times New Roman" pitchFamily="34" charset="0"/>
-                <a:ea typeface="Times New Roman" pitchFamily="34" charset="-122"/>
-                <a:cs typeface="Times New Roman" pitchFamily="34" charset="-120"/>
-              </a:rPr>
-              <a:t>It is easy to apply to most countries.</a:t>
-            </a:r>
-            <a:endParaRPr lang="en-US" sz="4000" dirty="0"/>
+              <a:t>Illustration: the one-child policy</a:t>
+            </a:r>
+            <a:endParaRPr lang="en-US" sz="1600" dirty="0"/>
           </a:p>
         </p:txBody>
       </p:sp>
@@ -19464,7 +19450,7 @@
         <p:spPr>
           <a:xfrm>
             <a:off x="0" y="658368"/>
-            <a:ext cx="3840480" cy="5833872"/>
+            <a:ext cx="2468880" cy="5833872"/>
           </a:xfrm>
           <a:prstGeom prst="rect">
             <a:avLst/>
@@ -19479,8 +19465,8 @@
         </p:nvSpPr>
         <p:spPr>
           <a:xfrm>
-            <a:off x="4069080" y="1005840"/>
-            <a:ext cx="7802575" cy="731520"/>
+            <a:off x="2697480" y="1005840"/>
+            <a:ext cx="9174175" cy="731520"/>
           </a:xfrm>
           <a:prstGeom prst="rect">
             <a:avLst/>
@@ -19506,7 +19492,7 @@
                 <a:ea typeface="Times New Roman" pitchFamily="34" charset="-122"/>
                 <a:cs typeface="Times New Roman" pitchFamily="34" charset="-120"/>
               </a:rPr>
-              <a:t>3. Appraisal of the Model (continued)</a:t>
+              <a:t>3. Appraisal of the Model</a:t>
             </a:r>
             <a:endParaRPr lang="en-US" sz="3600" dirty="0"/>
           </a:p>
@@ -19520,8 +19506,8 @@
         </p:nvSpPr>
         <p:spPr>
           <a:xfrm>
-            <a:off x="4069080" y="1783080"/>
-            <a:ext cx="7802575" cy="4663440"/>
+            <a:off x="2697480" y="1737360"/>
+            <a:ext cx="9174175" cy="457200"/>
           </a:xfrm>
           <a:prstGeom prst="rect">
             <a:avLst/>
@@ -19530,29 +19516,47 @@
           <a:ln/>
         </p:spPr>
         <p:txBody>
-          <a:bodyPr wrap="square" lIns="0" tIns="0" rIns="0" bIns="0" rtlCol="0" anchor="t"/>
-          <a:lstStyle/>
-          <a:p>
-            <a:pPr algn="l" marL="342900" indent="-342900">
-              <a:spcAft>
-                <a:spcPts val="800"/>
-              </a:spcAft>
-              <a:buSzPct val="100000"/>
-              <a:buChar char="•"/>
-            </a:pPr>
-            <a:r>
-              <a:rPr lang="en-US" sz="4000" dirty="0">
-                <a:solidFill>
-                  <a:srgbClr val="111111"/>
+          <a:bodyPr wrap="square" lIns="0" tIns="0" rIns="0" bIns="0" rtlCol="0" anchor="ctr"/>
+          <a:lstStyle/>
+          <a:p>
+            <a:pPr algn="l" indent="0" marL="0">
+              <a:buNone/>
+            </a:pPr>
+            <a:r>
+              <a:rPr lang="en-US" sz="3200" b="1" dirty="0">
+                <a:solidFill>
+                  <a:srgbClr val="990011"/>
                 </a:solidFill>
                 <a:latin typeface="Times New Roman" pitchFamily="34" charset="0"/>
                 <a:ea typeface="Times New Roman" pitchFamily="34" charset="-122"/>
                 <a:cs typeface="Times New Roman" pitchFamily="34" charset="-120"/>
               </a:rPr>
-              <a:t>It shows the importance of social and economic factors.</a:t>
-            </a:r>
-            <a:endParaRPr lang="en-US" sz="4000" dirty="0"/>
-          </a:p>
+              <a:t>B) Weaknesses</a:t>
+            </a:r>
+            <a:endParaRPr lang="en-US" sz="3200" dirty="0"/>
+          </a:p>
+        </p:txBody>
+      </p:sp>
+      <p:sp>
+        <p:nvSpPr>
+          <p:cNvPr id="6" name="Text 3"/>
+          <p:cNvSpPr/>
+          <p:nvPr/>
+        </p:nvSpPr>
+        <p:spPr>
+          <a:xfrm>
+            <a:off x="2697480" y="2240280"/>
+            <a:ext cx="9174175" cy="4206240"/>
+          </a:xfrm>
+          <a:prstGeom prst="rect">
+            <a:avLst/>
+          </a:prstGeom>
+          <a:noFill/>
+          <a:ln/>
+        </p:spPr>
+        <p:txBody>
+          <a:bodyPr wrap="square" lIns="0" tIns="0" rIns="0" bIns="0" rtlCol="0" anchor="t"/>
+          <a:lstStyle/>
           <a:p>
             <a:pPr algn="l" indent="0" marL="0">
               <a:spcAft>
@@ -19569,7 +19573,7 @@
                 <a:ea typeface="Times New Roman" pitchFamily="34" charset="-122"/>
                 <a:cs typeface="Times New Roman" pitchFamily="34" charset="-120"/>
               </a:rPr>
-              <a:t>Eurocentric: </a:t>
+              <a:t>Time scales and stage 5: </a:t>
             </a:r>
             <a:pPr algn="l" indent="0" marL="0">
               <a:spcAft>
@@ -19586,7 +19590,7 @@
                 <a:ea typeface="Times New Roman" pitchFamily="34" charset="-122"/>
                 <a:cs typeface="Times New Roman" pitchFamily="34" charset="-120"/>
               </a:rPr>
-              <a:t>It is based on Western countries; in Africa, deaths fell because of imported medicine, not because of industrialisation.</a:t>
+              <a:t>Countries pass through the stages at very different speeds, much faster today than Europe did. The original model had only four stages, and the fifth was added when some countries began to decline.</a:t>
             </a:r>
             <a:endParaRPr lang="en-US" sz="4000" dirty="0"/>
           </a:p>
@@ -19739,7 +19743,7 @@
                 <a:ea typeface="Times New Roman" pitchFamily="34" charset="-122"/>
                 <a:cs typeface="Times New Roman" pitchFamily="34" charset="-120"/>
               </a:rPr>
-              <a:t>3. Appraisal of the Model</a:t>
+              <a:t>4. Application to Cameroon</a:t>
             </a:r>
             <a:endParaRPr lang="en-US" sz="3600" dirty="0"/>
           </a:p>
@@ -19754,7 +19758,7 @@
         <p:spPr>
           <a:xfrm>
             <a:off x="365760" y="1783080"/>
-            <a:ext cx="4846320" cy="4617720"/>
+            <a:ext cx="6035040" cy="4617720"/>
           </a:xfrm>
           <a:prstGeom prst="rect">
             <a:avLst/>
@@ -19773,7 +19777,7 @@
               <a:buNone/>
             </a:pPr>
             <a:r>
-              <a:rPr lang="en-US" sz="3600" b="1" dirty="0">
+              <a:rPr lang="en-US" sz="3600" i="1" dirty="0">
                 <a:solidFill>
                   <a:srgbClr val="111111"/>
                 </a:solidFill>
@@ -19781,8 +19785,11 @@
                 <a:ea typeface="Times New Roman" pitchFamily="34" charset="-122"/>
                 <a:cs typeface="Times New Roman" pitchFamily="34" charset="-120"/>
               </a:rPr>
-              <a:t>Ignores other causes: </a:t>
-            </a:r>
+              <a:t>The model applies to Cameroon as follows:</a:t>
+            </a:r>
+            <a:endParaRPr lang="en-US" sz="3600" dirty="0"/>
+          </a:p>
+          <a:p>
             <a:pPr algn="l" indent="0" marL="0">
               <a:spcAft>
                 <a:spcPts val="800"/>
@@ -19790,7 +19797,7 @@
               <a:buNone/>
             </a:pPr>
             <a:r>
-              <a:rPr lang="en-US" sz="3600" dirty="0">
+              <a:rPr lang="en-US" sz="3600" b="1" dirty="0">
                 <a:solidFill>
                   <a:srgbClr val="111111"/>
                 </a:solidFill>
@@ -19798,7 +19805,24 @@
                 <a:ea typeface="Times New Roman" pitchFamily="34" charset="-122"/>
                 <a:cs typeface="Times New Roman" pitchFamily="34" charset="-120"/>
               </a:rPr>
-              <a:t>It does not include wars, epidemics such as HIV/AIDS, migration or policies such as China's one-child policy.</a:t>
+              <a:t>Current stage: </a:t>
+            </a:r>
+            <a:pPr algn="l" indent="0" marL="0">
+              <a:spcAft>
+                <a:spcPts val="800"/>
+              </a:spcAft>
+              <a:buNone/>
+            </a:pPr>
+            <a:r>
+              <a:rPr lang="en-US" sz="3600" dirty="0">
+                <a:solidFill>
+                  <a:srgbClr val="111111"/>
+                </a:solidFill>
+                <a:latin typeface="Times New Roman" pitchFamily="34" charset="0"/>
+                <a:ea typeface="Times New Roman" pitchFamily="34" charset="-122"/>
+                <a:cs typeface="Times New Roman" pitchFamily="34" charset="-120"/>
+              </a:rPr>
+              <a:t>Cameroon is at the end of stage 2 and entering stage 3. Its death rate has fallen a lot, and its birth rate is beginning to fall.</a:t>
             </a:r>
             <a:endParaRPr lang="en-US" sz="3600" dirty="0"/>
           </a:p>
@@ -19806,7 +19830,7 @@
       </p:sp>
       <p:pic>
         <p:nvPicPr>
-          <p:cNvPr id="5" name="Image 0" descr="/home/claude/f4/img/v2/usa_onechild.jpg">    </p:cNvPr>
+          <p:cNvPr id="5" name="Image 0" descr="/home/claude/f4/img/v2/cmr_rates_big.png">    </p:cNvPr>
           <p:cNvPicPr>
             <a:picLocks noChangeAspect="1"/>
           </p:cNvPicPr>
@@ -19820,8 +19844,8 @@
         </p:blipFill>
         <p:spPr>
           <a:xfrm>
-            <a:off x="5349240" y="2071212"/>
-            <a:ext cx="6659575" cy="3693983"/>
+            <a:off x="6537960" y="2721454"/>
+            <a:ext cx="5470855" cy="2393499"/>
           </a:xfrm>
           <a:prstGeom prst="rect">
             <a:avLst/>
@@ -19836,8 +19860,8 @@
         </p:nvSpPr>
         <p:spPr>
           <a:xfrm>
-            <a:off x="5349240" y="6089904"/>
-            <a:ext cx="6659575" cy="347472"/>
+            <a:off x="6537960" y="6089904"/>
+            <a:ext cx="5470855" cy="347472"/>
           </a:xfrm>
           <a:prstGeom prst="rect">
             <a:avLst/>
@@ -19861,7 +19885,7 @@
                 <a:ea typeface="Times New Roman" pitchFamily="34" charset="-122"/>
                 <a:cs typeface="Times New Roman" pitchFamily="34" charset="-120"/>
               </a:rPr>
-              <a:t>Illustration: a population policy</a:t>
+              <a:t>Illustration: birth and death rates of Cameroon</a:t>
             </a:r>
             <a:endParaRPr lang="en-US" sz="1600" dirty="0"/>
           </a:p>
@@ -19996,7 +20020,7 @@
         <p:spPr>
           <a:xfrm>
             <a:off x="0" y="658368"/>
-            <a:ext cx="3840480" cy="5833872"/>
+            <a:ext cx="5120640" cy="5833872"/>
           </a:xfrm>
           <a:prstGeom prst="rect">
             <a:avLst/>
@@ -20011,8 +20035,8 @@
         </p:nvSpPr>
         <p:spPr>
           <a:xfrm>
-            <a:off x="4069080" y="1005840"/>
-            <a:ext cx="7802575" cy="731520"/>
+            <a:off x="5349240" y="1005840"/>
+            <a:ext cx="6522415" cy="731520"/>
           </a:xfrm>
           <a:prstGeom prst="rect">
             <a:avLst/>
@@ -20038,7 +20062,7 @@
                 <a:ea typeface="Times New Roman" pitchFamily="34" charset="-122"/>
                 <a:cs typeface="Times New Roman" pitchFamily="34" charset="-120"/>
               </a:rPr>
-              <a:t>3. Appraisal of the Model</a:t>
+              <a:t>4. Application to Cameroon</a:t>
             </a:r>
             <a:endParaRPr lang="en-US" sz="3600" dirty="0"/>
           </a:p>
@@ -20052,8 +20076,8 @@
         </p:nvSpPr>
         <p:spPr>
           <a:xfrm>
-            <a:off x="4069080" y="1783080"/>
-            <a:ext cx="7802575" cy="4663440"/>
+            <a:off x="5349240" y="1783080"/>
+            <a:ext cx="6522415" cy="4663440"/>
           </a:xfrm>
           <a:prstGeom prst="rect">
             <a:avLst/>
@@ -20080,7 +20104,7 @@
                 <a:ea typeface="Times New Roman" pitchFamily="34" charset="-122"/>
                 <a:cs typeface="Times New Roman" pitchFamily="34" charset="-120"/>
               </a:rPr>
-              <a:t>Time scales: </a:t>
+              <a:t>A high birth rate: </a:t>
             </a:r>
             <a:pPr algn="l" indent="0" marL="0">
               <a:spcAft>
@@ -20097,44 +20121,7 @@
                 <a:ea typeface="Times New Roman" pitchFamily="34" charset="-122"/>
                 <a:cs typeface="Times New Roman" pitchFamily="34" charset="-120"/>
               </a:rPr>
-              <a:t>Countries pass through the stages at very different speeds.</a:t>
-            </a:r>
-            <a:endParaRPr lang="en-US" sz="4000" dirty="0"/>
-          </a:p>
-          <a:p>
-            <a:pPr algn="l" indent="0" marL="0">
-              <a:spcAft>
-                <a:spcPts val="800"/>
-              </a:spcAft>
-              <a:buNone/>
-            </a:pPr>
-            <a:r>
-              <a:rPr lang="en-US" sz="4000" b="1" dirty="0">
-                <a:solidFill>
-                  <a:srgbClr val="111111"/>
-                </a:solidFill>
-                <a:latin typeface="Times New Roman" pitchFamily="34" charset="0"/>
-                <a:ea typeface="Times New Roman" pitchFamily="34" charset="-122"/>
-                <a:cs typeface="Times New Roman" pitchFamily="34" charset="-120"/>
-              </a:rPr>
-              <a:t>Stage 5 added later: </a:t>
-            </a:r>
-            <a:pPr algn="l" indent="0" marL="0">
-              <a:spcAft>
-                <a:spcPts val="800"/>
-              </a:spcAft>
-              <a:buNone/>
-            </a:pPr>
-            <a:r>
-              <a:rPr lang="en-US" sz="4000" dirty="0">
-                <a:solidFill>
-                  <a:srgbClr val="111111"/>
-                </a:solidFill>
-                <a:latin typeface="Times New Roman" pitchFamily="34" charset="0"/>
-                <a:ea typeface="Times New Roman" pitchFamily="34" charset="-122"/>
-                <a:cs typeface="Times New Roman" pitchFamily="34" charset="-120"/>
-              </a:rPr>
-              <a:t>The original model had only four stages; the fifth was added when some countries began to decline.</a:t>
+              <a:t>The birth rate is still about 35 per 1,000, because of traditions, early marriage and limited family planning. It is falling slowly in the towns.</a:t>
             </a:r>
             <a:endParaRPr lang="en-US" sz="4000" dirty="0"/>
           </a:p>
@@ -20252,129 +20239,9 @@
           </a:p>
         </p:txBody>
       </p:sp>
-      <p:sp>
-        <p:nvSpPr>
-          <p:cNvPr id="3" name="Text 1"/>
-          <p:cNvSpPr/>
-          <p:nvPr/>
-        </p:nvSpPr>
-        <p:spPr>
-          <a:xfrm>
-            <a:off x="365760" y="1005840"/>
-            <a:ext cx="11460175" cy="731520"/>
-          </a:xfrm>
-          <a:prstGeom prst="rect">
-            <a:avLst/>
-          </a:prstGeom>
-          <a:noFill/>
-          <a:ln/>
-        </p:spPr>
-        <p:txBody>
-          <a:bodyPr wrap="square" lIns="0" tIns="0" rIns="0" bIns="0" rtlCol="0" anchor="ctr">
-            <a:normAutofit/>
-          </a:bodyPr>
-          <a:lstStyle/>
-          <a:p>
-            <a:pPr algn="ctr" indent="0" marL="0">
-              <a:buNone/>
-            </a:pPr>
-            <a:r>
-              <a:rPr lang="en-US" sz="3600" b="1" dirty="0">
-                <a:solidFill>
-                  <a:srgbClr val="990011"/>
-                </a:solidFill>
-                <a:latin typeface="Times New Roman" pitchFamily="34" charset="0"/>
-                <a:ea typeface="Times New Roman" pitchFamily="34" charset="-122"/>
-                <a:cs typeface="Times New Roman" pitchFamily="34" charset="-120"/>
-              </a:rPr>
-              <a:t>4. Application to Cameroon</a:t>
-            </a:r>
-            <a:endParaRPr lang="en-US" sz="3600" dirty="0"/>
-          </a:p>
-        </p:txBody>
-      </p:sp>
-      <p:sp>
-        <p:nvSpPr>
-          <p:cNvPr id="4" name="Text 2"/>
-          <p:cNvSpPr/>
-          <p:nvPr/>
-        </p:nvSpPr>
-        <p:spPr>
-          <a:xfrm>
-            <a:off x="365760" y="1783080"/>
-            <a:ext cx="4846320" cy="4617720"/>
-          </a:xfrm>
-          <a:prstGeom prst="rect">
-            <a:avLst/>
-          </a:prstGeom>
-          <a:noFill/>
-          <a:ln/>
-        </p:spPr>
-        <p:txBody>
-          <a:bodyPr wrap="square" lIns="0" tIns="0" rIns="0" bIns="0" rtlCol="0" anchor="t"/>
-          <a:lstStyle/>
-          <a:p>
-            <a:pPr algn="l" indent="0" marL="0">
-              <a:spcAft>
-                <a:spcPts val="800"/>
-              </a:spcAft>
-              <a:buNone/>
-            </a:pPr>
-            <a:r>
-              <a:rPr lang="en-US" sz="3600" i="1" dirty="0">
-                <a:solidFill>
-                  <a:srgbClr val="111111"/>
-                </a:solidFill>
-                <a:latin typeface="Times New Roman" pitchFamily="34" charset="0"/>
-                <a:ea typeface="Times New Roman" pitchFamily="34" charset="-122"/>
-                <a:cs typeface="Times New Roman" pitchFamily="34" charset="-120"/>
-              </a:rPr>
-              <a:t>The model applies to Cameroon as follows:</a:t>
-            </a:r>
-            <a:endParaRPr lang="en-US" sz="3600" dirty="0"/>
-          </a:p>
-          <a:p>
-            <a:pPr algn="l" indent="0" marL="0">
-              <a:spcAft>
-                <a:spcPts val="800"/>
-              </a:spcAft>
-              <a:buNone/>
-            </a:pPr>
-            <a:r>
-              <a:rPr lang="en-US" sz="3600" b="1" dirty="0">
-                <a:solidFill>
-                  <a:srgbClr val="111111"/>
-                </a:solidFill>
-                <a:latin typeface="Times New Roman" pitchFamily="34" charset="0"/>
-                <a:ea typeface="Times New Roman" pitchFamily="34" charset="-122"/>
-                <a:cs typeface="Times New Roman" pitchFamily="34" charset="-120"/>
-              </a:rPr>
-              <a:t>Current stage: </a:t>
-            </a:r>
-            <a:pPr algn="l" indent="0" marL="0">
-              <a:spcAft>
-                <a:spcPts val="800"/>
-              </a:spcAft>
-              <a:buNone/>
-            </a:pPr>
-            <a:r>
-              <a:rPr lang="en-US" sz="3600" dirty="0">
-                <a:solidFill>
-                  <a:srgbClr val="111111"/>
-                </a:solidFill>
-                <a:latin typeface="Times New Roman" pitchFamily="34" charset="0"/>
-                <a:ea typeface="Times New Roman" pitchFamily="34" charset="-122"/>
-                <a:cs typeface="Times New Roman" pitchFamily="34" charset="-120"/>
-              </a:rPr>
-              <a:t>Cameroon is at the end of Stage 2 and entering Stage 3.</a:t>
-            </a:r>
-            <a:endParaRPr lang="en-US" sz="3600" dirty="0"/>
-          </a:p>
-        </p:txBody>
-      </p:sp>
       <p:pic>
         <p:nvPicPr>
-          <p:cNvPr id="5" name="Image 0" descr="/home/claude/f4/img/v2/cmr_rates_big.png">    </p:cNvPr>
+          <p:cNvPr id="3" name="Image 0" descr="/home/claude/f4/img/minesec_sheet.png">    </p:cNvPr>
           <p:cNvPicPr>
             <a:picLocks noChangeAspect="1"/>
           </p:cNvPicPr>
@@ -20388,8 +20255,8 @@
         </p:blipFill>
         <p:spPr>
           <a:xfrm>
-            <a:off x="5349240" y="2461422"/>
-            <a:ext cx="6659575" cy="2913564"/>
+            <a:off x="0" y="658368"/>
+            <a:ext cx="3840480" cy="5833872"/>
           </a:xfrm>
           <a:prstGeom prst="rect">
             <a:avLst/>
@@ -20398,14 +20265,14 @@
       </p:pic>
       <p:sp>
         <p:nvSpPr>
-          <p:cNvPr id="6" name="Text 3"/>
+          <p:cNvPr id="4" name="Text 1"/>
           <p:cNvSpPr/>
           <p:nvPr/>
         </p:nvSpPr>
         <p:spPr>
           <a:xfrm>
-            <a:off x="5349240" y="6089904"/>
-            <a:ext cx="6659575" cy="347472"/>
+            <a:off x="4069080" y="1005840"/>
+            <a:ext cx="7802575" cy="731520"/>
           </a:xfrm>
           <a:prstGeom prst="rect">
             <a:avLst/>
@@ -20414,24 +20281,85 @@
           <a:ln/>
         </p:spPr>
         <p:txBody>
-          <a:bodyPr wrap="square" lIns="0" tIns="0" rIns="0" bIns="0" rtlCol="0" anchor="ctr"/>
+          <a:bodyPr wrap="square" lIns="0" tIns="0" rIns="0" bIns="0" rtlCol="0" anchor="ctr">
+            <a:normAutofit/>
+          </a:bodyPr>
           <a:lstStyle/>
           <a:p>
             <a:pPr algn="ctr" indent="0" marL="0">
               <a:buNone/>
             </a:pPr>
             <a:r>
-              <a:rPr lang="en-US" sz="1600" i="1" dirty="0">
-                <a:solidFill>
-                  <a:srgbClr val="555555"/>
+              <a:rPr lang="en-US" sz="3600" b="1" dirty="0">
+                <a:solidFill>
+                  <a:srgbClr val="990011"/>
                 </a:solidFill>
                 <a:latin typeface="Times New Roman" pitchFamily="34" charset="0"/>
                 <a:ea typeface="Times New Roman" pitchFamily="34" charset="-122"/>
                 <a:cs typeface="Times New Roman" pitchFamily="34" charset="-120"/>
               </a:rPr>
-              <a:t>Illustration: rates of Cameroon</a:t>
-            </a:r>
-            <a:endParaRPr lang="en-US" sz="1600" dirty="0"/>
+              <a:t>4. Application to Cameroon</a:t>
+            </a:r>
+            <a:endParaRPr lang="en-US" sz="3600" dirty="0"/>
+          </a:p>
+        </p:txBody>
+      </p:sp>
+      <p:sp>
+        <p:nvSpPr>
+          <p:cNvPr id="5" name="Text 2"/>
+          <p:cNvSpPr/>
+          <p:nvPr/>
+        </p:nvSpPr>
+        <p:spPr>
+          <a:xfrm>
+            <a:off x="4069080" y="1783080"/>
+            <a:ext cx="7802575" cy="4663440"/>
+          </a:xfrm>
+          <a:prstGeom prst="rect">
+            <a:avLst/>
+          </a:prstGeom>
+          <a:noFill/>
+          <a:ln/>
+        </p:spPr>
+        <p:txBody>
+          <a:bodyPr wrap="square" lIns="0" tIns="0" rIns="0" bIns="0" rtlCol="0" anchor="t"/>
+          <a:lstStyle/>
+          <a:p>
+            <a:pPr algn="l" indent="0" marL="0">
+              <a:spcAft>
+                <a:spcPts val="800"/>
+              </a:spcAft>
+              <a:buNone/>
+            </a:pPr>
+            <a:r>
+              <a:rPr lang="en-US" sz="4000" b="1" dirty="0">
+                <a:solidFill>
+                  <a:srgbClr val="111111"/>
+                </a:solidFill>
+                <a:latin typeface="Times New Roman" pitchFamily="34" charset="0"/>
+                <a:ea typeface="Times New Roman" pitchFamily="34" charset="-122"/>
+                <a:cs typeface="Times New Roman" pitchFamily="34" charset="-120"/>
+              </a:rPr>
+              <a:t>A low death rate and rapid growth: </a:t>
+            </a:r>
+            <a:pPr algn="l" indent="0" marL="0">
+              <a:spcAft>
+                <a:spcPts val="800"/>
+              </a:spcAft>
+              <a:buNone/>
+            </a:pPr>
+            <a:r>
+              <a:rPr lang="en-US" sz="4000" dirty="0">
+                <a:solidFill>
+                  <a:srgbClr val="111111"/>
+                </a:solidFill>
+                <a:latin typeface="Times New Roman" pitchFamily="34" charset="0"/>
+                <a:ea typeface="Times New Roman" pitchFamily="34" charset="-122"/>
+                <a:cs typeface="Times New Roman" pitchFamily="34" charset="-120"/>
+              </a:rPr>
+              <a:t>The death rate is now about 8 per 1,000 thanks to vaccination, health posts and boreholes. The gap between births and deaths gives a growth of about 2.6 % a year.</a:t>
+            </a:r>
+            <a:endParaRPr lang="en-US" sz="4000" dirty="0"/>
           </a:p>
         </p:txBody>
       </p:sp>
@@ -20564,7 +20492,7 @@
         <p:spPr>
           <a:xfrm>
             <a:off x="0" y="658368"/>
-            <a:ext cx="2468880" cy="5833872"/>
+            <a:ext cx="5120640" cy="5833872"/>
           </a:xfrm>
           <a:prstGeom prst="rect">
             <a:avLst/>
@@ -20579,8 +20507,8 @@
         </p:nvSpPr>
         <p:spPr>
           <a:xfrm>
-            <a:off x="2697480" y="1005840"/>
-            <a:ext cx="9174175" cy="731520"/>
+            <a:off x="5349240" y="1005840"/>
+            <a:ext cx="6522415" cy="731520"/>
           </a:xfrm>
           <a:prstGeom prst="rect">
             <a:avLst/>
@@ -20620,8 +20548,8 @@
         </p:nvSpPr>
         <p:spPr>
           <a:xfrm>
-            <a:off x="2697480" y="1783080"/>
-            <a:ext cx="9174175" cy="4663440"/>
+            <a:off x="5349240" y="1783080"/>
+            <a:ext cx="6522415" cy="4663440"/>
           </a:xfrm>
           <a:prstGeom prst="rect">
             <a:avLst/>
@@ -20648,7 +20576,7 @@
                 <a:ea typeface="Times New Roman" pitchFamily="34" charset="-122"/>
                 <a:cs typeface="Times New Roman" pitchFamily="34" charset="-120"/>
               </a:rPr>
-              <a:t>High birth rate: </a:t>
+              <a:t>Future: </a:t>
             </a:r>
             <a:pPr algn="l" indent="0" marL="0">
               <a:spcAft>
@@ -20665,44 +20593,7 @@
                 <a:ea typeface="Times New Roman" pitchFamily="34" charset="-122"/>
                 <a:cs typeface="Times New Roman" pitchFamily="34" charset="-120"/>
               </a:rPr>
-              <a:t>It is still about 35 per 1,000, because of traditions, early marriage and limited family planning.</a:t>
-            </a:r>
-            <a:endParaRPr lang="en-US" sz="4000" dirty="0"/>
-          </a:p>
-          <a:p>
-            <a:pPr algn="l" indent="0" marL="0">
-              <a:spcAft>
-                <a:spcPts val="800"/>
-              </a:spcAft>
-              <a:buNone/>
-            </a:pPr>
-            <a:r>
-              <a:rPr lang="en-US" sz="4000" b="1" dirty="0">
-                <a:solidFill>
-                  <a:srgbClr val="111111"/>
-                </a:solidFill>
-                <a:latin typeface="Times New Roman" pitchFamily="34" charset="0"/>
-                <a:ea typeface="Times New Roman" pitchFamily="34" charset="-122"/>
-                <a:cs typeface="Times New Roman" pitchFamily="34" charset="-120"/>
-              </a:rPr>
-              <a:t>Falling death rate: </a:t>
-            </a:r>
-            <a:pPr algn="l" indent="0" marL="0">
-              <a:spcAft>
-                <a:spcPts val="800"/>
-              </a:spcAft>
-              <a:buNone/>
-            </a:pPr>
-            <a:r>
-              <a:rPr lang="en-US" sz="4000" dirty="0">
-                <a:solidFill>
-                  <a:srgbClr val="111111"/>
-                </a:solidFill>
-                <a:latin typeface="Times New Roman" pitchFamily="34" charset="0"/>
-                <a:ea typeface="Times New Roman" pitchFamily="34" charset="-122"/>
-                <a:cs typeface="Times New Roman" pitchFamily="34" charset="-120"/>
-              </a:rPr>
-              <a:t>It is now about 8 per 1,000 thanks to vaccination, health posts and boreholes.</a:t>
+              <a:t>With more education for girls and better health care, births should fall further. Growth should then slow down as Cameroon moves through stage 3.</a:t>
             </a:r>
             <a:endParaRPr lang="en-US" sz="4000" dirty="0"/>
           </a:p>
@@ -20814,7 +20705,7 @@
                 <a:ea typeface="Calibri" pitchFamily="34" charset="-122"/>
                 <a:cs typeface="Calibri" pitchFamily="34" charset="-120"/>
               </a:rPr>
-              <a:t>BOARD SUMMARY</a:t>
+              <a:t>FORMATIVE EVALUATION</a:t>
             </a:r>
             <a:endParaRPr lang="en-US" sz="1400" dirty="0"/>
           </a:p>
@@ -20879,7 +20770,7 @@
                 <a:ea typeface="Times New Roman" pitchFamily="34" charset="-122"/>
                 <a:cs typeface="Times New Roman" pitchFamily="34" charset="-120"/>
               </a:rPr>
-              <a:t>4. Application to Cameroon (continued)</a:t>
+              <a:t>Evaluation 1</a:t>
             </a:r>
             <a:endParaRPr lang="en-US" sz="3600" dirty="0"/>
           </a:p>
@@ -20913,7 +20804,7 @@
               <a:buNone/>
             </a:pPr>
             <a:r>
-              <a:rPr lang="en-US" sz="4000" b="1" dirty="0">
+              <a:rPr lang="en-US" sz="4000" dirty="0">
                 <a:solidFill>
                   <a:srgbClr val="111111"/>
                 </a:solidFill>
@@ -20921,61 +20812,7 @@
                 <a:ea typeface="Times New Roman" pitchFamily="34" charset="-122"/>
                 <a:cs typeface="Times New Roman" pitchFamily="34" charset="-120"/>
               </a:rPr>
-              <a:t>Rapid growth: </a:t>
-            </a:r>
-            <a:pPr algn="l" indent="0" marL="0">
-              <a:spcAft>
-                <a:spcPts val="800"/>
-              </a:spcAft>
-              <a:buNone/>
-            </a:pPr>
-            <a:r>
-              <a:rPr lang="en-US" sz="4000" dirty="0">
-                <a:solidFill>
-                  <a:srgbClr val="111111"/>
-                </a:solidFill>
-                <a:latin typeface="Times New Roman" pitchFamily="34" charset="0"/>
-                <a:ea typeface="Times New Roman" pitchFamily="34" charset="-122"/>
-                <a:cs typeface="Times New Roman" pitchFamily="34" charset="-120"/>
-              </a:rPr>
-              <a:t>The gap gives a growth of about 2.6 % a year.</a:t>
-            </a:r>
-            <a:endParaRPr lang="en-US" sz="4000" dirty="0"/>
-          </a:p>
-          <a:p>
-            <a:pPr algn="l" indent="0" marL="0">
-              <a:spcAft>
-                <a:spcPts val="800"/>
-              </a:spcAft>
-              <a:buNone/>
-            </a:pPr>
-            <a:r>
-              <a:rPr lang="en-US" sz="4000" b="1" dirty="0">
-                <a:solidFill>
-                  <a:srgbClr val="111111"/>
-                </a:solidFill>
-                <a:latin typeface="Times New Roman" pitchFamily="34" charset="0"/>
-                <a:ea typeface="Times New Roman" pitchFamily="34" charset="-122"/>
-                <a:cs typeface="Times New Roman" pitchFamily="34" charset="-120"/>
-              </a:rPr>
-              <a:t>Future: </a:t>
-            </a:r>
-            <a:pPr algn="l" indent="0" marL="0">
-              <a:spcAft>
-                <a:spcPts val="800"/>
-              </a:spcAft>
-              <a:buNone/>
-            </a:pPr>
-            <a:r>
-              <a:rPr lang="en-US" sz="4000" dirty="0">
-                <a:solidFill>
-                  <a:srgbClr val="111111"/>
-                </a:solidFill>
-                <a:latin typeface="Times New Roman" pitchFamily="34" charset="0"/>
-                <a:ea typeface="Times New Roman" pitchFamily="34" charset="-122"/>
-                <a:cs typeface="Times New Roman" pitchFamily="34" charset="-120"/>
-              </a:rPr>
-              <a:t>With more education for girls and better health care, births should fall and growth should slow down.</a:t>
+              <a:t>Describe Stage 2 of the demographic transition model.</a:t>
             </a:r>
             <a:endParaRPr lang="en-US" sz="4000" dirty="0"/>
           </a:p>
@@ -21152,7 +20989,7 @@
                 <a:ea typeface="Times New Roman" pitchFamily="34" charset="-122"/>
                 <a:cs typeface="Times New Roman" pitchFamily="34" charset="-120"/>
               </a:rPr>
-              <a:t>Evaluation 1</a:t>
+              <a:t>Expected Answer</a:t>
             </a:r>
             <a:endParaRPr lang="en-US" sz="3600" dirty="0"/>
           </a:p>
@@ -21194,7 +21031,7 @@
                 <a:ea typeface="Times New Roman" pitchFamily="34" charset="-122"/>
                 <a:cs typeface="Times New Roman" pitchFamily="34" charset="-120"/>
               </a:rPr>
-              <a:t>Describe Stage 2 of the demographic transition model.</a:t>
+              <a:t>Death rates fall quickly while birth rates remain high, so the population grows very fast.</a:t>
             </a:r>
             <a:endParaRPr lang="en-US" sz="4000" dirty="0"/>
           </a:p>
@@ -21371,7 +21208,7 @@
                 <a:ea typeface="Times New Roman" pitchFamily="34" charset="-122"/>
                 <a:cs typeface="Times New Roman" pitchFamily="34" charset="-120"/>
               </a:rPr>
-              <a:t>Expected Answer</a:t>
+              <a:t>Evaluation 2</a:t>
             </a:r>
             <a:endParaRPr lang="en-US" sz="3600" dirty="0"/>
           </a:p>
@@ -21413,7 +21250,7 @@
                 <a:ea typeface="Times New Roman" pitchFamily="34" charset="-122"/>
                 <a:cs typeface="Times New Roman" pitchFamily="34" charset="-120"/>
               </a:rPr>
-              <a:t>Death rates fall quickly while birth rates remain high, so the population grows very fast.</a:t>
+              <a:t>Give two weaknesses of the demographic transition model.</a:t>
             </a:r>
             <a:endParaRPr lang="en-US" sz="4000" dirty="0"/>
           </a:p>
@@ -21590,7 +21427,7 @@
                 <a:ea typeface="Times New Roman" pitchFamily="34" charset="-122"/>
                 <a:cs typeface="Times New Roman" pitchFamily="34" charset="-120"/>
               </a:rPr>
-              <a:t>Evaluation 2</a:t>
+              <a:t>Expected Answer</a:t>
             </a:r>
             <a:endParaRPr lang="en-US" sz="3600" dirty="0"/>
           </a:p>
@@ -21632,7 +21469,7 @@
                 <a:ea typeface="Times New Roman" pitchFamily="34" charset="-122"/>
                 <a:cs typeface="Times New Roman" pitchFamily="34" charset="-120"/>
               </a:rPr>
-              <a:t>Give two weaknesses of the demographic transition model.</a:t>
+              <a:t>It is Eurocentric; it ignores wars, epidemics, migration and policies; countries move at different speeds (any two).</a:t>
             </a:r>
             <a:endParaRPr lang="en-US" sz="4000" dirty="0"/>
           </a:p>
@@ -21744,7 +21581,7 @@
                 <a:ea typeface="Calibri" pitchFamily="34" charset="-122"/>
                 <a:cs typeface="Calibri" pitchFamily="34" charset="-120"/>
               </a:rPr>
-              <a:t>FORMATIVE EVALUATION</a:t>
+              <a:t>REMEDIATION</a:t>
             </a:r>
             <a:endParaRPr lang="en-US" sz="1400" dirty="0"/>
           </a:p>
@@ -21767,7 +21604,7 @@
         <p:spPr>
           <a:xfrm>
             <a:off x="0" y="658368"/>
-            <a:ext cx="5120640" cy="5833872"/>
+            <a:ext cx="3840480" cy="5833872"/>
           </a:xfrm>
           <a:prstGeom prst="rect">
             <a:avLst/>
@@ -21782,8 +21619,8 @@
         </p:nvSpPr>
         <p:spPr>
           <a:xfrm>
-            <a:off x="5349240" y="1005840"/>
-            <a:ext cx="6522415" cy="731520"/>
+            <a:off x="4069080" y="1005840"/>
+            <a:ext cx="7802575" cy="731520"/>
           </a:xfrm>
           <a:prstGeom prst="rect">
             <a:avLst/>
@@ -21809,7 +21646,7 @@
                 <a:ea typeface="Times New Roman" pitchFamily="34" charset="-122"/>
                 <a:cs typeface="Times New Roman" pitchFamily="34" charset="-120"/>
               </a:rPr>
-              <a:t>Expected Answer</a:t>
+              <a:t>Remediation</a:t>
             </a:r>
             <a:endParaRPr lang="en-US" sz="3600" dirty="0"/>
           </a:p>
@@ -21823,8 +21660,8 @@
         </p:nvSpPr>
         <p:spPr>
           <a:xfrm>
-            <a:off x="5349240" y="1783080"/>
-            <a:ext cx="6522415" cy="4663440"/>
+            <a:off x="4069080" y="1783080"/>
+            <a:ext cx="7802575" cy="4663440"/>
           </a:xfrm>
           <a:prstGeom prst="rect">
             <a:avLst/>
@@ -21843,7 +21680,7 @@
               <a:buNone/>
             </a:pPr>
             <a:r>
-              <a:rPr lang="en-US" sz="4000" dirty="0">
+              <a:rPr lang="en-US" sz="4000" b="1" dirty="0">
                 <a:solidFill>
                   <a:srgbClr val="111111"/>
                 </a:solidFill>
@@ -21851,7 +21688,73 @@
                 <a:ea typeface="Times New Roman" pitchFamily="34" charset="-122"/>
                 <a:cs typeface="Times New Roman" pitchFamily="34" charset="-120"/>
               </a:rPr>
-              <a:t>It is Eurocentric; it ignores wars, epidemics, migration and policies; countries move at different speeds (any two).</a:t>
+              <a:t>Fill in the blanks:</a:t>
+            </a:r>
+            <a:endParaRPr lang="en-US" sz="4000" dirty="0"/>
+          </a:p>
+          <a:p>
+            <a:pPr algn="l" marL="342900" indent="-342900">
+              <a:spcAft>
+                <a:spcPts val="800"/>
+              </a:spcAft>
+              <a:buSzPct val="100000"/>
+              <a:buFont typeface="+mj-lt"/>
+              <a:buAutoNum type="arabicPeriod" startAt="1"/>
+            </a:pPr>
+            <a:r>
+              <a:rPr lang="en-US" sz="4000" dirty="0">
+                <a:solidFill>
+                  <a:srgbClr val="111111"/>
+                </a:solidFill>
+                <a:latin typeface="Times New Roman" pitchFamily="34" charset="0"/>
+                <a:ea typeface="Times New Roman" pitchFamily="34" charset="-122"/>
+                <a:cs typeface="Times New Roman" pitchFamily="34" charset="-120"/>
+              </a:rPr>
+              <a:t>In Stage 1, birth and death rates are both ______.</a:t>
+            </a:r>
+            <a:endParaRPr lang="en-US" sz="4000" dirty="0"/>
+          </a:p>
+          <a:p>
+            <a:pPr algn="l" marL="342900" indent="-342900">
+              <a:spcAft>
+                <a:spcPts val="800"/>
+              </a:spcAft>
+              <a:buSzPct val="100000"/>
+              <a:buFont typeface="+mj-lt"/>
+              <a:buAutoNum type="arabicPeriod" startAt="1"/>
+            </a:pPr>
+            <a:r>
+              <a:rPr lang="en-US" sz="4000" dirty="0">
+                <a:solidFill>
+                  <a:srgbClr val="111111"/>
+                </a:solidFill>
+                <a:latin typeface="Times New Roman" pitchFamily="34" charset="0"/>
+                <a:ea typeface="Times New Roman" pitchFamily="34" charset="-122"/>
+                <a:cs typeface="Times New Roman" pitchFamily="34" charset="-120"/>
+              </a:rPr>
+              <a:t>Japan is in Stage ______.</a:t>
+            </a:r>
+            <a:endParaRPr lang="en-US" sz="4000" dirty="0"/>
+          </a:p>
+          <a:p>
+            <a:pPr algn="l" marL="342900" indent="-342900">
+              <a:spcAft>
+                <a:spcPts val="800"/>
+              </a:spcAft>
+              <a:buSzPct val="100000"/>
+              <a:buFont typeface="+mj-lt"/>
+              <a:buAutoNum type="arabicPeriod" startAt="1"/>
+            </a:pPr>
+            <a:r>
+              <a:rPr lang="en-US" sz="4000" dirty="0">
+                <a:solidFill>
+                  <a:srgbClr val="111111"/>
+                </a:solidFill>
+                <a:latin typeface="Times New Roman" pitchFamily="34" charset="0"/>
+                <a:ea typeface="Times New Roman" pitchFamily="34" charset="-122"/>
+                <a:cs typeface="Times New Roman" pitchFamily="34" charset="-120"/>
+              </a:rPr>
+              <a:t>Cameroon is entering Stage ______.</a:t>
             </a:r>
             <a:endParaRPr lang="en-US" sz="4000" dirty="0"/>
           </a:p>
@@ -22294,7 +22197,7 @@
                 <a:ea typeface="Calibri" pitchFamily="34" charset="-122"/>
                 <a:cs typeface="Calibri" pitchFamily="34" charset="-120"/>
               </a:rPr>
-              <a:t>REMEDIATION</a:t>
+              <a:t>HOMEWORK</a:t>
             </a:r>
             <a:endParaRPr lang="en-US" sz="1400" dirty="0"/>
           </a:p>
@@ -22317,7 +22220,7 @@
         <p:spPr>
           <a:xfrm>
             <a:off x="0" y="658368"/>
-            <a:ext cx="3840480" cy="5833872"/>
+            <a:ext cx="5120640" cy="5833872"/>
           </a:xfrm>
           <a:prstGeom prst="rect">
             <a:avLst/>
@@ -22332,8 +22235,8 @@
         </p:nvSpPr>
         <p:spPr>
           <a:xfrm>
-            <a:off x="4069080" y="1005840"/>
-            <a:ext cx="7802575" cy="731520"/>
+            <a:off x="5349240" y="1005840"/>
+            <a:ext cx="6522415" cy="731520"/>
           </a:xfrm>
           <a:prstGeom prst="rect">
             <a:avLst/>
@@ -22359,7 +22262,7 @@
                 <a:ea typeface="Times New Roman" pitchFamily="34" charset="-122"/>
                 <a:cs typeface="Times New Roman" pitchFamily="34" charset="-120"/>
               </a:rPr>
-              <a:t>Remediation</a:t>
+              <a:t>Homework</a:t>
             </a:r>
             <a:endParaRPr lang="en-US" sz="3600" dirty="0"/>
           </a:p>
@@ -22373,8 +22276,8 @@
         </p:nvSpPr>
         <p:spPr>
           <a:xfrm>
-            <a:off x="4069080" y="1783080"/>
-            <a:ext cx="7802575" cy="4663440"/>
+            <a:off x="5349240" y="1783080"/>
+            <a:ext cx="6522415" cy="4663440"/>
           </a:xfrm>
           <a:prstGeom prst="rect">
             <a:avLst/>
@@ -22393,7 +22296,7 @@
               <a:buNone/>
             </a:pPr>
             <a:r>
-              <a:rPr lang="en-US" sz="4000" b="1" dirty="0">
+              <a:rPr lang="en-US" sz="4000" dirty="0">
                 <a:solidFill>
                   <a:srgbClr val="111111"/>
                 </a:solidFill>
@@ -22401,73 +22304,7 @@
                 <a:ea typeface="Times New Roman" pitchFamily="34" charset="-122"/>
                 <a:cs typeface="Times New Roman" pitchFamily="34" charset="-120"/>
               </a:rPr>
-              <a:t>Fill in the blanks:</a:t>
-            </a:r>
-            <a:endParaRPr lang="en-US" sz="4000" dirty="0"/>
-          </a:p>
-          <a:p>
-            <a:pPr algn="l" marL="342900" indent="-342900">
-              <a:spcAft>
-                <a:spcPts val="800"/>
-              </a:spcAft>
-              <a:buSzPct val="100000"/>
-              <a:buFont typeface="+mj-lt"/>
-              <a:buAutoNum type="arabicPeriod" startAt="1"/>
-            </a:pPr>
-            <a:r>
-              <a:rPr lang="en-US" sz="4000" dirty="0">
-                <a:solidFill>
-                  <a:srgbClr val="111111"/>
-                </a:solidFill>
-                <a:latin typeface="Times New Roman" pitchFamily="34" charset="0"/>
-                <a:ea typeface="Times New Roman" pitchFamily="34" charset="-122"/>
-                <a:cs typeface="Times New Roman" pitchFamily="34" charset="-120"/>
-              </a:rPr>
-              <a:t>In Stage 1, birth and death rates are both ______.</a:t>
-            </a:r>
-            <a:endParaRPr lang="en-US" sz="4000" dirty="0"/>
-          </a:p>
-          <a:p>
-            <a:pPr algn="l" marL="342900" indent="-342900">
-              <a:spcAft>
-                <a:spcPts val="800"/>
-              </a:spcAft>
-              <a:buSzPct val="100000"/>
-              <a:buFont typeface="+mj-lt"/>
-              <a:buAutoNum type="arabicPeriod" startAt="1"/>
-            </a:pPr>
-            <a:r>
-              <a:rPr lang="en-US" sz="4000" dirty="0">
-                <a:solidFill>
-                  <a:srgbClr val="111111"/>
-                </a:solidFill>
-                <a:latin typeface="Times New Roman" pitchFamily="34" charset="0"/>
-                <a:ea typeface="Times New Roman" pitchFamily="34" charset="-122"/>
-                <a:cs typeface="Times New Roman" pitchFamily="34" charset="-120"/>
-              </a:rPr>
-              <a:t>Japan is in Stage ______.</a:t>
-            </a:r>
-            <a:endParaRPr lang="en-US" sz="4000" dirty="0"/>
-          </a:p>
-          <a:p>
-            <a:pPr algn="l" marL="342900" indent="-342900">
-              <a:spcAft>
-                <a:spcPts val="800"/>
-              </a:spcAft>
-              <a:buSzPct val="100000"/>
-              <a:buFont typeface="+mj-lt"/>
-              <a:buAutoNum type="arabicPeriod" startAt="1"/>
-            </a:pPr>
-            <a:r>
-              <a:rPr lang="en-US" sz="4000" dirty="0">
-                <a:solidFill>
-                  <a:srgbClr val="111111"/>
-                </a:solidFill>
-                <a:latin typeface="Times New Roman" pitchFamily="34" charset="0"/>
-                <a:ea typeface="Times New Roman" pitchFamily="34" charset="-122"/>
-                <a:cs typeface="Times New Roman" pitchFamily="34" charset="-120"/>
-              </a:rPr>
-              <a:t>Cameroon is entering Stage ______.</a:t>
+              <a:t>Define migration.</a:t>
             </a:r>
             <a:endParaRPr lang="en-US" sz="4000" dirty="0"/>
           </a:p>
@@ -22579,7 +22416,7 @@
                 <a:ea typeface="Calibri" pitchFamily="34" charset="-122"/>
                 <a:cs typeface="Calibri" pitchFamily="34" charset="-120"/>
               </a:rPr>
-              <a:t>HOMEWORK</a:t>
+              <a:t>NEXT LESSON</a:t>
             </a:r>
             <a:endParaRPr lang="en-US" sz="1400" dirty="0"/>
           </a:p>
@@ -22644,7 +22481,7 @@
                 <a:ea typeface="Times New Roman" pitchFamily="34" charset="-122"/>
                 <a:cs typeface="Times New Roman" pitchFamily="34" charset="-120"/>
               </a:rPr>
-              <a:t>Homework</a:t>
+              <a:t>Next Lesson</a:t>
             </a:r>
             <a:endParaRPr lang="en-US" sz="3600" dirty="0"/>
           </a:p>
@@ -22668,17 +22505,17 @@
           <a:ln/>
         </p:spPr>
         <p:txBody>
-          <a:bodyPr wrap="square" lIns="0" tIns="0" rIns="0" bIns="0" rtlCol="0" anchor="t"/>
-          <a:lstStyle/>
-          <a:p>
-            <a:pPr algn="l" indent="0" marL="0">
+          <a:bodyPr wrap="square" lIns="0" tIns="0" rIns="0" bIns="0" rtlCol="0" anchor="ctr"/>
+          <a:lstStyle/>
+          <a:p>
+            <a:pPr algn="ctr" indent="0" marL="0">
               <a:spcAft>
                 <a:spcPts val="800"/>
               </a:spcAft>
               <a:buNone/>
             </a:pPr>
             <a:r>
-              <a:rPr lang="en-US" sz="4000" dirty="0">
+              <a:rPr lang="en-US" sz="4000" b="1" dirty="0">
                 <a:solidFill>
                   <a:srgbClr val="111111"/>
                 </a:solidFill>
@@ -22686,7 +22523,27 @@
                 <a:ea typeface="Times New Roman" pitchFamily="34" charset="-122"/>
                 <a:cs typeface="Times New Roman" pitchFamily="34" charset="-120"/>
               </a:rPr>
-              <a:t>Define migration.</a:t>
+              <a:t>Our next lesson will be on:</a:t>
+            </a:r>
+            <a:endParaRPr lang="en-US" sz="4000" dirty="0"/>
+          </a:p>
+          <a:p>
+            <a:pPr algn="ctr" indent="0" marL="0">
+              <a:spcAft>
+                <a:spcPts val="800"/>
+              </a:spcAft>
+              <a:buNone/>
+            </a:pPr>
+            <a:r>
+              <a:rPr lang="en-US" sz="4000" b="1" dirty="0">
+                <a:solidFill>
+                  <a:srgbClr val="990011"/>
+                </a:solidFill>
+                <a:latin typeface="Times New Roman" pitchFamily="34" charset="0"/>
+                <a:ea typeface="Times New Roman" pitchFamily="34" charset="-122"/>
+                <a:cs typeface="Times New Roman" pitchFamily="34" charset="-120"/>
+              </a:rPr>
+              <a:t>Lesson 13: Migration: Characteristics, Laws and Models</a:t>
             </a:r>
             <a:endParaRPr lang="en-US" sz="4000" dirty="0"/>
           </a:p>
@@ -22798,46 +22655,22 @@
                 <a:ea typeface="Calibri" pitchFamily="34" charset="-122"/>
                 <a:cs typeface="Calibri" pitchFamily="34" charset="-120"/>
               </a:rPr>
-              <a:t>NEXT LESSON</a:t>
+              <a:t>BILINGUAL GAME</a:t>
             </a:r>
             <a:endParaRPr lang="en-US" sz="1400" dirty="0"/>
           </a:p>
         </p:txBody>
       </p:sp>
-      <p:pic>
-        <p:nvPicPr>
-          <p:cNvPr id="3" name="Image 0" descr="/home/claude/f4/img/minesec_sheet.png">    </p:cNvPr>
-          <p:cNvPicPr>
-            <a:picLocks noChangeAspect="1"/>
-          </p:cNvPicPr>
-          <p:nvPr/>
-        </p:nvPicPr>
-        <p:blipFill>
-          <a:blip r:embed="rId1"/>
-          <a:stretch>
-            <a:fillRect/>
-          </a:stretch>
-        </p:blipFill>
-        <p:spPr>
-          <a:xfrm>
-            <a:off x="0" y="658368"/>
-            <a:ext cx="5120640" cy="5833872"/>
-          </a:xfrm>
-          <a:prstGeom prst="rect">
-            <a:avLst/>
-          </a:prstGeom>
-        </p:spPr>
-      </p:pic>
-      <p:sp>
-        <p:nvSpPr>
-          <p:cNvPr id="4" name="Text 1"/>
+      <p:sp>
+        <p:nvSpPr>
+          <p:cNvPr id="3" name="Text 1"/>
           <p:cNvSpPr/>
           <p:nvPr/>
         </p:nvSpPr>
         <p:spPr>
           <a:xfrm>
-            <a:off x="5349240" y="1005840"/>
-            <a:ext cx="6522415" cy="731520"/>
+            <a:off x="457200" y="1005840"/>
+            <a:ext cx="11277295" cy="731520"/>
           </a:xfrm>
           <a:prstGeom prst="rect">
             <a:avLst/>
@@ -22846,9 +22679,7 @@
           <a:ln/>
         </p:spPr>
         <p:txBody>
-          <a:bodyPr wrap="square" lIns="0" tIns="0" rIns="0" bIns="0" rtlCol="0" anchor="ctr">
-            <a:normAutofit/>
-          </a:bodyPr>
+          <a:bodyPr wrap="square" lIns="0" tIns="0" rIns="0" bIns="0" rtlCol="0" anchor="ctr"/>
           <a:lstStyle/>
           <a:p>
             <a:pPr algn="ctr" indent="0" marL="0">
@@ -22863,219 +22694,6 @@
                 <a:ea typeface="Times New Roman" pitchFamily="34" charset="-122"/>
                 <a:cs typeface="Times New Roman" pitchFamily="34" charset="-120"/>
               </a:rPr>
-              <a:t>Next Lesson</a:t>
-            </a:r>
-            <a:endParaRPr lang="en-US" sz="3600" dirty="0"/>
-          </a:p>
-        </p:txBody>
-      </p:sp>
-      <p:sp>
-        <p:nvSpPr>
-          <p:cNvPr id="5" name="Text 2"/>
-          <p:cNvSpPr/>
-          <p:nvPr/>
-        </p:nvSpPr>
-        <p:spPr>
-          <a:xfrm>
-            <a:off x="5349240" y="1783080"/>
-            <a:ext cx="6522415" cy="4663440"/>
-          </a:xfrm>
-          <a:prstGeom prst="rect">
-            <a:avLst/>
-          </a:prstGeom>
-          <a:noFill/>
-          <a:ln/>
-        </p:spPr>
-        <p:txBody>
-          <a:bodyPr wrap="square" lIns="0" tIns="0" rIns="0" bIns="0" rtlCol="0" anchor="ctr"/>
-          <a:lstStyle/>
-          <a:p>
-            <a:pPr algn="ctr" indent="0" marL="0">
-              <a:spcAft>
-                <a:spcPts val="800"/>
-              </a:spcAft>
-              <a:buNone/>
-            </a:pPr>
-            <a:r>
-              <a:rPr lang="en-US" sz="4000" b="1" dirty="0">
-                <a:solidFill>
-                  <a:srgbClr val="111111"/>
-                </a:solidFill>
-                <a:latin typeface="Times New Roman" pitchFamily="34" charset="0"/>
-                <a:ea typeface="Times New Roman" pitchFamily="34" charset="-122"/>
-                <a:cs typeface="Times New Roman" pitchFamily="34" charset="-120"/>
-              </a:rPr>
-              <a:t>Our next lesson will be on:</a:t>
-            </a:r>
-            <a:endParaRPr lang="en-US" sz="4000" dirty="0"/>
-          </a:p>
-          <a:p>
-            <a:pPr algn="ctr" indent="0" marL="0">
-              <a:spcAft>
-                <a:spcPts val="800"/>
-              </a:spcAft>
-              <a:buNone/>
-            </a:pPr>
-            <a:r>
-              <a:rPr lang="en-US" sz="4000" b="1" dirty="0">
-                <a:solidFill>
-                  <a:srgbClr val="990011"/>
-                </a:solidFill>
-                <a:latin typeface="Times New Roman" pitchFamily="34" charset="0"/>
-                <a:ea typeface="Times New Roman" pitchFamily="34" charset="-122"/>
-                <a:cs typeface="Times New Roman" pitchFamily="34" charset="-120"/>
-              </a:rPr>
-              <a:t>Lesson 13: Migration: Characteristics, Laws and Models</a:t>
-            </a:r>
-            <a:endParaRPr lang="en-US" sz="4000" dirty="0"/>
-          </a:p>
-        </p:txBody>
-      </p:sp>
-      <p:sp>
-        <p:nvSpPr>
-          <p:cNvPr id="25" name="Slide Number Placeholder 0"/>
-          <p:cNvSpPr>
-            <a:spLocks noGrp="1"/>
-          </p:cNvSpPr>
-          <p:nvPr>
-            <p:ph type="sldNum" sz="quarter" idx="4294967295"/>
-          </p:nvPr>
-        </p:nvSpPr>
-        <p:spPr>
-          <a:xfrm>
-            <a:off x="27432" y="91440"/>
-            <a:ext cx="585216" cy="475488"/>
-          </a:xfrm>
-          <a:prstGeom prst="rect">
-            <a:avLst/>
-          </a:prstGeom>
-          <a:extLst>
-            <a:ext uri="{C572A759-6A51-4108-AA02-DFA0A04FC94B}">
-              <ma14:wrappingTextBoxFlag xmlns:ma14="http://schemas.microsoft.com/office/mac/drawingml/2011/main" val="0"/>
-            </a:ext>
-          </a:extLst>
-        </p:spPr>
-        <p:txBody>
-          <a:bodyPr/>
-          <a:lstStyle>
-            <a:lvl1pPr>
-              <a:defRPr sz="2000">
-                <a:solidFill>
-                  <a:srgbClr val="FFFFFF"/>
-                </a:solidFill>
-                <a:latin typeface="Calibri"/>
-                <a:ea typeface="Calibri"/>
-                <a:cs typeface="Calibri"/>
-              </a:defRPr>
-            </a:lvl1pPr>
-          </a:lstStyle>
-          <a:p>
-            <a:pPr algn="ctr"/>
-            <a:fld id="{F7021451-1387-4CA6-816F-3879F97B5CBC}" type="slidenum">
-              <a:rPr b="1" lang="en-US"/>
-              <a:t>62</a:t>
-            </a:fld>
-            <a:endParaRPr lang="en-US"/>
-          </a:p>
-        </p:txBody>
-      </p:sp>
-    </p:spTree>
-  </p:cSld>
-  <p:clrMapOvr>
-    <a:masterClrMapping/>
-  </p:clrMapOvr>
-</p:sld>
-</file>
-
-<file path=ppt/slides/slide63.xml><?xml version="1.0" encoding="utf-8"?>
-<p:sld xmlns:a="http://schemas.openxmlformats.org/drawingml/2006/main" xmlns:r="http://schemas.openxmlformats.org/officeDocument/2006/relationships" xmlns:p="http://schemas.openxmlformats.org/presentationml/2006/main">
-  <p:cSld name="Slide 63">
-    <p:spTree>
-      <p:nvGrpSpPr>
-        <p:cNvPr id="1" name=""/>
-        <p:cNvGrpSpPr/>
-        <p:nvPr/>
-      </p:nvGrpSpPr>
-      <p:grpSpPr>
-        <a:xfrm>
-          <a:off x="0" y="0"/>
-          <a:ext cx="0" cy="0"/>
-          <a:chOff x="0" y="0"/>
-          <a:chExt cx="0" cy="0"/>
-        </a:xfrm>
-      </p:grpSpPr>
-      <p:sp>
-        <p:nvSpPr>
-          <p:cNvPr id="2" name="Text 0"/>
-          <p:cNvSpPr/>
-          <p:nvPr/>
-        </p:nvSpPr>
-        <p:spPr>
-          <a:xfrm>
-            <a:off x="457200" y="713232"/>
-            <a:ext cx="11368735" cy="274320"/>
-          </a:xfrm>
-          <a:prstGeom prst="rect">
-            <a:avLst/>
-          </a:prstGeom>
-          <a:noFill/>
-          <a:ln/>
-        </p:spPr>
-        <p:txBody>
-          <a:bodyPr wrap="square" lIns="0" tIns="0" rIns="0" bIns="0" rtlCol="0" anchor="ctr"/>
-          <a:lstStyle/>
-          <a:p>
-            <a:pPr algn="r" indent="0" marL="0">
-              <a:buNone/>
-            </a:pPr>
-            <a:r>
-              <a:rPr lang="en-US" sz="1400" b="1" dirty="0">
-                <a:solidFill>
-                  <a:srgbClr val="1C3F6E"/>
-                </a:solidFill>
-                <a:latin typeface="Calibri" pitchFamily="34" charset="0"/>
-                <a:ea typeface="Calibri" pitchFamily="34" charset="-122"/>
-                <a:cs typeface="Calibri" pitchFamily="34" charset="-120"/>
-              </a:rPr>
-              <a:t>BILINGUAL GAME</a:t>
-            </a:r>
-            <a:endParaRPr lang="en-US" sz="1400" dirty="0"/>
-          </a:p>
-        </p:txBody>
-      </p:sp>
-      <p:sp>
-        <p:nvSpPr>
-          <p:cNvPr id="3" name="Text 1"/>
-          <p:cNvSpPr/>
-          <p:nvPr/>
-        </p:nvSpPr>
-        <p:spPr>
-          <a:xfrm>
-            <a:off x="457200" y="1005840"/>
-            <a:ext cx="11277295" cy="731520"/>
-          </a:xfrm>
-          <a:prstGeom prst="rect">
-            <a:avLst/>
-          </a:prstGeom>
-          <a:noFill/>
-          <a:ln/>
-        </p:spPr>
-        <p:txBody>
-          <a:bodyPr wrap="square" lIns="0" tIns="0" rIns="0" bIns="0" rtlCol="0" anchor="ctr"/>
-          <a:lstStyle/>
-          <a:p>
-            <a:pPr algn="ctr" indent="0" marL="0">
-              <a:buNone/>
-            </a:pPr>
-            <a:r>
-              <a:rPr lang="en-US" sz="3600" b="1" dirty="0">
-                <a:solidFill>
-                  <a:srgbClr val="990011"/>
-                </a:solidFill>
-                <a:latin typeface="Times New Roman" pitchFamily="34" charset="0"/>
-                <a:ea typeface="Times New Roman" pitchFamily="34" charset="-122"/>
-                <a:cs typeface="Times New Roman" pitchFamily="34" charset="-120"/>
-              </a:rPr>
               <a:t>Bilingual Game (Jeu Bilingue)</a:t>
             </a:r>
             <a:endParaRPr lang="en-US" sz="3600" dirty="0"/>
@@ -23084,7 +22702,7 @@
       </p:sp>
       <p:graphicFrame>
         <p:nvGraphicFramePr>
-          <p:cNvPr id="64" name="Table 0"/>
+          <p:cNvPr id="63" name="Table 0"/>
           <p:cNvGraphicFramePr>
             <a:graphicFrameLocks noGrp="1"/>
           </p:cNvGraphicFramePr>
@@ -24120,7 +23738,7 @@
             <a:pPr algn="ctr"/>
             <a:fld id="{F7021451-1387-4CA6-816F-3879F97B5CBC}" type="slidenum">
               <a:rPr b="1" lang="en-US"/>
-              <a:t>63</a:t>
+              <a:t>62</a:t>
             </a:fld>
             <a:endParaRPr lang="en-US"/>
           </a:p>
@@ -24134,9 +23752,9 @@
 </p:sld>
 </file>
 
-<file path=ppt/slides/slide64.xml><?xml version="1.0" encoding="utf-8"?>
+<file path=ppt/slides/slide63.xml><?xml version="1.0" encoding="utf-8"?>
 <p:sld xmlns:a="http://schemas.openxmlformats.org/drawingml/2006/main" xmlns:r="http://schemas.openxmlformats.org/officeDocument/2006/relationships" xmlns:p="http://schemas.openxmlformats.org/presentationml/2006/main">
-  <p:cSld name="Slide 64">
+  <p:cSld name="Slide 63">
     <p:spTree>
       <p:nvGrpSpPr>
         <p:cNvPr id="1" name=""/>
@@ -24231,7 +23849,7 @@
       </p:sp>
       <p:graphicFrame>
         <p:nvGraphicFramePr>
-          <p:cNvPr id="65" name="Table 0"/>
+          <p:cNvPr id="64" name="Table 0"/>
           <p:cNvGraphicFramePr>
             <a:graphicFrameLocks noGrp="1"/>
           </p:cNvGraphicFramePr>
@@ -24853,7 +24471,7 @@
             <a:pPr algn="ctr"/>
             <a:fld id="{F7021451-1387-4CA6-816F-3879F97B5CBC}" type="slidenum">
               <a:rPr b="1" lang="en-US"/>
-              <a:t>64</a:t>
+              <a:t>63</a:t>
             </a:fld>
             <a:endParaRPr lang="en-US"/>
           </a:p>
@@ -24867,9 +24485,9 @@
 </p:sld>
 </file>
 
-<file path=ppt/slides/slide65.xml><?xml version="1.0" encoding="utf-8"?>
+<file path=ppt/slides/slide64.xml><?xml version="1.0" encoding="utf-8"?>
 <p:sld xmlns:a="http://schemas.openxmlformats.org/drawingml/2006/main" xmlns:r="http://schemas.openxmlformats.org/officeDocument/2006/relationships" xmlns:p="http://schemas.openxmlformats.org/presentationml/2006/main">
-  <p:cSld name="Slide 65">
+  <p:cSld name="Slide 64">
     <p:spTree>
       <p:nvGrpSpPr>
         <p:cNvPr id="1" name=""/>
@@ -24964,7 +24582,7 @@
       </p:sp>
       <p:graphicFrame>
         <p:nvGraphicFramePr>
-          <p:cNvPr id="66" name="Table 0"/>
+          <p:cNvPr id="65" name="Table 0"/>
           <p:cNvGraphicFramePr>
             <a:graphicFrameLocks noGrp="1"/>
           </p:cNvGraphicFramePr>
@@ -25074,7 +24692,7 @@
                           <a:ea typeface="Calibri" pitchFamily="34" charset="-122"/>
                           <a:cs typeface="Calibri" pitchFamily="34" charset="-120"/>
                         </a:rPr>
-                        <a:t>DEFINITIONS; Meaning of the Model; Stages 1 and 2; Stages 3, 4 and 5; Appraisal of the Model; Application to Cameroon.</a:t>
+                        <a:t>DEFINITIONS; Meaning of the Model; Stages 1 and 2; Stages 3, 4 and 5; Strengths; Weaknesses; Application to Cameroon.</a:t>
                       </a:r>
                       <a:endParaRPr lang="en-US" sz="1600" dirty="0">
                         <a:latin typeface="Calibri" charset="0"/>
@@ -25724,6 +25342,331 @@
             <a:pPr algn="ctr"/>
             <a:fld id="{F7021451-1387-4CA6-816F-3879F97B5CBC}" type="slidenum">
               <a:rPr b="1" lang="en-US"/>
+              <a:t>64</a:t>
+            </a:fld>
+            <a:endParaRPr lang="en-US"/>
+          </a:p>
+        </p:txBody>
+      </p:sp>
+    </p:spTree>
+  </p:cSld>
+  <p:clrMapOvr>
+    <a:masterClrMapping/>
+  </p:clrMapOvr>
+</p:sld>
+</file>
+
+<file path=ppt/slides/slide65.xml><?xml version="1.0" encoding="utf-8"?>
+<p:sld xmlns:a="http://schemas.openxmlformats.org/drawingml/2006/main" xmlns:r="http://schemas.openxmlformats.org/officeDocument/2006/relationships" xmlns:p="http://schemas.openxmlformats.org/presentationml/2006/main">
+  <p:cSld name="Slide 65">
+    <p:spTree>
+      <p:nvGrpSpPr>
+        <p:cNvPr id="1" name=""/>
+        <p:cNvGrpSpPr/>
+        <p:nvPr/>
+      </p:nvGrpSpPr>
+      <p:grpSpPr>
+        <a:xfrm>
+          <a:off x="0" y="0"/>
+          <a:ext cx="0" cy="0"/>
+          <a:chOff x="0" y="0"/>
+          <a:chExt cx="0" cy="0"/>
+        </a:xfrm>
+      </p:grpSpPr>
+      <p:sp>
+        <p:nvSpPr>
+          <p:cNvPr id="2" name="Text 0"/>
+          <p:cNvSpPr/>
+          <p:nvPr/>
+        </p:nvSpPr>
+        <p:spPr>
+          <a:xfrm>
+            <a:off x="457200" y="713232"/>
+            <a:ext cx="11368735" cy="274320"/>
+          </a:xfrm>
+          <a:prstGeom prst="rect">
+            <a:avLst/>
+          </a:prstGeom>
+          <a:noFill/>
+          <a:ln/>
+        </p:spPr>
+        <p:txBody>
+          <a:bodyPr wrap="square" lIns="0" tIns="0" rIns="0" bIns="0" rtlCol="0" anchor="ctr"/>
+          <a:lstStyle/>
+          <a:p>
+            <a:pPr algn="r" indent="0" marL="0">
+              <a:buNone/>
+            </a:pPr>
+            <a:r>
+              <a:rPr lang="en-US" sz="1400" b="1" dirty="0">
+                <a:solidFill>
+                  <a:srgbClr val="1C3F6E"/>
+                </a:solidFill>
+                <a:latin typeface="Calibri" pitchFamily="34" charset="0"/>
+                <a:ea typeface="Calibri" pitchFamily="34" charset="-122"/>
+                <a:cs typeface="Calibri" pitchFamily="34" charset="-120"/>
+              </a:rPr>
+              <a:t>TEACHER'S NOTE</a:t>
+            </a:r>
+            <a:endParaRPr lang="en-US" sz="1400" dirty="0"/>
+          </a:p>
+        </p:txBody>
+      </p:sp>
+      <p:pic>
+        <p:nvPicPr>
+          <p:cNvPr id="3" name="Image 0" descr="/home/claude/f4/img/minesec_sheet.png">    </p:cNvPr>
+          <p:cNvPicPr>
+            <a:picLocks noChangeAspect="1"/>
+          </p:cNvPicPr>
+          <p:nvPr/>
+        </p:nvPicPr>
+        <p:blipFill>
+          <a:blip r:embed="rId1"/>
+          <a:stretch>
+            <a:fillRect/>
+          </a:stretch>
+        </p:blipFill>
+        <p:spPr>
+          <a:xfrm>
+            <a:off x="0" y="658368"/>
+            <a:ext cx="3840480" cy="5833872"/>
+          </a:xfrm>
+          <a:prstGeom prst="rect">
+            <a:avLst/>
+          </a:prstGeom>
+        </p:spPr>
+      </p:pic>
+      <p:sp>
+        <p:nvSpPr>
+          <p:cNvPr id="4" name="Text 1"/>
+          <p:cNvSpPr/>
+          <p:nvPr/>
+        </p:nvSpPr>
+        <p:spPr>
+          <a:xfrm>
+            <a:off x="4069080" y="1005840"/>
+            <a:ext cx="7802575" cy="731520"/>
+          </a:xfrm>
+          <a:prstGeom prst="rect">
+            <a:avLst/>
+          </a:prstGeom>
+          <a:noFill/>
+          <a:ln/>
+        </p:spPr>
+        <p:txBody>
+          <a:bodyPr wrap="square" lIns="0" tIns="0" rIns="0" bIns="0" rtlCol="0" anchor="ctr">
+            <a:normAutofit/>
+          </a:bodyPr>
+          <a:lstStyle/>
+          <a:p>
+            <a:pPr algn="ctr" indent="0" marL="0">
+              <a:buNone/>
+            </a:pPr>
+            <a:r>
+              <a:rPr lang="en-US" sz="3600" b="1" dirty="0">
+                <a:solidFill>
+                  <a:srgbClr val="990011"/>
+                </a:solidFill>
+                <a:latin typeface="Times New Roman" pitchFamily="34" charset="0"/>
+                <a:ea typeface="Times New Roman" pitchFamily="34" charset="-122"/>
+                <a:cs typeface="Times New Roman" pitchFamily="34" charset="-120"/>
+              </a:rPr>
+              <a:t>Teacher's Note</a:t>
+            </a:r>
+            <a:endParaRPr lang="en-US" sz="3600" dirty="0"/>
+          </a:p>
+        </p:txBody>
+      </p:sp>
+      <p:sp>
+        <p:nvSpPr>
+          <p:cNvPr id="5" name="Text 2"/>
+          <p:cNvSpPr/>
+          <p:nvPr/>
+        </p:nvSpPr>
+        <p:spPr>
+          <a:xfrm>
+            <a:off x="4069080" y="1783080"/>
+            <a:ext cx="7802575" cy="4663440"/>
+          </a:xfrm>
+          <a:prstGeom prst="rect">
+            <a:avLst/>
+          </a:prstGeom>
+          <a:noFill/>
+          <a:ln/>
+        </p:spPr>
+        <p:txBody>
+          <a:bodyPr wrap="square" lIns="0" tIns="0" rIns="0" bIns="0" rtlCol="0" anchor="t"/>
+          <a:lstStyle/>
+          <a:p>
+            <a:pPr algn="l" marL="342900" indent="-342900">
+              <a:spcAft>
+                <a:spcPts val="800"/>
+              </a:spcAft>
+              <a:buSzPct val="100000"/>
+              <a:buChar char="•"/>
+            </a:pPr>
+            <a:r>
+              <a:rPr lang="en-US" sz="2000" dirty="0">
+                <a:solidFill>
+                  <a:srgbClr val="111111"/>
+                </a:solidFill>
+                <a:latin typeface="Calibri" pitchFamily="34" charset="0"/>
+                <a:ea typeface="Calibri" pitchFamily="34" charset="-122"/>
+                <a:cs typeface="Calibri" pitchFamily="34" charset="-120"/>
+              </a:rPr>
+              <a:t>Timing: Homework correction, plan, objectives 8 min | Recall, situation, action 10 min | 5 activities 30 min | Board summary (copying) 30 min | Evaluation, remediation 10 min | Homework, next lesson 5 min | Logbook 7 min</a:t>
+            </a:r>
+            <a:endParaRPr lang="en-US" sz="2000" dirty="0"/>
+          </a:p>
+          <a:p>
+            <a:pPr algn="l" marL="342900" indent="-342900">
+              <a:spcAft>
+                <a:spcPts val="800"/>
+              </a:spcAft>
+              <a:buSzPct val="100000"/>
+              <a:buChar char="•"/>
+            </a:pPr>
+            <a:r>
+              <a:rPr lang="en-US" sz="2000" dirty="0">
+                <a:solidFill>
+                  <a:srgbClr val="111111"/>
+                </a:solidFill>
+                <a:latin typeface="Calibri" pitchFamily="34" charset="0"/>
+                <a:ea typeface="Calibri" pitchFamily="34" charset="-122"/>
+                <a:cs typeface="Calibri" pitchFamily="34" charset="-120"/>
+              </a:rPr>
+              <a:t>Without the projector (Activity 1): draw the two lines on the board.</a:t>
+            </a:r>
+            <a:endParaRPr lang="en-US" sz="2000" dirty="0"/>
+          </a:p>
+          <a:p>
+            <a:pPr algn="l" marL="342900" indent="-342900">
+              <a:spcAft>
+                <a:spcPts val="800"/>
+              </a:spcAft>
+              <a:buSzPct val="100000"/>
+              <a:buChar char="•"/>
+            </a:pPr>
+            <a:r>
+              <a:rPr lang="en-US" sz="2000" dirty="0">
+                <a:solidFill>
+                  <a:srgbClr val="111111"/>
+                </a:solidFill>
+                <a:latin typeface="Calibri" pitchFamily="34" charset="0"/>
+                <a:ea typeface="Calibri" pitchFamily="34" charset="-122"/>
+                <a:cs typeface="Calibri" pitchFamily="34" charset="-120"/>
+              </a:rPr>
+              <a:t>Without the projector (Activity 2): write the stages in a table.</a:t>
+            </a:r>
+            <a:endParaRPr lang="en-US" sz="2000" dirty="0"/>
+          </a:p>
+          <a:p>
+            <a:pPr algn="l" marL="342900" indent="-342900">
+              <a:spcAft>
+                <a:spcPts val="800"/>
+              </a:spcAft>
+              <a:buSzPct val="100000"/>
+              <a:buChar char="•"/>
+            </a:pPr>
+            <a:r>
+              <a:rPr lang="en-US" sz="2000" dirty="0">
+                <a:solidFill>
+                  <a:srgbClr val="111111"/>
+                </a:solidFill>
+                <a:latin typeface="Calibri" pitchFamily="34" charset="0"/>
+                <a:ea typeface="Calibri" pitchFamily="34" charset="-122"/>
+                <a:cs typeface="Calibri" pitchFamily="34" charset="-120"/>
+              </a:rPr>
+              <a:t>Without the projector (Activity 3): draw the staircase.</a:t>
+            </a:r>
+            <a:endParaRPr lang="en-US" sz="2000" dirty="0"/>
+          </a:p>
+          <a:p>
+            <a:pPr algn="l" marL="342900" indent="-342900">
+              <a:spcAft>
+                <a:spcPts val="800"/>
+              </a:spcAft>
+              <a:buSzPct val="100000"/>
+              <a:buChar char="•"/>
+            </a:pPr>
+            <a:r>
+              <a:rPr lang="en-US" sz="2000" dirty="0">
+                <a:solidFill>
+                  <a:srgbClr val="111111"/>
+                </a:solidFill>
+                <a:latin typeface="Calibri" pitchFamily="34" charset="0"/>
+                <a:ea typeface="Calibri" pitchFamily="34" charset="-122"/>
+                <a:cs typeface="Calibri" pitchFamily="34" charset="-120"/>
+              </a:rPr>
+              <a:t>Without the projector (Activity 4): discuss one weakness.</a:t>
+            </a:r>
+            <a:endParaRPr lang="en-US" sz="2000" dirty="0"/>
+          </a:p>
+          <a:p>
+            <a:pPr algn="l" marL="342900" indent="-342900">
+              <a:spcAft>
+                <a:spcPts val="800"/>
+              </a:spcAft>
+              <a:buSzPct val="100000"/>
+              <a:buChar char="•"/>
+            </a:pPr>
+            <a:r>
+              <a:rPr lang="en-US" sz="2000" dirty="0">
+                <a:solidFill>
+                  <a:srgbClr val="111111"/>
+                </a:solidFill>
+                <a:latin typeface="Calibri" pitchFamily="34" charset="0"/>
+                <a:ea typeface="Calibri" pitchFamily="34" charset="-122"/>
+                <a:cs typeface="Calibri" pitchFamily="34" charset="-120"/>
+              </a:rPr>
+              <a:t>Without the projector (Activity 5): write Cameroon's rates on the board.</a:t>
+            </a:r>
+            <a:endParaRPr lang="en-US" sz="2000" dirty="0"/>
+          </a:p>
+        </p:txBody>
+      </p:sp>
+      <p:sp>
+        <p:nvSpPr>
+          <p:cNvPr id="25" name="Slide Number Placeholder 0"/>
+          <p:cNvSpPr>
+            <a:spLocks noGrp="1"/>
+          </p:cNvSpPr>
+          <p:nvPr>
+            <p:ph type="sldNum" sz="quarter" idx="4294967295"/>
+          </p:nvPr>
+        </p:nvSpPr>
+        <p:spPr>
+          <a:xfrm>
+            <a:off x="27432" y="91440"/>
+            <a:ext cx="585216" cy="475488"/>
+          </a:xfrm>
+          <a:prstGeom prst="rect">
+            <a:avLst/>
+          </a:prstGeom>
+          <a:extLst>
+            <a:ext uri="{C572A759-6A51-4108-AA02-DFA0A04FC94B}">
+              <ma14:wrappingTextBoxFlag xmlns:ma14="http://schemas.microsoft.com/office/mac/drawingml/2011/main" val="0"/>
+            </a:ext>
+          </a:extLst>
+        </p:spPr>
+        <p:txBody>
+          <a:bodyPr/>
+          <a:lstStyle>
+            <a:lvl1pPr>
+              <a:defRPr sz="2000">
+                <a:solidFill>
+                  <a:srgbClr val="FFFFFF"/>
+                </a:solidFill>
+                <a:latin typeface="Calibri"/>
+                <a:ea typeface="Calibri"/>
+                <a:cs typeface="Calibri"/>
+              </a:defRPr>
+            </a:lvl1pPr>
+          </a:lstStyle>
+          <a:p>
+            <a:pPr algn="ctr"/>
+            <a:fld id="{F7021451-1387-4CA6-816F-3879F97B5CBC}" type="slidenum">
+              <a:rPr b="1" lang="en-US"/>
               <a:t>65</a:t>
             </a:fld>
             <a:endParaRPr lang="en-US"/>
@@ -25788,7 +25731,7 @@
                 <a:ea typeface="Calibri" pitchFamily="34" charset="-122"/>
                 <a:cs typeface="Calibri" pitchFamily="34" charset="-120"/>
               </a:rPr>
-              <a:t>TEACHER'S NOTE</a:t>
+              <a:t>REFERENCES</a:t>
             </a:r>
             <a:endParaRPr lang="en-US" sz="1400" dirty="0"/>
           </a:p>
@@ -25811,7 +25754,7 @@
         <p:spPr>
           <a:xfrm>
             <a:off x="0" y="658368"/>
-            <a:ext cx="3840480" cy="5833872"/>
+            <a:ext cx="5120640" cy="5833872"/>
           </a:xfrm>
           <a:prstGeom prst="rect">
             <a:avLst/>
@@ -25826,8 +25769,8 @@
         </p:nvSpPr>
         <p:spPr>
           <a:xfrm>
-            <a:off x="4069080" y="1005840"/>
-            <a:ext cx="7802575" cy="731520"/>
+            <a:off x="5349240" y="1005840"/>
+            <a:ext cx="6522415" cy="731520"/>
           </a:xfrm>
           <a:prstGeom prst="rect">
             <a:avLst/>
@@ -25853,7 +25796,7 @@
                 <a:ea typeface="Times New Roman" pitchFamily="34" charset="-122"/>
                 <a:cs typeface="Times New Roman" pitchFamily="34" charset="-120"/>
               </a:rPr>
-              <a:t>Teacher's Note</a:t>
+              <a:t>References</a:t>
             </a:r>
             <a:endParaRPr lang="en-US" sz="3600" dirty="0"/>
           </a:p>
@@ -25867,8 +25810,8 @@
         </p:nvSpPr>
         <p:spPr>
           <a:xfrm>
-            <a:off x="4069080" y="1783080"/>
-            <a:ext cx="7802575" cy="4663440"/>
+            <a:off x="5349240" y="1783080"/>
+            <a:ext cx="6522415" cy="4663440"/>
           </a:xfrm>
           <a:prstGeom prst="rect">
             <a:avLst/>
@@ -25888,7 +25831,7 @@
               <a:buChar char="•"/>
             </a:pPr>
             <a:r>
-              <a:rPr lang="en-US" sz="2000" dirty="0">
+              <a:rPr lang="en-US" sz="1800" dirty="0">
                 <a:solidFill>
                   <a:srgbClr val="111111"/>
                 </a:solidFill>
@@ -25896,9 +25839,9 @@
                 <a:ea typeface="Calibri" pitchFamily="34" charset="-122"/>
                 <a:cs typeface="Calibri" pitchFamily="34" charset="-120"/>
               </a:rPr>
-              <a:t>Timing: Homework correction, plan, objectives 8 min | Recall, situation, action 10 min | 5 activities 30 min | Board summary (copying) 30 min | Evaluation, remediation 10 min | Homework, next lesson 5 min | Logbook 7 min</a:t>
-            </a:r>
-            <a:endParaRPr lang="en-US" sz="2000" dirty="0"/>
+              <a:t>Geography Syllabus for Sixth Forms (Lower and Upper Sixth), MINESEC, 2019 — Module 4 (Population Geography).</a:t>
+            </a:r>
+            <a:endParaRPr lang="en-US" sz="1800" dirty="0"/>
           </a:p>
           <a:p>
             <a:pPr algn="l" marL="342900" indent="-342900">
@@ -25909,7 +25852,7 @@
               <a:buChar char="•"/>
             </a:pPr>
             <a:r>
-              <a:rPr lang="en-US" sz="2000" dirty="0">
+              <a:rPr lang="en-US" sz="1800" dirty="0">
                 <a:solidFill>
                   <a:srgbClr val="111111"/>
                 </a:solidFill>
@@ -25917,9 +25860,9 @@
                 <a:ea typeface="Calibri" pitchFamily="34" charset="-122"/>
                 <a:cs typeface="Calibri" pitchFamily="34" charset="-120"/>
               </a:rPr>
-              <a:t>Without the projector (Activity 1): draw the two lines on the board.</a:t>
-            </a:r>
-            <a:endParaRPr lang="en-US" sz="2000" dirty="0"/>
+              <a:t>Teacher's course notes: Mr KAMDEM E., Population Geography (USA), GBHS Garoua, 2026.</a:t>
+            </a:r>
+            <a:endParaRPr lang="en-US" sz="1800" dirty="0"/>
           </a:p>
           <a:p>
             <a:pPr algn="l" marL="342900" indent="-342900">
@@ -25930,7 +25873,7 @@
               <a:buChar char="•"/>
             </a:pPr>
             <a:r>
-              <a:rPr lang="en-US" sz="2000" dirty="0">
+              <a:rPr lang="en-US" sz="1800" dirty="0">
                 <a:solidFill>
                   <a:srgbClr val="111111"/>
                 </a:solidFill>
@@ -25938,9 +25881,9 @@
                 <a:ea typeface="Calibri" pitchFamily="34" charset="-122"/>
                 <a:cs typeface="Calibri" pitchFamily="34" charset="-120"/>
               </a:rPr>
-              <a:t>Without the projector (Activity 2): write the stages in a table.</a:t>
-            </a:r>
-            <a:endParaRPr lang="en-US" sz="2000" dirty="0"/>
+              <a:t>United Nations, World Population Prospects 2024.</a:t>
+            </a:r>
+            <a:endParaRPr lang="en-US" sz="1800" dirty="0"/>
           </a:p>
           <a:p>
             <a:pPr algn="l" marL="342900" indent="-342900">
@@ -25951,7 +25894,7 @@
               <a:buChar char="•"/>
             </a:pPr>
             <a:r>
-              <a:rPr lang="en-US" sz="2000" dirty="0">
+              <a:rPr lang="en-US" sz="1800" dirty="0">
                 <a:solidFill>
                   <a:srgbClr val="111111"/>
                 </a:solidFill>
@@ -25959,9 +25902,9 @@
                 <a:ea typeface="Calibri" pitchFamily="34" charset="-122"/>
                 <a:cs typeface="Calibri" pitchFamily="34" charset="-120"/>
               </a:rPr>
-              <a:t>Without the projector (Activity 3): draw the staircase.</a:t>
-            </a:r>
-            <a:endParaRPr lang="en-US" sz="2000" dirty="0"/>
+              <a:t>Photo, Activity 4: “propaganda posters, one child policy” by kattebelletje, CC BY-NC 2.0, via Flickr (https://www.flickr.com/photos/97249369@N00/3349125321)</a:t>
+            </a:r>
+            <a:endParaRPr lang="en-US" sz="1800" dirty="0"/>
           </a:p>
           <a:p>
             <a:pPr algn="l" marL="342900" indent="-342900">
@@ -25972,7 +25915,7 @@
               <a:buChar char="•"/>
             </a:pPr>
             <a:r>
-              <a:rPr lang="en-US" sz="2000" dirty="0">
+              <a:rPr lang="en-US" sz="1800" dirty="0">
                 <a:solidFill>
                   <a:srgbClr val="111111"/>
                 </a:solidFill>
@@ -25980,30 +25923,9 @@
                 <a:ea typeface="Calibri" pitchFamily="34" charset="-122"/>
                 <a:cs typeface="Calibri" pitchFamily="34" charset="-120"/>
               </a:rPr>
-              <a:t>Without the projector (Activity 4): discuss one weakness.</a:t>
-            </a:r>
-            <a:endParaRPr lang="en-US" sz="2000" dirty="0"/>
-          </a:p>
-          <a:p>
-            <a:pPr algn="l" marL="342900" indent="-342900">
-              <a:spcAft>
-                <a:spcPts val="800"/>
-              </a:spcAft>
-              <a:buSzPct val="100000"/>
-              <a:buChar char="•"/>
-            </a:pPr>
-            <a:r>
-              <a:rPr lang="en-US" sz="2000" dirty="0">
-                <a:solidFill>
-                  <a:srgbClr val="111111"/>
-                </a:solidFill>
-                <a:latin typeface="Calibri" pitchFamily="34" charset="0"/>
-                <a:ea typeface="Calibri" pitchFamily="34" charset="-122"/>
-                <a:cs typeface="Calibri" pitchFamily="34" charset="-120"/>
-              </a:rPr>
-              <a:t>Without the projector (Activity 5): write Cameroon's rates on the board.</a:t>
-            </a:r>
-            <a:endParaRPr lang="en-US" sz="2000" dirty="0"/>
+              <a:t>Diagrams and animations: drawn for this lesson (Geography Department).</a:t>
+            </a:r>
+            <a:endParaRPr lang="en-US" sz="1800" dirty="0"/>
           </a:p>
         </p:txBody>
       </p:sp>
@@ -26050,310 +25972,6 @@
             <a:fld id="{F7021451-1387-4CA6-816F-3879F97B5CBC}" type="slidenum">
               <a:rPr b="1" lang="en-US"/>
               <a:t>66</a:t>
-            </a:fld>
-            <a:endParaRPr lang="en-US"/>
-          </a:p>
-        </p:txBody>
-      </p:sp>
-    </p:spTree>
-  </p:cSld>
-  <p:clrMapOvr>
-    <a:masterClrMapping/>
-  </p:clrMapOvr>
-</p:sld>
-</file>
-
-<file path=ppt/slides/slide67.xml><?xml version="1.0" encoding="utf-8"?>
-<p:sld xmlns:a="http://schemas.openxmlformats.org/drawingml/2006/main" xmlns:r="http://schemas.openxmlformats.org/officeDocument/2006/relationships" xmlns:p="http://schemas.openxmlformats.org/presentationml/2006/main">
-  <p:cSld name="Slide 67">
-    <p:spTree>
-      <p:nvGrpSpPr>
-        <p:cNvPr id="1" name=""/>
-        <p:cNvGrpSpPr/>
-        <p:nvPr/>
-      </p:nvGrpSpPr>
-      <p:grpSpPr>
-        <a:xfrm>
-          <a:off x="0" y="0"/>
-          <a:ext cx="0" cy="0"/>
-          <a:chOff x="0" y="0"/>
-          <a:chExt cx="0" cy="0"/>
-        </a:xfrm>
-      </p:grpSpPr>
-      <p:sp>
-        <p:nvSpPr>
-          <p:cNvPr id="2" name="Text 0"/>
-          <p:cNvSpPr/>
-          <p:nvPr/>
-        </p:nvSpPr>
-        <p:spPr>
-          <a:xfrm>
-            <a:off x="457200" y="713232"/>
-            <a:ext cx="11368735" cy="274320"/>
-          </a:xfrm>
-          <a:prstGeom prst="rect">
-            <a:avLst/>
-          </a:prstGeom>
-          <a:noFill/>
-          <a:ln/>
-        </p:spPr>
-        <p:txBody>
-          <a:bodyPr wrap="square" lIns="0" tIns="0" rIns="0" bIns="0" rtlCol="0" anchor="ctr"/>
-          <a:lstStyle/>
-          <a:p>
-            <a:pPr algn="r" indent="0" marL="0">
-              <a:buNone/>
-            </a:pPr>
-            <a:r>
-              <a:rPr lang="en-US" sz="1400" b="1" dirty="0">
-                <a:solidFill>
-                  <a:srgbClr val="1C3F6E"/>
-                </a:solidFill>
-                <a:latin typeface="Calibri" pitchFamily="34" charset="0"/>
-                <a:ea typeface="Calibri" pitchFamily="34" charset="-122"/>
-                <a:cs typeface="Calibri" pitchFamily="34" charset="-120"/>
-              </a:rPr>
-              <a:t>REFERENCES</a:t>
-            </a:r>
-            <a:endParaRPr lang="en-US" sz="1400" dirty="0"/>
-          </a:p>
-        </p:txBody>
-      </p:sp>
-      <p:pic>
-        <p:nvPicPr>
-          <p:cNvPr id="3" name="Image 0" descr="/home/claude/f4/img/minesec_sheet.png">    </p:cNvPr>
-          <p:cNvPicPr>
-            <a:picLocks noChangeAspect="1"/>
-          </p:cNvPicPr>
-          <p:nvPr/>
-        </p:nvPicPr>
-        <p:blipFill>
-          <a:blip r:embed="rId1"/>
-          <a:stretch>
-            <a:fillRect/>
-          </a:stretch>
-        </p:blipFill>
-        <p:spPr>
-          <a:xfrm>
-            <a:off x="0" y="658368"/>
-            <a:ext cx="5120640" cy="5833872"/>
-          </a:xfrm>
-          <a:prstGeom prst="rect">
-            <a:avLst/>
-          </a:prstGeom>
-        </p:spPr>
-      </p:pic>
-      <p:sp>
-        <p:nvSpPr>
-          <p:cNvPr id="4" name="Text 1"/>
-          <p:cNvSpPr/>
-          <p:nvPr/>
-        </p:nvSpPr>
-        <p:spPr>
-          <a:xfrm>
-            <a:off x="5349240" y="1005840"/>
-            <a:ext cx="6522415" cy="731520"/>
-          </a:xfrm>
-          <a:prstGeom prst="rect">
-            <a:avLst/>
-          </a:prstGeom>
-          <a:noFill/>
-          <a:ln/>
-        </p:spPr>
-        <p:txBody>
-          <a:bodyPr wrap="square" lIns="0" tIns="0" rIns="0" bIns="0" rtlCol="0" anchor="ctr">
-            <a:normAutofit/>
-          </a:bodyPr>
-          <a:lstStyle/>
-          <a:p>
-            <a:pPr algn="ctr" indent="0" marL="0">
-              <a:buNone/>
-            </a:pPr>
-            <a:r>
-              <a:rPr lang="en-US" sz="3600" b="1" dirty="0">
-                <a:solidFill>
-                  <a:srgbClr val="990011"/>
-                </a:solidFill>
-                <a:latin typeface="Times New Roman" pitchFamily="34" charset="0"/>
-                <a:ea typeface="Times New Roman" pitchFamily="34" charset="-122"/>
-                <a:cs typeface="Times New Roman" pitchFamily="34" charset="-120"/>
-              </a:rPr>
-              <a:t>References</a:t>
-            </a:r>
-            <a:endParaRPr lang="en-US" sz="3600" dirty="0"/>
-          </a:p>
-        </p:txBody>
-      </p:sp>
-      <p:sp>
-        <p:nvSpPr>
-          <p:cNvPr id="5" name="Text 2"/>
-          <p:cNvSpPr/>
-          <p:nvPr/>
-        </p:nvSpPr>
-        <p:spPr>
-          <a:xfrm>
-            <a:off x="5349240" y="1783080"/>
-            <a:ext cx="6522415" cy="4663440"/>
-          </a:xfrm>
-          <a:prstGeom prst="rect">
-            <a:avLst/>
-          </a:prstGeom>
-          <a:noFill/>
-          <a:ln/>
-        </p:spPr>
-        <p:txBody>
-          <a:bodyPr wrap="square" lIns="0" tIns="0" rIns="0" bIns="0" rtlCol="0" anchor="t"/>
-          <a:lstStyle/>
-          <a:p>
-            <a:pPr algn="l" marL="342900" indent="-342900">
-              <a:spcAft>
-                <a:spcPts val="800"/>
-              </a:spcAft>
-              <a:buSzPct val="100000"/>
-              <a:buChar char="•"/>
-            </a:pPr>
-            <a:r>
-              <a:rPr lang="en-US" sz="1800" dirty="0">
-                <a:solidFill>
-                  <a:srgbClr val="111111"/>
-                </a:solidFill>
-                <a:latin typeface="Calibri" pitchFamily="34" charset="0"/>
-                <a:ea typeface="Calibri" pitchFamily="34" charset="-122"/>
-                <a:cs typeface="Calibri" pitchFamily="34" charset="-120"/>
-              </a:rPr>
-              <a:t>Geography Syllabus for Sixth Forms (Lower and Upper Sixth), MINESEC, 2019 — Module 4 (Population Geography).</a:t>
-            </a:r>
-            <a:endParaRPr lang="en-US" sz="1800" dirty="0"/>
-          </a:p>
-          <a:p>
-            <a:pPr algn="l" marL="342900" indent="-342900">
-              <a:spcAft>
-                <a:spcPts val="800"/>
-              </a:spcAft>
-              <a:buSzPct val="100000"/>
-              <a:buChar char="•"/>
-            </a:pPr>
-            <a:r>
-              <a:rPr lang="en-US" sz="1800" dirty="0">
-                <a:solidFill>
-                  <a:srgbClr val="111111"/>
-                </a:solidFill>
-                <a:latin typeface="Calibri" pitchFamily="34" charset="0"/>
-                <a:ea typeface="Calibri" pitchFamily="34" charset="-122"/>
-                <a:cs typeface="Calibri" pitchFamily="34" charset="-120"/>
-              </a:rPr>
-              <a:t>Teacher's course notes: Mr KAMDEM E., Population Geography (USA), GBHS Garoua, 2026.</a:t>
-            </a:r>
-            <a:endParaRPr lang="en-US" sz="1800" dirty="0"/>
-          </a:p>
-          <a:p>
-            <a:pPr algn="l" marL="342900" indent="-342900">
-              <a:spcAft>
-                <a:spcPts val="800"/>
-              </a:spcAft>
-              <a:buSzPct val="100000"/>
-              <a:buChar char="•"/>
-            </a:pPr>
-            <a:r>
-              <a:rPr lang="en-US" sz="1800" dirty="0">
-                <a:solidFill>
-                  <a:srgbClr val="111111"/>
-                </a:solidFill>
-                <a:latin typeface="Calibri" pitchFamily="34" charset="0"/>
-                <a:ea typeface="Calibri" pitchFamily="34" charset="-122"/>
-                <a:cs typeface="Calibri" pitchFamily="34" charset="-120"/>
-              </a:rPr>
-              <a:t>United Nations, World Population Prospects 2024.</a:t>
-            </a:r>
-            <a:endParaRPr lang="en-US" sz="1800" dirty="0"/>
-          </a:p>
-          <a:p>
-            <a:pPr algn="l" marL="342900" indent="-342900">
-              <a:spcAft>
-                <a:spcPts val="800"/>
-              </a:spcAft>
-              <a:buSzPct val="100000"/>
-              <a:buChar char="•"/>
-            </a:pPr>
-            <a:r>
-              <a:rPr lang="en-US" sz="1800" dirty="0">
-                <a:solidFill>
-                  <a:srgbClr val="111111"/>
-                </a:solidFill>
-                <a:latin typeface="Calibri" pitchFamily="34" charset="0"/>
-                <a:ea typeface="Calibri" pitchFamily="34" charset="-122"/>
-                <a:cs typeface="Calibri" pitchFamily="34" charset="-120"/>
-              </a:rPr>
-              <a:t>Photo, Activity 4: “propaganda posters, one child policy” by kattebelletje, CC BY-NC 2.0, via Flickr (https://www.flickr.com/photos/97249369@N00/3349125321)</a:t>
-            </a:r>
-            <a:endParaRPr lang="en-US" sz="1800" dirty="0"/>
-          </a:p>
-          <a:p>
-            <a:pPr algn="l" marL="342900" indent="-342900">
-              <a:spcAft>
-                <a:spcPts val="800"/>
-              </a:spcAft>
-              <a:buSzPct val="100000"/>
-              <a:buChar char="•"/>
-            </a:pPr>
-            <a:r>
-              <a:rPr lang="en-US" sz="1800" dirty="0">
-                <a:solidFill>
-                  <a:srgbClr val="111111"/>
-                </a:solidFill>
-                <a:latin typeface="Calibri" pitchFamily="34" charset="0"/>
-                <a:ea typeface="Calibri" pitchFamily="34" charset="-122"/>
-                <a:cs typeface="Calibri" pitchFamily="34" charset="-120"/>
-              </a:rPr>
-              <a:t>Diagrams and animations: drawn for this lesson (Geography Department).</a:t>
-            </a:r>
-            <a:endParaRPr lang="en-US" sz="1800" dirty="0"/>
-          </a:p>
-        </p:txBody>
-      </p:sp>
-      <p:sp>
-        <p:nvSpPr>
-          <p:cNvPr id="25" name="Slide Number Placeholder 0"/>
-          <p:cNvSpPr>
-            <a:spLocks noGrp="1"/>
-          </p:cNvSpPr>
-          <p:nvPr>
-            <p:ph type="sldNum" sz="quarter" idx="4294967295"/>
-          </p:nvPr>
-        </p:nvSpPr>
-        <p:spPr>
-          <a:xfrm>
-            <a:off x="27432" y="91440"/>
-            <a:ext cx="585216" cy="475488"/>
-          </a:xfrm>
-          <a:prstGeom prst="rect">
-            <a:avLst/>
-          </a:prstGeom>
-          <a:extLst>
-            <a:ext uri="{C572A759-6A51-4108-AA02-DFA0A04FC94B}">
-              <ma14:wrappingTextBoxFlag xmlns:ma14="http://schemas.microsoft.com/office/mac/drawingml/2011/main" val="0"/>
-            </a:ext>
-          </a:extLst>
-        </p:spPr>
-        <p:txBody>
-          <a:bodyPr/>
-          <a:lstStyle>
-            <a:lvl1pPr>
-              <a:defRPr sz="2000">
-                <a:solidFill>
-                  <a:srgbClr val="FFFFFF"/>
-                </a:solidFill>
-                <a:latin typeface="Calibri"/>
-                <a:ea typeface="Calibri"/>
-                <a:cs typeface="Calibri"/>
-              </a:defRPr>
-            </a:lvl1pPr>
-          </a:lstStyle>
-          <a:p>
-            <a:pPr algn="ctr"/>
-            <a:fld id="{F7021451-1387-4CA6-816F-3879F97B5CBC}" type="slidenum">
-              <a:rPr b="1" lang="en-US"/>
-              <a:t>67</a:t>
             </a:fld>
             <a:endParaRPr lang="en-US"/>
           </a:p>

--- a/lecons/USA/Population Geography/16_USA_POP_L12_The_Demographic_Transition_Model.pptx
+++ b/lecons/USA/Population Geography/16_USA_POP_L12_The_Demographic_Transition_Model.pptx
@@ -71,9 +71,11 @@
     <p:sldId id="319" r:id="rId65"/>
     <p:sldId id="320" r:id="rId66"/>
     <p:sldId id="321" r:id="rId67"/>
+    <p:sldId id="322" r:id="rId68"/>
+    <p:sldId id="323" r:id="rId69"/>
   </p:sldIdLst>
   <p:notesMasterIdLst>
-    <p:notesMasterId r:id="rId68"/>
+    <p:notesMasterId r:id="rId70"/>
   </p:notesMasterIdLst>
   <p:sldSz cx="12192000" cy="6858000"/>
   <p:notesSz cx="6858000" cy="12192000"/>
@@ -3295,7 +3297,7 @@
           <a:p>
             <a:r>
               <a:rPr lang="en-US" dirty="0"/>
-              <a:t>Let us copy Meaning of the Model. The demographic transition model is explained as follows. Copy the point on Origin on the left, then draw the diagram on the right: the demographic transition model. Give it a title and label it clearly.</a:t>
+              <a:t>Let us copy Meaning of the Model. The demographic transition model is explained as follows. Copy the point on A model based on history on the left, then draw the diagram on the right: the demographic transition model. Give it a title and label it clearly.</a:t>
             </a:r>
             <a:endParaRPr lang="en-US" dirty="0"/>
           </a:p>
@@ -3383,7 +3385,7 @@
           <a:p>
             <a:r>
               <a:rPr lang="en-US" dirty="0"/>
-              <a:t>We continue with Meaning of the Model. Copy the point on Principle: write the key term first, then its explanation.</a:t>
+              <a:t>We continue with Meaning of the Model. Copy the point on Death rates fall first: write the key term first, then its explanation.</a:t>
             </a:r>
             <a:endParaRPr lang="en-US" dirty="0"/>
           </a:p>
@@ -3559,7 +3561,7 @@
           <a:p>
             <a:r>
               <a:rPr lang="en-US" dirty="0"/>
-              <a:t>Copy the point on Link with Rostow's model on the left, then draw the diagram on the right: rostow's model. Give it a title and label it clearly.</a:t>
+              <a:t>We continue with Meaning of the Model. Copy the point on Birth rates fall later: write the key term first, then its explanation.</a:t>
             </a:r>
             <a:endParaRPr lang="en-US" dirty="0"/>
           </a:p>
@@ -3647,7 +3649,7 @@
           <a:p>
             <a:r>
               <a:rPr lang="en-US" dirty="0"/>
-              <a:t>Let us copy Stages 1 and 2. The first two stages have the following characteristics. Copy the point on Stage 1, high stationary: write the key term first, then its explanation.</a:t>
+              <a:t>Copy the point on Link with Rostow's model on the left, then draw the diagram on the right: rostow's model. Give it a title and label it clearly.</a:t>
             </a:r>
             <a:endParaRPr lang="en-US" dirty="0"/>
           </a:p>
@@ -3735,7 +3737,7 @@
           <a:p>
             <a:r>
               <a:rPr lang="en-US" dirty="0"/>
-              <a:t>Copy the point on Stage 2, early expanding on the left, then draw the diagram on the right: countries at each stage. Give it a title and label it clearly.</a:t>
+              <a:t>Let us copy Stages 1 and 2. The first two stages have the following characteristics. Copy the point on Stage 1, high stationary: write the key term first, then its explanation.</a:t>
             </a:r>
             <a:endParaRPr lang="en-US" dirty="0"/>
           </a:p>
@@ -3823,7 +3825,7 @@
           <a:p>
             <a:r>
               <a:rPr lang="en-US" dirty="0"/>
-              <a:t>Let us copy Stages 3, 4 and 5. The last three stages have the following characteristics. Copy the point on Stage 3, late expanding: write the key term first, then its explanation.</a:t>
+              <a:t>We continue with Stages 1 and 2. Copy the point on Stage 2, early expanding: write the key term first, then its explanation.</a:t>
             </a:r>
             <a:endParaRPr lang="en-US" dirty="0"/>
           </a:p>
@@ -3911,7 +3913,7 @@
           <a:p>
             <a:r>
               <a:rPr lang="en-US" dirty="0"/>
-              <a:t>We continue with Stages 3, 4 and 5. Copy the point on Stage 4, low stationary: write the key term first, then its explanation.</a:t>
+              <a:t>Let us copy Stages 3, 4 and 5. The last three stages have the following characteristics. Copy the point on Stage 3, late expanding: write the key term first, then its explanation.</a:t>
             </a:r>
             <a:endParaRPr lang="en-US" dirty="0"/>
           </a:p>
@@ -3999,7 +4001,7 @@
           <a:p>
             <a:r>
               <a:rPr lang="en-US" dirty="0"/>
-              <a:t>We continue with Stages 3, 4 and 5. Copy the point on Stage 5, declining: write the key term first, then its explanation.</a:t>
+              <a:t>We continue with Stages 3, 4 and 5. Copy the point on Stage 4, low stationary: write the key term first, then its explanation.</a:t>
             </a:r>
             <a:endParaRPr lang="en-US" dirty="0"/>
           </a:p>
@@ -4087,7 +4089,7 @@
           <a:p>
             <a:r>
               <a:rPr lang="en-US" dirty="0"/>
-              <a:t>Let us copy Strengths. The model has the following strengths. Copy the point on A simple framework: write the key term first, then its explanation.</a:t>
+              <a:t>Copy the point on Stage 5, declining on the left, then draw the diagram on the right: countries at each stage. Give it a title and label it clearly.</a:t>
             </a:r>
             <a:endParaRPr lang="en-US" dirty="0"/>
           </a:p>
@@ -4175,7 +4177,7 @@
           <a:p>
             <a:r>
               <a:rPr lang="en-US" dirty="0"/>
-              <a:t>We continue with Strengths. Copy the point on The role of development: write the key term first, then its explanation.</a:t>
+              <a:t>Let us copy Strengths. The model has the following strengths. Copy the point on A simple framework: write the key term first, then its explanation.</a:t>
             </a:r>
             <a:endParaRPr lang="en-US" dirty="0"/>
           </a:p>
@@ -4263,7 +4265,7 @@
           <a:p>
             <a:r>
               <a:rPr lang="en-US" dirty="0"/>
-              <a:t>Let us copy Weaknesses. The model has the following weaknesses. Copy the point on It is Eurocentric: write the key term first, then its explanation.</a:t>
+              <a:t>We continue with Strengths. Copy the point on The role of development: write the key term first, then its explanation.</a:t>
             </a:r>
             <a:endParaRPr lang="en-US" dirty="0"/>
           </a:p>
@@ -4351,7 +4353,7 @@
           <a:p>
             <a:r>
               <a:rPr lang="en-US" dirty="0"/>
-              <a:t>Copy the point on It ignores other causes on the left, then draw the diagram on the right: the one-child policy. Give it a title and label it clearly.</a:t>
+              <a:t>Let us copy Weaknesses. The model has the following weaknesses. Copy the point on It is Eurocentric: write the key term first, then its explanation.</a:t>
             </a:r>
             <a:endParaRPr lang="en-US" dirty="0"/>
           </a:p>
@@ -4527,7 +4529,7 @@
           <a:p>
             <a:r>
               <a:rPr lang="en-US" dirty="0"/>
-              <a:t>We continue with Weaknesses. Copy the point on Time scales and stage 5: write the key term first, then its explanation.</a:t>
+              <a:t>Copy the point on It ignores other causes on the left, then draw the diagram on the right: the one-child policy. Give it a title and label it clearly.</a:t>
             </a:r>
             <a:endParaRPr lang="en-US" dirty="0"/>
           </a:p>
@@ -4615,7 +4617,7 @@
           <a:p>
             <a:r>
               <a:rPr lang="en-US" dirty="0"/>
-              <a:t>Let us copy Application to Cameroon. The model applies to Cameroon as follows. Copy the point on Current stage on the left, then draw the diagram on the right: birth and death rates of Cameroon. Give it a title and label it clearly.</a:t>
+              <a:t>We continue with Weaknesses. Copy the point on Different speeds: write the key term first, then its explanation.</a:t>
             </a:r>
             <a:endParaRPr lang="en-US" dirty="0"/>
           </a:p>
@@ -4703,7 +4705,7 @@
           <a:p>
             <a:r>
               <a:rPr lang="en-US" dirty="0"/>
-              <a:t>We continue with Application to Cameroon. Copy the point on A high birth rate: write the key term first, then its explanation.</a:t>
+              <a:t>We continue with Weaknesses. Copy the point on A stage added later: write the key term first, then its explanation.</a:t>
             </a:r>
             <a:endParaRPr lang="en-US" dirty="0"/>
           </a:p>
@@ -4791,7 +4793,7 @@
           <a:p>
             <a:r>
               <a:rPr lang="en-US" dirty="0"/>
-              <a:t>We continue with Application to Cameroon. Copy the point on A low death rate and rapid growth: write the key term first, then its explanation.</a:t>
+              <a:t>Let us copy Application to Cameroon. The model applies to Cameroon as follows. Copy the point on Current stage on the left, then draw the diagram on the right: birth and death rates of Cameroon. Give it a title and label it clearly.</a:t>
             </a:r>
             <a:endParaRPr lang="en-US" dirty="0"/>
           </a:p>
@@ -4879,7 +4881,7 @@
           <a:p>
             <a:r>
               <a:rPr lang="en-US" dirty="0"/>
-              <a:t>We continue with Application to Cameroon. Copy the point on Future: write the key term first, then its explanation.</a:t>
+              <a:t>We continue with Application to Cameroon. Copy the point on A high birth rate: write the key term first, then its explanation.</a:t>
             </a:r>
             <a:endParaRPr lang="en-US" dirty="0"/>
           </a:p>
@@ -4967,7 +4969,7 @@
           <a:p>
             <a:r>
               <a:rPr lang="en-US" dirty="0"/>
-              <a:t>Now let us check what you have understood. Question 1: Describe Stage 2 of the demographic transition model. Answer in your exercise book.</a:t>
+              <a:t>We continue with Application to Cameroon. Copy the point on A low death rate and rapid growth: write the key term first, then its explanation.</a:t>
             </a:r>
             <a:endParaRPr lang="en-US" dirty="0"/>
           </a:p>
@@ -5055,7 +5057,7 @@
           <a:p>
             <a:r>
               <a:rPr lang="en-US" dirty="0"/>
-              <a:t>The expected answer is: death rates fall quickly while birth rates remain high, so the population grows very fast. If you got it right, well done.</a:t>
+              <a:t>We continue with Application to Cameroon. Copy the point on Future: write the key term first, then its explanation.</a:t>
             </a:r>
             <a:endParaRPr lang="en-US" dirty="0"/>
           </a:p>
@@ -5143,7 +5145,7 @@
           <a:p>
             <a:r>
               <a:rPr lang="en-US" dirty="0"/>
-              <a:t>Now let us check what you have understood. Question 2: Give two weaknesses of the demographic transition model. Answer in your exercise book.</a:t>
+              <a:t>Now let us check what you have understood. Question 1: Describe Stage 2 of the demographic transition model. Answer in your exercise book.</a:t>
             </a:r>
             <a:endParaRPr lang="en-US" dirty="0"/>
           </a:p>
@@ -5231,7 +5233,7 @@
           <a:p>
             <a:r>
               <a:rPr lang="en-US" dirty="0"/>
-              <a:t>The expected answer is: it is Eurocentric; it ignores wars, epidemics, migration and policies; countries move at different speeds (any two). If you got it right, well done.</a:t>
+              <a:t>The expected answer is: death rates fall quickly while birth rates remain high, so the population grows very fast. If you got it right, well done.</a:t>
             </a:r>
             <a:endParaRPr lang="en-US" dirty="0"/>
           </a:p>
@@ -5319,7 +5321,7 @@
           <a:p>
             <a:r>
               <a:rPr lang="en-US" dirty="0"/>
-              <a:t>For those who need more practice, fill in the blanks in your exercise book. The answers are: number 1, high; number 2, 5; number 3, 3.</a:t>
+              <a:t>Now let us check what you have understood. Question 2: Give two weaknesses of the demographic transition model. Answer in your exercise book.</a:t>
             </a:r>
             <a:endParaRPr lang="en-US" dirty="0"/>
           </a:p>
@@ -5495,7 +5497,7 @@
           <a:p>
             <a:r>
               <a:rPr lang="en-US" dirty="0"/>
-              <a:t>For your homework: Define migration. We shall correct it at the beginning of our next lesson.</a:t>
+              <a:t>The expected answer is: it is Eurocentric; it ignores wars, epidemics, migration and policies; countries move at different speeds (any two). If you got it right, well done.</a:t>
             </a:r>
             <a:endParaRPr lang="en-US" dirty="0"/>
           </a:p>
@@ -5583,7 +5585,7 @@
           <a:p>
             <a:r>
               <a:rPr lang="en-US" dirty="0"/>
-              <a:t>Our next lesson will be on Lesson 13: Migration: Characteristics, Laws and Models. Thank you for your attention, and see you next time.</a:t>
+              <a:t>For those who need more practice, fill in the blanks in your exercise book. The answers are: number 1, high; number 2, 5; number 3, 3.</a:t>
             </a:r>
             <a:endParaRPr lang="en-US" dirty="0"/>
           </a:p>
@@ -5671,7 +5673,7 @@
           <a:p>
             <a:r>
               <a:rPr lang="en-US" dirty="0"/>
-              <a:t>Let us play the bilingual game. I say a word in English, and you give me the French word. Then we do the reverse.</a:t>
+              <a:t>For your homework: Define migration. We shall correct it at the beginning of our next lesson.</a:t>
             </a:r>
             <a:endParaRPr lang="en-US" dirty="0"/>
           </a:p>
@@ -5759,7 +5761,7 @@
           <a:p>
             <a:r>
               <a:rPr lang="en-US" dirty="0"/>
-              <a:t>I record this information in the official logbook of the class after the lesson.</a:t>
+              <a:t>Our next lesson will be on Lesson 13: Migration: Characteristics, Laws and Models. Thank you for your attention, and see you next time.</a:t>
             </a:r>
             <a:endParaRPr lang="en-US" dirty="0"/>
           </a:p>
@@ -5847,7 +5849,7 @@
           <a:p>
             <a:r>
               <a:rPr lang="en-US" dirty="0"/>
-              <a:t>I complete the second page of the logbook: the matter taught, the evaluation, the homework and the attendance.</a:t>
+              <a:t>Let us play the bilingual game. I say a word in English, and you give me the French word. Then we do the reverse.</a:t>
             </a:r>
             <a:endParaRPr lang="en-US" dirty="0"/>
           </a:p>
@@ -5935,7 +5937,7 @@
           <a:p>
             <a:r>
               <a:rPr lang="en-US" dirty="0"/>
-              <a:t>This slide is for me, the teacher: it gives the timing of the lesson and what to do if the projector is not available.</a:t>
+              <a:t>I record this information in the official logbook of the class after the lesson.</a:t>
             </a:r>
             <a:endParaRPr lang="en-US" dirty="0"/>
           </a:p>
@@ -6023,7 +6025,7 @@
           <a:p>
             <a:r>
               <a:rPr lang="en-US" dirty="0"/>
-              <a:t>These are the references and picture credits used to prepare this lesson.</a:t>
+              <a:t>I complete the second page of the logbook: the matter taught, the evaluation, the homework and the attendance.</a:t>
             </a:r>
             <a:endParaRPr lang="en-US" dirty="0"/>
           </a:p>
@@ -6047,6 +6049,182 @@
             <a:fld id="{F7021451-1387-4CA6-816F-3879F97B5CBC}" type="slidenum">
               <a:rPr lang="en-US"/>
               <a:t>66</a:t>
+            </a:fld>
+            <a:endParaRPr lang="en-US"/>
+          </a:p>
+        </p:txBody>
+      </p:sp>
+    </p:spTree>
+    <p:extLst>
+      <p:ext uri="{BB962C8B-B14F-4D97-AF65-F5344CB8AC3E}">
+        <p14:creationId xmlns:p14="http://schemas.microsoft.com/office/powerpoint/2010/main" val="1024086991"/>
+      </p:ext>
+    </p:extLst>
+  </p:cSld>
+  <p:clrMapOvr>
+    <a:masterClrMapping/>
+  </p:clrMapOvr>
+</p:notes>
+</file>
+
+<file path=ppt/notesSlides/notesSlide67.xml><?xml version="1.0" encoding="utf-8"?>
+<p:notes xmlns:a="http://schemas.openxmlformats.org/drawingml/2006/main" xmlns:r="http://schemas.openxmlformats.org/officeDocument/2006/relationships" xmlns:p="http://schemas.openxmlformats.org/presentationml/2006/main">
+  <p:cSld>
+    <p:spTree>
+      <p:nvGrpSpPr>
+        <p:cNvPr id="1" name=""/>
+        <p:cNvGrpSpPr/>
+        <p:nvPr/>
+      </p:nvGrpSpPr>
+      <p:grpSpPr>
+        <a:xfrm>
+          <a:off x="0" y="0"/>
+          <a:ext cx="0" cy="0"/>
+          <a:chOff x="0" y="0"/>
+          <a:chExt cx="0" cy="0"/>
+        </a:xfrm>
+      </p:grpSpPr>
+      <p:sp>
+        <p:nvSpPr>
+          <p:cNvPr id="2" name="Slide Image Placeholder 1"/>
+          <p:cNvSpPr>
+            <a:spLocks noGrp="1" noRot="1" noChangeAspect="1"/>
+          </p:cNvSpPr>
+          <p:nvPr>
+            <p:ph type="sldImg"/>
+          </p:nvPr>
+        </p:nvSpPr>
+        <p:spPr/>
+      </p:sp>
+      <p:sp>
+        <p:nvSpPr>
+          <p:cNvPr id="3" name="Notes Placeholder 2"/>
+          <p:cNvSpPr>
+            <a:spLocks noGrp="1"/>
+          </p:cNvSpPr>
+          <p:nvPr>
+            <p:ph type="body" idx="1"/>
+          </p:nvPr>
+        </p:nvSpPr>
+        <p:spPr/>
+        <p:txBody>
+          <a:bodyPr/>
+          <a:lstStyle/>
+          <a:p>
+            <a:r>
+              <a:rPr lang="en-US" dirty="0"/>
+              <a:t>This slide is for me, the teacher: it gives the timing of the lesson and what to do if the projector is not available.</a:t>
+            </a:r>
+            <a:endParaRPr lang="en-US" dirty="0"/>
+          </a:p>
+        </p:txBody>
+      </p:sp>
+      <p:sp>
+        <p:nvSpPr>
+          <p:cNvPr id="4" name="Slide Number Placeholder 3"/>
+          <p:cNvSpPr>
+            <a:spLocks noGrp="1"/>
+          </p:cNvSpPr>
+          <p:nvPr>
+            <p:ph type="sldNum" sz="quarter" idx="10"/>
+          </p:nvPr>
+        </p:nvSpPr>
+        <p:spPr/>
+        <p:txBody>
+          <a:bodyPr/>
+          <a:lstStyle/>
+          <a:p>
+            <a:fld id="{F7021451-1387-4CA6-816F-3879F97B5CBC}" type="slidenum">
+              <a:rPr lang="en-US"/>
+              <a:t>67</a:t>
+            </a:fld>
+            <a:endParaRPr lang="en-US"/>
+          </a:p>
+        </p:txBody>
+      </p:sp>
+    </p:spTree>
+    <p:extLst>
+      <p:ext uri="{BB962C8B-B14F-4D97-AF65-F5344CB8AC3E}">
+        <p14:creationId xmlns:p14="http://schemas.microsoft.com/office/powerpoint/2010/main" val="1024086991"/>
+      </p:ext>
+    </p:extLst>
+  </p:cSld>
+  <p:clrMapOvr>
+    <a:masterClrMapping/>
+  </p:clrMapOvr>
+</p:notes>
+</file>
+
+<file path=ppt/notesSlides/notesSlide68.xml><?xml version="1.0" encoding="utf-8"?>
+<p:notes xmlns:a="http://schemas.openxmlformats.org/drawingml/2006/main" xmlns:r="http://schemas.openxmlformats.org/officeDocument/2006/relationships" xmlns:p="http://schemas.openxmlformats.org/presentationml/2006/main">
+  <p:cSld>
+    <p:spTree>
+      <p:nvGrpSpPr>
+        <p:cNvPr id="1" name=""/>
+        <p:cNvGrpSpPr/>
+        <p:nvPr/>
+      </p:nvGrpSpPr>
+      <p:grpSpPr>
+        <a:xfrm>
+          <a:off x="0" y="0"/>
+          <a:ext cx="0" cy="0"/>
+          <a:chOff x="0" y="0"/>
+          <a:chExt cx="0" cy="0"/>
+        </a:xfrm>
+      </p:grpSpPr>
+      <p:sp>
+        <p:nvSpPr>
+          <p:cNvPr id="2" name="Slide Image Placeholder 1"/>
+          <p:cNvSpPr>
+            <a:spLocks noGrp="1" noRot="1" noChangeAspect="1"/>
+          </p:cNvSpPr>
+          <p:nvPr>
+            <p:ph type="sldImg"/>
+          </p:nvPr>
+        </p:nvSpPr>
+        <p:spPr/>
+      </p:sp>
+      <p:sp>
+        <p:nvSpPr>
+          <p:cNvPr id="3" name="Notes Placeholder 2"/>
+          <p:cNvSpPr>
+            <a:spLocks noGrp="1"/>
+          </p:cNvSpPr>
+          <p:nvPr>
+            <p:ph type="body" idx="1"/>
+          </p:nvPr>
+        </p:nvSpPr>
+        <p:spPr/>
+        <p:txBody>
+          <a:bodyPr/>
+          <a:lstStyle/>
+          <a:p>
+            <a:r>
+              <a:rPr lang="en-US" dirty="0"/>
+              <a:t>These are the references and picture credits used to prepare this lesson.</a:t>
+            </a:r>
+            <a:endParaRPr lang="en-US" dirty="0"/>
+          </a:p>
+        </p:txBody>
+      </p:sp>
+      <p:sp>
+        <p:nvSpPr>
+          <p:cNvPr id="4" name="Slide Number Placeholder 3"/>
+          <p:cNvSpPr>
+            <a:spLocks noGrp="1"/>
+          </p:cNvSpPr>
+          <p:nvPr>
+            <p:ph type="sldNum" sz="quarter" idx="10"/>
+          </p:nvPr>
+        </p:nvSpPr>
+        <p:spPr/>
+        <p:txBody>
+          <a:bodyPr/>
+          <a:lstStyle/>
+          <a:p>
+            <a:fld id="{F7021451-1387-4CA6-816F-3879F97B5CBC}" type="slidenum">
+              <a:rPr lang="en-US"/>
+              <a:t>68</a:t>
             </a:fld>
             <a:endParaRPr lang="en-US"/>
           </a:p>
@@ -15601,7 +15779,7 @@
               <a:buNone/>
             </a:pPr>
             <a:r>
-              <a:rPr lang="en-US" sz="3200" i="1" dirty="0">
+              <a:rPr lang="en-US" sz="2800" i="1" dirty="0">
                 <a:solidFill>
                   <a:srgbClr val="111111"/>
                 </a:solidFill>
@@ -15611,7 +15789,7 @@
               </a:rPr>
               <a:t>The demographic transition model is explained as follows:</a:t>
             </a:r>
-            <a:endParaRPr lang="en-US" sz="3200" dirty="0"/>
+            <a:endParaRPr lang="en-US" sz="2800" dirty="0"/>
           </a:p>
           <a:p>
             <a:pPr algn="l" indent="0" marL="0">
@@ -15621,7 +15799,7 @@
               <a:buNone/>
             </a:pPr>
             <a:r>
-              <a:rPr lang="en-US" sz="3200" b="1" dirty="0">
+              <a:rPr lang="en-US" sz="2800" b="1" dirty="0">
                 <a:solidFill>
                   <a:srgbClr val="111111"/>
                 </a:solidFill>
@@ -15629,7 +15807,7 @@
                 <a:ea typeface="Times New Roman" pitchFamily="34" charset="-122"/>
                 <a:cs typeface="Times New Roman" pitchFamily="34" charset="-120"/>
               </a:rPr>
-              <a:t>Origin: </a:t>
+              <a:t>A model based on history: </a:t>
             </a:r>
             <a:pPr algn="l" indent="0" marL="0">
               <a:spcAft>
@@ -15638,7 +15816,7 @@
               <a:buNone/>
             </a:pPr>
             <a:r>
-              <a:rPr lang="en-US" sz="3200" dirty="0">
+              <a:rPr lang="en-US" sz="2800" dirty="0">
                 <a:solidFill>
                   <a:srgbClr val="111111"/>
                 </a:solidFill>
@@ -15646,9 +15824,9 @@
                 <a:ea typeface="Times New Roman" pitchFamily="34" charset="-122"/>
                 <a:cs typeface="Times New Roman" pitchFamily="34" charset="-120"/>
               </a:rPr>
-              <a:t>The model is based on the history of Western Europe and North America during industrialisation. It was proposed by Warren Thompson in 1929 and developed by Frank Notestein.</a:t>
-            </a:r>
-            <a:endParaRPr lang="en-US" sz="3200" dirty="0"/>
+              <a:t>The model describes how the population of a country changes as it passes from a traditional to a modern society. It is based on the history of Western Europe and North America, and it was proposed by Warren Thompson in 1929 and developed by Frank Notestein.</a:t>
+            </a:r>
+            <a:endParaRPr lang="en-US" sz="2800" dirty="0"/>
           </a:p>
         </p:txBody>
       </p:sp>
@@ -15928,7 +16106,7 @@
                 <a:ea typeface="Times New Roman" pitchFamily="34" charset="-122"/>
                 <a:cs typeface="Times New Roman" pitchFamily="34" charset="-120"/>
               </a:rPr>
-              <a:t>Principle: </a:t>
+              <a:t>Death rates fall first: </a:t>
             </a:r>
             <a:pPr algn="l" indent="0" marL="0">
               <a:spcAft>
@@ -15945,7 +16123,7 @@
                 <a:ea typeface="Times New Roman" pitchFamily="34" charset="-122"/>
                 <a:cs typeface="Times New Roman" pitchFamily="34" charset="-120"/>
               </a:rPr>
-              <a:t>As a country develops, death rates fall first and birth rates fall later. Population growth therefore rises and then slows down.</a:t>
+              <a:t>As a country develops, better food, health care and clean water reduce deaths. The death rate therefore falls before the birth rate, and the population grows fast.</a:t>
             </a:r>
             <a:endParaRPr lang="en-US" sz="4000" dirty="0"/>
           </a:p>
@@ -16302,109 +16480,9 @@
           </a:p>
         </p:txBody>
       </p:sp>
-      <p:sp>
-        <p:nvSpPr>
-          <p:cNvPr id="3" name="Text 1"/>
-          <p:cNvSpPr/>
-          <p:nvPr/>
-        </p:nvSpPr>
-        <p:spPr>
-          <a:xfrm>
-            <a:off x="365760" y="1005840"/>
-            <a:ext cx="11460175" cy="731520"/>
-          </a:xfrm>
-          <a:prstGeom prst="rect">
-            <a:avLst/>
-          </a:prstGeom>
-          <a:noFill/>
-          <a:ln/>
-        </p:spPr>
-        <p:txBody>
-          <a:bodyPr wrap="square" lIns="0" tIns="0" rIns="0" bIns="0" rtlCol="0" anchor="ctr">
-            <a:normAutofit/>
-          </a:bodyPr>
-          <a:lstStyle/>
-          <a:p>
-            <a:pPr algn="ctr" indent="0" marL="0">
-              <a:buNone/>
-            </a:pPr>
-            <a:r>
-              <a:rPr lang="en-US" sz="3600" b="1" dirty="0">
-                <a:solidFill>
-                  <a:srgbClr val="990011"/>
-                </a:solidFill>
-                <a:latin typeface="Times New Roman" pitchFamily="34" charset="0"/>
-                <a:ea typeface="Times New Roman" pitchFamily="34" charset="-122"/>
-                <a:cs typeface="Times New Roman" pitchFamily="34" charset="-120"/>
-              </a:rPr>
-              <a:t>1. Meaning of the Model</a:t>
-            </a:r>
-            <a:endParaRPr lang="en-US" sz="3600" dirty="0"/>
-          </a:p>
-        </p:txBody>
-      </p:sp>
-      <p:sp>
-        <p:nvSpPr>
-          <p:cNvPr id="4" name="Text 2"/>
-          <p:cNvSpPr/>
-          <p:nvPr/>
-        </p:nvSpPr>
-        <p:spPr>
-          <a:xfrm>
-            <a:off x="365760" y="1783080"/>
-            <a:ext cx="6035040" cy="4617720"/>
-          </a:xfrm>
-          <a:prstGeom prst="rect">
-            <a:avLst/>
-          </a:prstGeom>
-          <a:noFill/>
-          <a:ln/>
-        </p:spPr>
-        <p:txBody>
-          <a:bodyPr wrap="square" lIns="0" tIns="0" rIns="0" bIns="0" rtlCol="0" anchor="t"/>
-          <a:lstStyle/>
-          <a:p>
-            <a:pPr algn="l" indent="0" marL="0">
-              <a:spcAft>
-                <a:spcPts val="800"/>
-              </a:spcAft>
-              <a:buNone/>
-            </a:pPr>
-            <a:r>
-              <a:rPr lang="en-US" sz="3600" b="1" dirty="0">
-                <a:solidFill>
-                  <a:srgbClr val="111111"/>
-                </a:solidFill>
-                <a:latin typeface="Times New Roman" pitchFamily="34" charset="0"/>
-                <a:ea typeface="Times New Roman" pitchFamily="34" charset="-122"/>
-                <a:cs typeface="Times New Roman" pitchFamily="34" charset="-120"/>
-              </a:rPr>
-              <a:t>Link with Rostow's model: </a:t>
-            </a:r>
-            <a:pPr algn="l" indent="0" marL="0">
-              <a:spcAft>
-                <a:spcPts val="800"/>
-              </a:spcAft>
-              <a:buNone/>
-            </a:pPr>
-            <a:r>
-              <a:rPr lang="en-US" sz="3600" dirty="0">
-                <a:solidFill>
-                  <a:srgbClr val="111111"/>
-                </a:solidFill>
-                <a:latin typeface="Times New Roman" pitchFamily="34" charset="0"/>
-                <a:ea typeface="Times New Roman" pitchFamily="34" charset="-122"/>
-                <a:cs typeface="Times New Roman" pitchFamily="34" charset="-120"/>
-              </a:rPr>
-              <a:t>The five demographic stages can be linked with the five stages of economic growth of Rostow. Each fall in birth or death rates goes with a change in the economy and society.</a:t>
-            </a:r>
-            <a:endParaRPr lang="en-US" sz="3600" dirty="0"/>
-          </a:p>
-        </p:txBody>
-      </p:sp>
       <p:pic>
         <p:nvPicPr>
-          <p:cNvPr id="5" name="Image 0" descr="/home/claude/f4/img/v2/rostow_big.png">    </p:cNvPr>
+          <p:cNvPr id="3" name="Image 0" descr="/home/claude/f4/img/minesec_sheet.png">    </p:cNvPr>
           <p:cNvPicPr>
             <a:picLocks noChangeAspect="1"/>
           </p:cNvPicPr>
@@ -16418,8 +16496,8 @@
         </p:blipFill>
         <p:spPr>
           <a:xfrm>
-            <a:off x="6537960" y="2849678"/>
-            <a:ext cx="5470855" cy="2137053"/>
+            <a:off x="0" y="658368"/>
+            <a:ext cx="3840480" cy="5833872"/>
           </a:xfrm>
           <a:prstGeom prst="rect">
             <a:avLst/>
@@ -16428,14 +16506,14 @@
       </p:pic>
       <p:sp>
         <p:nvSpPr>
-          <p:cNvPr id="6" name="Text 3"/>
+          <p:cNvPr id="4" name="Text 1"/>
           <p:cNvSpPr/>
           <p:nvPr/>
         </p:nvSpPr>
         <p:spPr>
           <a:xfrm>
-            <a:off x="6537960" y="6089904"/>
-            <a:ext cx="5470855" cy="347472"/>
+            <a:off x="4069080" y="1005840"/>
+            <a:ext cx="7802575" cy="731520"/>
           </a:xfrm>
           <a:prstGeom prst="rect">
             <a:avLst/>
@@ -16444,24 +16522,85 @@
           <a:ln/>
         </p:spPr>
         <p:txBody>
-          <a:bodyPr wrap="square" lIns="0" tIns="0" rIns="0" bIns="0" rtlCol="0" anchor="ctr"/>
+          <a:bodyPr wrap="square" lIns="0" tIns="0" rIns="0" bIns="0" rtlCol="0" anchor="ctr">
+            <a:normAutofit/>
+          </a:bodyPr>
           <a:lstStyle/>
           <a:p>
             <a:pPr algn="ctr" indent="0" marL="0">
               <a:buNone/>
             </a:pPr>
             <a:r>
-              <a:rPr lang="en-US" sz="1600" i="1" dirty="0">
-                <a:solidFill>
-                  <a:srgbClr val="555555"/>
+              <a:rPr lang="en-US" sz="3600" b="1" dirty="0">
+                <a:solidFill>
+                  <a:srgbClr val="990011"/>
                 </a:solidFill>
                 <a:latin typeface="Times New Roman" pitchFamily="34" charset="0"/>
                 <a:ea typeface="Times New Roman" pitchFamily="34" charset="-122"/>
                 <a:cs typeface="Times New Roman" pitchFamily="34" charset="-120"/>
               </a:rPr>
-              <a:t>Illustration: Rostow's model</a:t>
-            </a:r>
-            <a:endParaRPr lang="en-US" sz="1600" dirty="0"/>
+              <a:t>1. Meaning of the Model</a:t>
+            </a:r>
+            <a:endParaRPr lang="en-US" sz="3600" dirty="0"/>
+          </a:p>
+        </p:txBody>
+      </p:sp>
+      <p:sp>
+        <p:nvSpPr>
+          <p:cNvPr id="5" name="Text 2"/>
+          <p:cNvSpPr/>
+          <p:nvPr/>
+        </p:nvSpPr>
+        <p:spPr>
+          <a:xfrm>
+            <a:off x="4069080" y="1783080"/>
+            <a:ext cx="7802575" cy="4663440"/>
+          </a:xfrm>
+          <a:prstGeom prst="rect">
+            <a:avLst/>
+          </a:prstGeom>
+          <a:noFill/>
+          <a:ln/>
+        </p:spPr>
+        <p:txBody>
+          <a:bodyPr wrap="square" lIns="0" tIns="0" rIns="0" bIns="0" rtlCol="0" anchor="t"/>
+          <a:lstStyle/>
+          <a:p>
+            <a:pPr algn="l" indent="0" marL="0">
+              <a:spcAft>
+                <a:spcPts val="800"/>
+              </a:spcAft>
+              <a:buNone/>
+            </a:pPr>
+            <a:r>
+              <a:rPr lang="en-US" sz="4000" b="1" dirty="0">
+                <a:solidFill>
+                  <a:srgbClr val="111111"/>
+                </a:solidFill>
+                <a:latin typeface="Times New Roman" pitchFamily="34" charset="0"/>
+                <a:ea typeface="Times New Roman" pitchFamily="34" charset="-122"/>
+                <a:cs typeface="Times New Roman" pitchFamily="34" charset="-120"/>
+              </a:rPr>
+              <a:t>Birth rates fall later: </a:t>
+            </a:r>
+            <a:pPr algn="l" indent="0" marL="0">
+              <a:spcAft>
+                <a:spcPts val="800"/>
+              </a:spcAft>
+              <a:buNone/>
+            </a:pPr>
+            <a:r>
+              <a:rPr lang="en-US" sz="4000" dirty="0">
+                <a:solidFill>
+                  <a:srgbClr val="111111"/>
+                </a:solidFill>
+                <a:latin typeface="Times New Roman" pitchFamily="34" charset="0"/>
+                <a:ea typeface="Times New Roman" pitchFamily="34" charset="-122"/>
+                <a:cs typeface="Times New Roman" pitchFamily="34" charset="-120"/>
+              </a:rPr>
+              <a:t>Later, education, the growth of towns and family planning lead couples to have fewer children. The birth rate falls in its turn, and population growth slows down.</a:t>
+            </a:r>
+            <a:endParaRPr lang="en-US" sz="4000" dirty="0"/>
           </a:p>
         </p:txBody>
       </p:sp>
@@ -16577,9 +16716,109 @@
           </a:p>
         </p:txBody>
       </p:sp>
+      <p:sp>
+        <p:nvSpPr>
+          <p:cNvPr id="3" name="Text 1"/>
+          <p:cNvSpPr/>
+          <p:nvPr/>
+        </p:nvSpPr>
+        <p:spPr>
+          <a:xfrm>
+            <a:off x="365760" y="1005840"/>
+            <a:ext cx="11460175" cy="731520"/>
+          </a:xfrm>
+          <a:prstGeom prst="rect">
+            <a:avLst/>
+          </a:prstGeom>
+          <a:noFill/>
+          <a:ln/>
+        </p:spPr>
+        <p:txBody>
+          <a:bodyPr wrap="square" lIns="0" tIns="0" rIns="0" bIns="0" rtlCol="0" anchor="ctr">
+            <a:normAutofit/>
+          </a:bodyPr>
+          <a:lstStyle/>
+          <a:p>
+            <a:pPr algn="ctr" indent="0" marL="0">
+              <a:buNone/>
+            </a:pPr>
+            <a:r>
+              <a:rPr lang="en-US" sz="3600" b="1" dirty="0">
+                <a:solidFill>
+                  <a:srgbClr val="990011"/>
+                </a:solidFill>
+                <a:latin typeface="Times New Roman" pitchFamily="34" charset="0"/>
+                <a:ea typeface="Times New Roman" pitchFamily="34" charset="-122"/>
+                <a:cs typeface="Times New Roman" pitchFamily="34" charset="-120"/>
+              </a:rPr>
+              <a:t>1. Meaning of the Model</a:t>
+            </a:r>
+            <a:endParaRPr lang="en-US" sz="3600" dirty="0"/>
+          </a:p>
+        </p:txBody>
+      </p:sp>
+      <p:sp>
+        <p:nvSpPr>
+          <p:cNvPr id="4" name="Text 2"/>
+          <p:cNvSpPr/>
+          <p:nvPr/>
+        </p:nvSpPr>
+        <p:spPr>
+          <a:xfrm>
+            <a:off x="365760" y="1783080"/>
+            <a:ext cx="6035040" cy="4617720"/>
+          </a:xfrm>
+          <a:prstGeom prst="rect">
+            <a:avLst/>
+          </a:prstGeom>
+          <a:noFill/>
+          <a:ln/>
+        </p:spPr>
+        <p:txBody>
+          <a:bodyPr wrap="square" lIns="0" tIns="0" rIns="0" bIns="0" rtlCol="0" anchor="t"/>
+          <a:lstStyle/>
+          <a:p>
+            <a:pPr algn="l" indent="0" marL="0">
+              <a:spcAft>
+                <a:spcPts val="800"/>
+              </a:spcAft>
+              <a:buNone/>
+            </a:pPr>
+            <a:r>
+              <a:rPr lang="en-US" sz="3600" b="1" dirty="0">
+                <a:solidFill>
+                  <a:srgbClr val="111111"/>
+                </a:solidFill>
+                <a:latin typeface="Times New Roman" pitchFamily="34" charset="0"/>
+                <a:ea typeface="Times New Roman" pitchFamily="34" charset="-122"/>
+                <a:cs typeface="Times New Roman" pitchFamily="34" charset="-120"/>
+              </a:rPr>
+              <a:t>Link with Rostow's model: </a:t>
+            </a:r>
+            <a:pPr algn="l" indent="0" marL="0">
+              <a:spcAft>
+                <a:spcPts val="800"/>
+              </a:spcAft>
+              <a:buNone/>
+            </a:pPr>
+            <a:r>
+              <a:rPr lang="en-US" sz="3600" dirty="0">
+                <a:solidFill>
+                  <a:srgbClr val="111111"/>
+                </a:solidFill>
+                <a:latin typeface="Times New Roman" pitchFamily="34" charset="0"/>
+                <a:ea typeface="Times New Roman" pitchFamily="34" charset="-122"/>
+                <a:cs typeface="Times New Roman" pitchFamily="34" charset="-120"/>
+              </a:rPr>
+              <a:t>The five demographic stages can be linked with the five stages of economic growth of Rostow. Each fall in birth or death rates goes with a change in the economy and society.</a:t>
+            </a:r>
+            <a:endParaRPr lang="en-US" sz="3600" dirty="0"/>
+          </a:p>
+        </p:txBody>
+      </p:sp>
       <p:pic>
         <p:nvPicPr>
-          <p:cNvPr id="3" name="Image 0" descr="/home/claude/f4/img/minesec_sheet.png">    </p:cNvPr>
+          <p:cNvPr id="5" name="Image 0" descr="/home/claude/f4/img/v2/rostow_big.png">    </p:cNvPr>
           <p:cNvPicPr>
             <a:picLocks noChangeAspect="1"/>
           </p:cNvPicPr>
@@ -16593,8 +16832,8 @@
         </p:blipFill>
         <p:spPr>
           <a:xfrm>
-            <a:off x="0" y="658368"/>
-            <a:ext cx="2468880" cy="5833872"/>
+            <a:off x="6537960" y="2849678"/>
+            <a:ext cx="5470855" cy="2137053"/>
           </a:xfrm>
           <a:prstGeom prst="rect">
             <a:avLst/>
@@ -16603,14 +16842,14 @@
       </p:pic>
       <p:sp>
         <p:nvSpPr>
-          <p:cNvPr id="4" name="Text 1"/>
+          <p:cNvPr id="6" name="Text 3"/>
           <p:cNvSpPr/>
           <p:nvPr/>
         </p:nvSpPr>
         <p:spPr>
           <a:xfrm>
-            <a:off x="2697480" y="1005840"/>
-            <a:ext cx="9174175" cy="731520"/>
+            <a:off x="6537960" y="6089904"/>
+            <a:ext cx="5470855" cy="347472"/>
           </a:xfrm>
           <a:prstGeom prst="rect">
             <a:avLst/>
@@ -16619,144 +16858,24 @@
           <a:ln/>
         </p:spPr>
         <p:txBody>
-          <a:bodyPr wrap="square" lIns="0" tIns="0" rIns="0" bIns="0" rtlCol="0" anchor="ctr">
-            <a:normAutofit/>
-          </a:bodyPr>
+          <a:bodyPr wrap="square" lIns="0" tIns="0" rIns="0" bIns="0" rtlCol="0" anchor="ctr"/>
           <a:lstStyle/>
           <a:p>
             <a:pPr algn="ctr" indent="0" marL="0">
               <a:buNone/>
             </a:pPr>
             <a:r>
-              <a:rPr lang="en-US" sz="3600" b="1" dirty="0">
-                <a:solidFill>
-                  <a:srgbClr val="990011"/>
+              <a:rPr lang="en-US" sz="1600" i="1" dirty="0">
+                <a:solidFill>
+                  <a:srgbClr val="555555"/>
                 </a:solidFill>
                 <a:latin typeface="Times New Roman" pitchFamily="34" charset="0"/>
                 <a:ea typeface="Times New Roman" pitchFamily="34" charset="-122"/>
                 <a:cs typeface="Times New Roman" pitchFamily="34" charset="-120"/>
               </a:rPr>
-              <a:t>2. The Stages of the Model</a:t>
-            </a:r>
-            <a:endParaRPr lang="en-US" sz="3600" dirty="0"/>
-          </a:p>
-        </p:txBody>
-      </p:sp>
-      <p:sp>
-        <p:nvSpPr>
-          <p:cNvPr id="5" name="Text 2"/>
-          <p:cNvSpPr/>
-          <p:nvPr/>
-        </p:nvSpPr>
-        <p:spPr>
-          <a:xfrm>
-            <a:off x="2697480" y="1737360"/>
-            <a:ext cx="9174175" cy="457200"/>
-          </a:xfrm>
-          <a:prstGeom prst="rect">
-            <a:avLst/>
-          </a:prstGeom>
-          <a:noFill/>
-          <a:ln/>
-        </p:spPr>
-        <p:txBody>
-          <a:bodyPr wrap="square" lIns="0" tIns="0" rIns="0" bIns="0" rtlCol="0" anchor="ctr"/>
-          <a:lstStyle/>
-          <a:p>
-            <a:pPr algn="l" indent="0" marL="0">
-              <a:buNone/>
-            </a:pPr>
-            <a:r>
-              <a:rPr lang="en-US" sz="3200" b="1" dirty="0">
-                <a:solidFill>
-                  <a:srgbClr val="990011"/>
-                </a:solidFill>
-                <a:latin typeface="Times New Roman" pitchFamily="34" charset="0"/>
-                <a:ea typeface="Times New Roman" pitchFamily="34" charset="-122"/>
-                <a:cs typeface="Times New Roman" pitchFamily="34" charset="-120"/>
-              </a:rPr>
-              <a:t>A) Stages 1 and 2</a:t>
-            </a:r>
-            <a:endParaRPr lang="en-US" sz="3200" dirty="0"/>
-          </a:p>
-        </p:txBody>
-      </p:sp>
-      <p:sp>
-        <p:nvSpPr>
-          <p:cNvPr id="6" name="Text 3"/>
-          <p:cNvSpPr/>
-          <p:nvPr/>
-        </p:nvSpPr>
-        <p:spPr>
-          <a:xfrm>
-            <a:off x="2697480" y="2240280"/>
-            <a:ext cx="9174175" cy="4206240"/>
-          </a:xfrm>
-          <a:prstGeom prst="rect">
-            <a:avLst/>
-          </a:prstGeom>
-          <a:noFill/>
-          <a:ln/>
-        </p:spPr>
-        <p:txBody>
-          <a:bodyPr wrap="square" lIns="0" tIns="0" rIns="0" bIns="0" rtlCol="0" anchor="t"/>
-          <a:lstStyle/>
-          <a:p>
-            <a:pPr algn="l" indent="0" marL="0">
-              <a:spcAft>
-                <a:spcPts val="800"/>
-              </a:spcAft>
-              <a:buNone/>
-            </a:pPr>
-            <a:r>
-              <a:rPr lang="en-US" sz="3200" i="1" dirty="0">
-                <a:solidFill>
-                  <a:srgbClr val="111111"/>
-                </a:solidFill>
-                <a:latin typeface="Times New Roman" pitchFamily="34" charset="0"/>
-                <a:ea typeface="Times New Roman" pitchFamily="34" charset="-122"/>
-                <a:cs typeface="Times New Roman" pitchFamily="34" charset="-120"/>
-              </a:rPr>
-              <a:t>The first two stages have the following characteristics:</a:t>
-            </a:r>
-            <a:endParaRPr lang="en-US" sz="3200" dirty="0"/>
-          </a:p>
-          <a:p>
-            <a:pPr algn="l" indent="0" marL="0">
-              <a:spcAft>
-                <a:spcPts val="800"/>
-              </a:spcAft>
-              <a:buNone/>
-            </a:pPr>
-            <a:r>
-              <a:rPr lang="en-US" sz="3200" b="1" dirty="0">
-                <a:solidFill>
-                  <a:srgbClr val="111111"/>
-                </a:solidFill>
-                <a:latin typeface="Times New Roman" pitchFamily="34" charset="0"/>
-                <a:ea typeface="Times New Roman" pitchFamily="34" charset="-122"/>
-                <a:cs typeface="Times New Roman" pitchFamily="34" charset="-120"/>
-              </a:rPr>
-              <a:t>Stage 1, high stationary: </a:t>
-            </a:r>
-            <a:pPr algn="l" indent="0" marL="0">
-              <a:spcAft>
-                <a:spcPts val="800"/>
-              </a:spcAft>
-              <a:buNone/>
-            </a:pPr>
-            <a:r>
-              <a:rPr lang="en-US" sz="3200" dirty="0">
-                <a:solidFill>
-                  <a:srgbClr val="111111"/>
-                </a:solidFill>
-                <a:latin typeface="Times New Roman" pitchFamily="34" charset="0"/>
-                <a:ea typeface="Times New Roman" pitchFamily="34" charset="-122"/>
-                <a:cs typeface="Times New Roman" pitchFamily="34" charset="-120"/>
-              </a:rPr>
-              <a:t>Birth and death rates are both very high (35 to 45 per 1,000), so growth is slow and irregular. It is a traditional farming society with famine, disease and high infant mortality, like Rostow's traditional society, and only isolated groups remain in it today.</a:t>
-            </a:r>
-            <a:endParaRPr lang="en-US" sz="3200" dirty="0"/>
+              <a:t>Illustration: Rostow's model</a:t>
+            </a:r>
+            <a:endParaRPr lang="en-US" sz="1600" dirty="0"/>
           </a:p>
         </p:txBody>
       </p:sp>
@@ -16872,150 +16991,9 @@
           </a:p>
         </p:txBody>
       </p:sp>
-      <p:sp>
-        <p:nvSpPr>
-          <p:cNvPr id="3" name="Text 1"/>
-          <p:cNvSpPr/>
-          <p:nvPr/>
-        </p:nvSpPr>
-        <p:spPr>
-          <a:xfrm>
-            <a:off x="365760" y="1005840"/>
-            <a:ext cx="11460175" cy="731520"/>
-          </a:xfrm>
-          <a:prstGeom prst="rect">
-            <a:avLst/>
-          </a:prstGeom>
-          <a:noFill/>
-          <a:ln/>
-        </p:spPr>
-        <p:txBody>
-          <a:bodyPr wrap="square" lIns="0" tIns="0" rIns="0" bIns="0" rtlCol="0" anchor="ctr">
-            <a:normAutofit/>
-          </a:bodyPr>
-          <a:lstStyle/>
-          <a:p>
-            <a:pPr algn="ctr" indent="0" marL="0">
-              <a:buNone/>
-            </a:pPr>
-            <a:r>
-              <a:rPr lang="en-US" sz="3600" b="1" dirty="0">
-                <a:solidFill>
-                  <a:srgbClr val="990011"/>
-                </a:solidFill>
-                <a:latin typeface="Times New Roman" pitchFamily="34" charset="0"/>
-                <a:ea typeface="Times New Roman" pitchFamily="34" charset="-122"/>
-                <a:cs typeface="Times New Roman" pitchFamily="34" charset="-120"/>
-              </a:rPr>
-              <a:t>2. The Stages of the Model</a:t>
-            </a:r>
-            <a:endParaRPr lang="en-US" sz="3600" dirty="0"/>
-          </a:p>
-        </p:txBody>
-      </p:sp>
-      <p:sp>
-        <p:nvSpPr>
-          <p:cNvPr id="4" name="Text 2"/>
-          <p:cNvSpPr/>
-          <p:nvPr/>
-        </p:nvSpPr>
-        <p:spPr>
-          <a:xfrm>
-            <a:off x="365760" y="1737360"/>
-            <a:ext cx="6035040" cy="457200"/>
-          </a:xfrm>
-          <a:prstGeom prst="rect">
-            <a:avLst/>
-          </a:prstGeom>
-          <a:noFill/>
-          <a:ln/>
-        </p:spPr>
-        <p:txBody>
-          <a:bodyPr wrap="square" lIns="0" tIns="0" rIns="0" bIns="0" rtlCol="0" anchor="ctr">
-            <a:normAutofit/>
-          </a:bodyPr>
-          <a:lstStyle/>
-          <a:p>
-            <a:pPr algn="l" indent="0" marL="0">
-              <a:buNone/>
-            </a:pPr>
-            <a:r>
-              <a:rPr lang="en-US" sz="3000" b="1" dirty="0">
-                <a:solidFill>
-                  <a:srgbClr val="990011"/>
-                </a:solidFill>
-                <a:latin typeface="Times New Roman" pitchFamily="34" charset="0"/>
-                <a:ea typeface="Times New Roman" pitchFamily="34" charset="-122"/>
-                <a:cs typeface="Times New Roman" pitchFamily="34" charset="-120"/>
-              </a:rPr>
-              <a:t>A) Stages 1 and 2</a:t>
-            </a:r>
-            <a:endParaRPr lang="en-US" sz="3000" dirty="0"/>
-          </a:p>
-        </p:txBody>
-      </p:sp>
-      <p:sp>
-        <p:nvSpPr>
-          <p:cNvPr id="5" name="Text 3"/>
-          <p:cNvSpPr/>
-          <p:nvPr/>
-        </p:nvSpPr>
-        <p:spPr>
-          <a:xfrm>
-            <a:off x="365760" y="2240280"/>
-            <a:ext cx="6035040" cy="4160520"/>
-          </a:xfrm>
-          <a:prstGeom prst="rect">
-            <a:avLst/>
-          </a:prstGeom>
-          <a:noFill/>
-          <a:ln/>
-        </p:spPr>
-        <p:txBody>
-          <a:bodyPr wrap="square" lIns="0" tIns="0" rIns="0" bIns="0" rtlCol="0" anchor="t"/>
-          <a:lstStyle/>
-          <a:p>
-            <a:pPr algn="l" indent="0" marL="0">
-              <a:spcAft>
-                <a:spcPts val="800"/>
-              </a:spcAft>
-              <a:buNone/>
-            </a:pPr>
-            <a:r>
-              <a:rPr lang="en-US" sz="3000" b="1" dirty="0">
-                <a:solidFill>
-                  <a:srgbClr val="111111"/>
-                </a:solidFill>
-                <a:latin typeface="Times New Roman" pitchFamily="34" charset="0"/>
-                <a:ea typeface="Times New Roman" pitchFamily="34" charset="-122"/>
-                <a:cs typeface="Times New Roman" pitchFamily="34" charset="-120"/>
-              </a:rPr>
-              <a:t>Stage 2, early expanding: </a:t>
-            </a:r>
-            <a:pPr algn="l" indent="0" marL="0">
-              <a:spcAft>
-                <a:spcPts val="800"/>
-              </a:spcAft>
-              <a:buNone/>
-            </a:pPr>
-            <a:r>
-              <a:rPr lang="en-US" sz="3000" dirty="0">
-                <a:solidFill>
-                  <a:srgbClr val="111111"/>
-                </a:solidFill>
-                <a:latin typeface="Times New Roman" pitchFamily="34" charset="0"/>
-                <a:ea typeface="Times New Roman" pitchFamily="34" charset="-122"/>
-                <a:cs typeface="Times New Roman" pitchFamily="34" charset="-120"/>
-              </a:rPr>
-              <a:t>Death rates fall quickly because health, food supply and sanitation improve, while birth rates stay high. The population grows very fast as industry and towns begin, like Rostow's pre-conditions and take-off, as in Niger and Chad.</a:t>
-            </a:r>
-            <a:endParaRPr lang="en-US" sz="3000" dirty="0"/>
-          </a:p>
-        </p:txBody>
-      </p:sp>
       <p:pic>
         <p:nvPicPr>
-          <p:cNvPr id="6" name="Image 0" descr="/home/claude/f4/img/v2/dtm_countries_big.png">    </p:cNvPr>
+          <p:cNvPr id="3" name="Image 0" descr="/home/claude/f4/img/minesec_sheet.png">    </p:cNvPr>
           <p:cNvPicPr>
             <a:picLocks noChangeAspect="1"/>
           </p:cNvPicPr>
@@ -17029,8 +17007,8 @@
         </p:blipFill>
         <p:spPr>
           <a:xfrm>
-            <a:off x="6537960" y="2849678"/>
-            <a:ext cx="5470855" cy="2137053"/>
+            <a:off x="0" y="658368"/>
+            <a:ext cx="1463040" cy="5833872"/>
           </a:xfrm>
           <a:prstGeom prst="rect">
             <a:avLst/>
@@ -17039,14 +17017,14 @@
       </p:pic>
       <p:sp>
         <p:nvSpPr>
-          <p:cNvPr id="7" name="Text 4"/>
+          <p:cNvPr id="4" name="Text 1"/>
           <p:cNvSpPr/>
           <p:nvPr/>
         </p:nvSpPr>
         <p:spPr>
           <a:xfrm>
-            <a:off x="6537960" y="6089904"/>
-            <a:ext cx="5470855" cy="347472"/>
+            <a:off x="1691640" y="1005840"/>
+            <a:ext cx="10180015" cy="731520"/>
           </a:xfrm>
           <a:prstGeom prst="rect">
             <a:avLst/>
@@ -17055,24 +17033,144 @@
           <a:ln/>
         </p:spPr>
         <p:txBody>
-          <a:bodyPr wrap="square" lIns="0" tIns="0" rIns="0" bIns="0" rtlCol="0" anchor="ctr"/>
+          <a:bodyPr wrap="square" lIns="0" tIns="0" rIns="0" bIns="0" rtlCol="0" anchor="ctr">
+            <a:normAutofit/>
+          </a:bodyPr>
           <a:lstStyle/>
           <a:p>
             <a:pPr algn="ctr" indent="0" marL="0">
               <a:buNone/>
             </a:pPr>
             <a:r>
-              <a:rPr lang="en-US" sz="1600" i="1" dirty="0">
-                <a:solidFill>
-                  <a:srgbClr val="555555"/>
+              <a:rPr lang="en-US" sz="3600" b="1" dirty="0">
+                <a:solidFill>
+                  <a:srgbClr val="990011"/>
                 </a:solidFill>
                 <a:latin typeface="Times New Roman" pitchFamily="34" charset="0"/>
                 <a:ea typeface="Times New Roman" pitchFamily="34" charset="-122"/>
                 <a:cs typeface="Times New Roman" pitchFamily="34" charset="-120"/>
               </a:rPr>
-              <a:t>Illustration: countries at each stage</a:t>
-            </a:r>
-            <a:endParaRPr lang="en-US" sz="1600" dirty="0"/>
+              <a:t>2. The Stages of the Model</a:t>
+            </a:r>
+            <a:endParaRPr lang="en-US" sz="3600" dirty="0"/>
+          </a:p>
+        </p:txBody>
+      </p:sp>
+      <p:sp>
+        <p:nvSpPr>
+          <p:cNvPr id="5" name="Text 2"/>
+          <p:cNvSpPr/>
+          <p:nvPr/>
+        </p:nvSpPr>
+        <p:spPr>
+          <a:xfrm>
+            <a:off x="1691640" y="1737360"/>
+            <a:ext cx="10180015" cy="457200"/>
+          </a:xfrm>
+          <a:prstGeom prst="rect">
+            <a:avLst/>
+          </a:prstGeom>
+          <a:noFill/>
+          <a:ln/>
+        </p:spPr>
+        <p:txBody>
+          <a:bodyPr wrap="square" lIns="0" tIns="0" rIns="0" bIns="0" rtlCol="0" anchor="ctr"/>
+          <a:lstStyle/>
+          <a:p>
+            <a:pPr algn="l" indent="0" marL="0">
+              <a:buNone/>
+            </a:pPr>
+            <a:r>
+              <a:rPr lang="en-US" sz="3200" b="1" dirty="0">
+                <a:solidFill>
+                  <a:srgbClr val="990011"/>
+                </a:solidFill>
+                <a:latin typeface="Times New Roman" pitchFamily="34" charset="0"/>
+                <a:ea typeface="Times New Roman" pitchFamily="34" charset="-122"/>
+                <a:cs typeface="Times New Roman" pitchFamily="34" charset="-120"/>
+              </a:rPr>
+              <a:t>A) Stages 1 and 2</a:t>
+            </a:r>
+            <a:endParaRPr lang="en-US" sz="3200" dirty="0"/>
+          </a:p>
+        </p:txBody>
+      </p:sp>
+      <p:sp>
+        <p:nvSpPr>
+          <p:cNvPr id="6" name="Text 3"/>
+          <p:cNvSpPr/>
+          <p:nvPr/>
+        </p:nvSpPr>
+        <p:spPr>
+          <a:xfrm>
+            <a:off x="1691640" y="2240280"/>
+            <a:ext cx="10180015" cy="4206240"/>
+          </a:xfrm>
+          <a:prstGeom prst="rect">
+            <a:avLst/>
+          </a:prstGeom>
+          <a:noFill/>
+          <a:ln/>
+        </p:spPr>
+        <p:txBody>
+          <a:bodyPr wrap="square" lIns="0" tIns="0" rIns="0" bIns="0" rtlCol="0" anchor="t"/>
+          <a:lstStyle/>
+          <a:p>
+            <a:pPr algn="l" indent="0" marL="0">
+              <a:spcAft>
+                <a:spcPts val="800"/>
+              </a:spcAft>
+              <a:buNone/>
+            </a:pPr>
+            <a:r>
+              <a:rPr lang="en-US" sz="3000" i="1" dirty="0">
+                <a:solidFill>
+                  <a:srgbClr val="111111"/>
+                </a:solidFill>
+                <a:latin typeface="Times New Roman" pitchFamily="34" charset="0"/>
+                <a:ea typeface="Times New Roman" pitchFamily="34" charset="-122"/>
+                <a:cs typeface="Times New Roman" pitchFamily="34" charset="-120"/>
+              </a:rPr>
+              <a:t>The first two stages have the following characteristics:</a:t>
+            </a:r>
+            <a:endParaRPr lang="en-US" sz="3000" dirty="0"/>
+          </a:p>
+          <a:p>
+            <a:pPr algn="l" indent="0" marL="0">
+              <a:spcAft>
+                <a:spcPts val="800"/>
+              </a:spcAft>
+              <a:buNone/>
+            </a:pPr>
+            <a:r>
+              <a:rPr lang="en-US" sz="3000" b="1" dirty="0">
+                <a:solidFill>
+                  <a:srgbClr val="111111"/>
+                </a:solidFill>
+                <a:latin typeface="Times New Roman" pitchFamily="34" charset="0"/>
+                <a:ea typeface="Times New Roman" pitchFamily="34" charset="-122"/>
+                <a:cs typeface="Times New Roman" pitchFamily="34" charset="-120"/>
+              </a:rPr>
+              <a:t>Stage 1, high stationary: </a:t>
+            </a:r>
+            <a:pPr algn="l" indent="0" marL="0">
+              <a:spcAft>
+                <a:spcPts val="800"/>
+              </a:spcAft>
+              <a:buNone/>
+            </a:pPr>
+            <a:r>
+              <a:rPr lang="en-US" sz="3000" dirty="0">
+                <a:solidFill>
+                  <a:srgbClr val="111111"/>
+                </a:solidFill>
+                <a:latin typeface="Times New Roman" pitchFamily="34" charset="0"/>
+                <a:ea typeface="Times New Roman" pitchFamily="34" charset="-122"/>
+                <a:cs typeface="Times New Roman" pitchFamily="34" charset="-120"/>
+              </a:rPr>
+              <a:t>Birth and death rates are both very high, between 35 and 45 per 1,000, so the population grows slowly and irregularly. Famine, diseases and wars kill many people, especially children, in a traditional farming society. This stage corresponds to the traditional society of Rostow, and today only a few isolated groups remain in it.</a:t>
+            </a:r>
+            <a:endParaRPr lang="en-US" sz="3000" dirty="0"/>
           </a:p>
         </p:txBody>
       </p:sp>
@@ -17286,7 +17384,7 @@
                 <a:ea typeface="Times New Roman" pitchFamily="34" charset="-122"/>
                 <a:cs typeface="Times New Roman" pitchFamily="34" charset="-120"/>
               </a:rPr>
-              <a:t>B) Stages 3, 4 and 5</a:t>
+              <a:t>A) Stages 1 and 2</a:t>
             </a:r>
             <a:endParaRPr lang="en-US" sz="3200" dirty="0"/>
           </a:p>
@@ -17320,7 +17418,7 @@
               <a:buNone/>
             </a:pPr>
             <a:r>
-              <a:rPr lang="en-US" sz="3600" i="1" dirty="0">
+              <a:rPr lang="en-US" sz="3600" b="1" dirty="0">
                 <a:solidFill>
                   <a:srgbClr val="111111"/>
                 </a:solidFill>
@@ -17328,11 +17426,8 @@
                 <a:ea typeface="Times New Roman" pitchFamily="34" charset="-122"/>
                 <a:cs typeface="Times New Roman" pitchFamily="34" charset="-120"/>
               </a:rPr>
-              <a:t>The last three stages have the following characteristics:</a:t>
-            </a:r>
-            <a:endParaRPr lang="en-US" sz="3600" dirty="0"/>
-          </a:p>
-          <a:p>
+              <a:t>Stage 2, early expanding: </a:t>
+            </a:r>
             <a:pPr algn="l" indent="0" marL="0">
               <a:spcAft>
                 <a:spcPts val="800"/>
@@ -17340,7 +17435,7 @@
               <a:buNone/>
             </a:pPr>
             <a:r>
-              <a:rPr lang="en-US" sz="3600" b="1" dirty="0">
+              <a:rPr lang="en-US" sz="3600" dirty="0">
                 <a:solidFill>
                   <a:srgbClr val="111111"/>
                 </a:solidFill>
@@ -17348,24 +17443,7 @@
                 <a:ea typeface="Times New Roman" pitchFamily="34" charset="-122"/>
                 <a:cs typeface="Times New Roman" pitchFamily="34" charset="-120"/>
               </a:rPr>
-              <a:t>Stage 3, late expanding: </a:t>
-            </a:r>
-            <a:pPr algn="l" indent="0" marL="0">
-              <a:spcAft>
-                <a:spcPts val="800"/>
-              </a:spcAft>
-              <a:buNone/>
-            </a:pPr>
-            <a:r>
-              <a:rPr lang="en-US" sz="3600" dirty="0">
-                <a:solidFill>
-                  <a:srgbClr val="111111"/>
-                </a:solidFill>
-                <a:latin typeface="Times New Roman" pitchFamily="34" charset="0"/>
-                <a:ea typeface="Times New Roman" pitchFamily="34" charset="-122"/>
-                <a:cs typeface="Times New Roman" pitchFamily="34" charset="-120"/>
-              </a:rPr>
-              <a:t>Birth rates fall quickly and death rates slowly, so growth is still strong but slows down, as in India and Brazil. Towns and industry grow and women gain education and contraception, like Rostow's drive to maturity.</a:t>
+              <a:t>The death rate falls quickly because health care, food supply and sanitation improve, but the birth rate stays high. The gap between the two rates is wide, so the population grows very fast. Niger and Chad are examples of this stage, which corresponds to the pre-conditions for take-off of Rostow.</a:t>
             </a:r>
             <a:endParaRPr lang="en-US" sz="3600" dirty="0"/>
           </a:p>
@@ -17500,7 +17578,7 @@
         <p:spPr>
           <a:xfrm>
             <a:off x="0" y="658368"/>
-            <a:ext cx="3840480" cy="5833872"/>
+            <a:ext cx="1463040" cy="5833872"/>
           </a:xfrm>
           <a:prstGeom prst="rect">
             <a:avLst/>
@@ -17515,8 +17593,8 @@
         </p:nvSpPr>
         <p:spPr>
           <a:xfrm>
-            <a:off x="4069080" y="1005840"/>
-            <a:ext cx="7802575" cy="731520"/>
+            <a:off x="1691640" y="1005840"/>
+            <a:ext cx="10180015" cy="731520"/>
           </a:xfrm>
           <a:prstGeom prst="rect">
             <a:avLst/>
@@ -17556,8 +17634,8 @@
         </p:nvSpPr>
         <p:spPr>
           <a:xfrm>
-            <a:off x="4069080" y="1737360"/>
-            <a:ext cx="7802575" cy="457200"/>
+            <a:off x="1691640" y="1737360"/>
+            <a:ext cx="10180015" cy="457200"/>
           </a:xfrm>
           <a:prstGeom prst="rect">
             <a:avLst/>
@@ -17595,8 +17673,8 @@
         </p:nvSpPr>
         <p:spPr>
           <a:xfrm>
-            <a:off x="4069080" y="2240280"/>
-            <a:ext cx="7802575" cy="4206240"/>
+            <a:off x="1691640" y="2240280"/>
+            <a:ext cx="10180015" cy="4206240"/>
           </a:xfrm>
           <a:prstGeom prst="rect">
             <a:avLst/>
@@ -17615,7 +17693,7 @@
               <a:buNone/>
             </a:pPr>
             <a:r>
-              <a:rPr lang="en-US" sz="4000" b="1" dirty="0">
+              <a:rPr lang="en-US" sz="3200" i="1" dirty="0">
                 <a:solidFill>
                   <a:srgbClr val="111111"/>
                 </a:solidFill>
@@ -17623,8 +17701,11 @@
                 <a:ea typeface="Times New Roman" pitchFamily="34" charset="-122"/>
                 <a:cs typeface="Times New Roman" pitchFamily="34" charset="-120"/>
               </a:rPr>
-              <a:t>Stage 4, low stationary: </a:t>
-            </a:r>
+              <a:t>The last three stages have the following characteristics:</a:t>
+            </a:r>
+            <a:endParaRPr lang="en-US" sz="3200" dirty="0"/>
+          </a:p>
+          <a:p>
             <a:pPr algn="l" indent="0" marL="0">
               <a:spcAft>
                 <a:spcPts val="800"/>
@@ -17632,7 +17713,7 @@
               <a:buNone/>
             </a:pPr>
             <a:r>
-              <a:rPr lang="en-US" sz="4000" dirty="0">
+              <a:rPr lang="en-US" sz="3200" b="1" dirty="0">
                 <a:solidFill>
                   <a:srgbClr val="111111"/>
                 </a:solidFill>
@@ -17640,9 +17721,26 @@
                 <a:ea typeface="Times New Roman" pitchFamily="34" charset="-122"/>
                 <a:cs typeface="Times New Roman" pitchFamily="34" charset="-120"/>
               </a:rPr>
-              <a:t>Birth and death rates are both low, so growth is very slow or zero, as in the USA and France. It corresponds to Rostow's age of high mass consumption.</a:t>
-            </a:r>
-            <a:endParaRPr lang="en-US" sz="4000" dirty="0"/>
+              <a:t>Stage 3, late expanding: </a:t>
+            </a:r>
+            <a:pPr algn="l" indent="0" marL="0">
+              <a:spcAft>
+                <a:spcPts val="800"/>
+              </a:spcAft>
+              <a:buNone/>
+            </a:pPr>
+            <a:r>
+              <a:rPr lang="en-US" sz="3200" dirty="0">
+                <a:solidFill>
+                  <a:srgbClr val="111111"/>
+                </a:solidFill>
+                <a:latin typeface="Times New Roman" pitchFamily="34" charset="0"/>
+                <a:ea typeface="Times New Roman" pitchFamily="34" charset="-122"/>
+                <a:cs typeface="Times New Roman" pitchFamily="34" charset="-120"/>
+              </a:rPr>
+              <a:t>The birth rate falls quickly while the death rate falls slowly, so growth is still strong but slows down. Towns and industries grow, and women gain education and access to contraception. India and Brazil are in this stage, which corresponds to the take-off and drive to maturity of Rostow.</a:t>
+            </a:r>
+            <a:endParaRPr lang="en-US" sz="3200" dirty="0"/>
           </a:p>
         </p:txBody>
       </p:sp>
@@ -17775,7 +17873,7 @@
         <p:spPr>
           <a:xfrm>
             <a:off x="0" y="658368"/>
-            <a:ext cx="5120640" cy="5833872"/>
+            <a:ext cx="2468880" cy="5833872"/>
           </a:xfrm>
           <a:prstGeom prst="rect">
             <a:avLst/>
@@ -17790,8 +17888,8 @@
         </p:nvSpPr>
         <p:spPr>
           <a:xfrm>
-            <a:off x="5349240" y="1005840"/>
-            <a:ext cx="6522415" cy="731520"/>
+            <a:off x="2697480" y="1005840"/>
+            <a:ext cx="9174175" cy="731520"/>
           </a:xfrm>
           <a:prstGeom prst="rect">
             <a:avLst/>
@@ -17831,8 +17929,8 @@
         </p:nvSpPr>
         <p:spPr>
           <a:xfrm>
-            <a:off x="5349240" y="1737360"/>
-            <a:ext cx="6522415" cy="457200"/>
+            <a:off x="2697480" y="1737360"/>
+            <a:ext cx="9174175" cy="457200"/>
           </a:xfrm>
           <a:prstGeom prst="rect">
             <a:avLst/>
@@ -17870,8 +17968,8 @@
         </p:nvSpPr>
         <p:spPr>
           <a:xfrm>
-            <a:off x="5349240" y="2240280"/>
-            <a:ext cx="6522415" cy="4206240"/>
+            <a:off x="2697480" y="2240280"/>
+            <a:ext cx="9174175" cy="4206240"/>
           </a:xfrm>
           <a:prstGeom prst="rect">
             <a:avLst/>
@@ -17890,7 +17988,7 @@
               <a:buNone/>
             </a:pPr>
             <a:r>
-              <a:rPr lang="en-US" sz="4000" b="1" dirty="0">
+              <a:rPr lang="en-US" sz="3800" b="1" dirty="0">
                 <a:solidFill>
                   <a:srgbClr val="111111"/>
                 </a:solidFill>
@@ -17898,7 +17996,7 @@
                 <a:ea typeface="Times New Roman" pitchFamily="34" charset="-122"/>
                 <a:cs typeface="Times New Roman" pitchFamily="34" charset="-120"/>
               </a:rPr>
-              <a:t>Stage 5, declining: </a:t>
+              <a:t>Stage 4, low stationary: </a:t>
             </a:r>
             <a:pPr algn="l" indent="0" marL="0">
               <a:spcAft>
@@ -17907,7 +18005,7 @@
               <a:buNone/>
             </a:pPr>
             <a:r>
-              <a:rPr lang="en-US" sz="4000" dirty="0">
+              <a:rPr lang="en-US" sz="3800" dirty="0">
                 <a:solidFill>
                   <a:srgbClr val="111111"/>
                 </a:solidFill>
@@ -17915,9 +18013,9 @@
                 <a:ea typeface="Times New Roman" pitchFamily="34" charset="-122"/>
                 <a:cs typeface="Times New Roman" pitchFamily="34" charset="-120"/>
               </a:rPr>
-              <a:t>Birth rates fall below death rates, so the population declines and ages. Japan, Germany and Italy are in this stage.</a:t>
-            </a:r>
-            <a:endParaRPr lang="en-US" sz="4000" dirty="0"/>
+              <a:t>Birth and death rates are both low, around 10 to 15 per 1,000, so growth is very slow or zero. People live long and couples choose small families. The USA and France are in this stage, which corresponds to the age of high mass consumption of Rostow.</a:t>
+            </a:r>
+            <a:endParaRPr lang="en-US" sz="3800" dirty="0"/>
           </a:p>
         </p:txBody>
       </p:sp>
@@ -18033,9 +18131,150 @@
           </a:p>
         </p:txBody>
       </p:sp>
+      <p:sp>
+        <p:nvSpPr>
+          <p:cNvPr id="3" name="Text 1"/>
+          <p:cNvSpPr/>
+          <p:nvPr/>
+        </p:nvSpPr>
+        <p:spPr>
+          <a:xfrm>
+            <a:off x="365760" y="1005840"/>
+            <a:ext cx="11460175" cy="731520"/>
+          </a:xfrm>
+          <a:prstGeom prst="rect">
+            <a:avLst/>
+          </a:prstGeom>
+          <a:noFill/>
+          <a:ln/>
+        </p:spPr>
+        <p:txBody>
+          <a:bodyPr wrap="square" lIns="0" tIns="0" rIns="0" bIns="0" rtlCol="0" anchor="ctr">
+            <a:normAutofit/>
+          </a:bodyPr>
+          <a:lstStyle/>
+          <a:p>
+            <a:pPr algn="ctr" indent="0" marL="0">
+              <a:buNone/>
+            </a:pPr>
+            <a:r>
+              <a:rPr lang="en-US" sz="3600" b="1" dirty="0">
+                <a:solidFill>
+                  <a:srgbClr val="990011"/>
+                </a:solidFill>
+                <a:latin typeface="Times New Roman" pitchFamily="34" charset="0"/>
+                <a:ea typeface="Times New Roman" pitchFamily="34" charset="-122"/>
+                <a:cs typeface="Times New Roman" pitchFamily="34" charset="-120"/>
+              </a:rPr>
+              <a:t>2. The Stages of the Model</a:t>
+            </a:r>
+            <a:endParaRPr lang="en-US" sz="3600" dirty="0"/>
+          </a:p>
+        </p:txBody>
+      </p:sp>
+      <p:sp>
+        <p:nvSpPr>
+          <p:cNvPr id="4" name="Text 2"/>
+          <p:cNvSpPr/>
+          <p:nvPr/>
+        </p:nvSpPr>
+        <p:spPr>
+          <a:xfrm>
+            <a:off x="365760" y="1737360"/>
+            <a:ext cx="6035040" cy="457200"/>
+          </a:xfrm>
+          <a:prstGeom prst="rect">
+            <a:avLst/>
+          </a:prstGeom>
+          <a:noFill/>
+          <a:ln/>
+        </p:spPr>
+        <p:txBody>
+          <a:bodyPr wrap="square" lIns="0" tIns="0" rIns="0" bIns="0" rtlCol="0" anchor="ctr">
+            <a:normAutofit/>
+          </a:bodyPr>
+          <a:lstStyle/>
+          <a:p>
+            <a:pPr algn="l" indent="0" marL="0">
+              <a:buNone/>
+            </a:pPr>
+            <a:r>
+              <a:rPr lang="en-US" sz="3000" b="1" dirty="0">
+                <a:solidFill>
+                  <a:srgbClr val="990011"/>
+                </a:solidFill>
+                <a:latin typeface="Times New Roman" pitchFamily="34" charset="0"/>
+                <a:ea typeface="Times New Roman" pitchFamily="34" charset="-122"/>
+                <a:cs typeface="Times New Roman" pitchFamily="34" charset="-120"/>
+              </a:rPr>
+              <a:t>B) Stages 3, 4 and 5</a:t>
+            </a:r>
+            <a:endParaRPr lang="en-US" sz="3000" dirty="0"/>
+          </a:p>
+        </p:txBody>
+      </p:sp>
+      <p:sp>
+        <p:nvSpPr>
+          <p:cNvPr id="5" name="Text 3"/>
+          <p:cNvSpPr/>
+          <p:nvPr/>
+        </p:nvSpPr>
+        <p:spPr>
+          <a:xfrm>
+            <a:off x="365760" y="2240280"/>
+            <a:ext cx="6035040" cy="4160520"/>
+          </a:xfrm>
+          <a:prstGeom prst="rect">
+            <a:avLst/>
+          </a:prstGeom>
+          <a:noFill/>
+          <a:ln/>
+        </p:spPr>
+        <p:txBody>
+          <a:bodyPr wrap="square" lIns="0" tIns="0" rIns="0" bIns="0" rtlCol="0" anchor="t"/>
+          <a:lstStyle/>
+          <a:p>
+            <a:pPr algn="l" indent="0" marL="0">
+              <a:spcAft>
+                <a:spcPts val="800"/>
+              </a:spcAft>
+              <a:buNone/>
+            </a:pPr>
+            <a:r>
+              <a:rPr lang="en-US" sz="3200" b="1" dirty="0">
+                <a:solidFill>
+                  <a:srgbClr val="111111"/>
+                </a:solidFill>
+                <a:latin typeface="Times New Roman" pitchFamily="34" charset="0"/>
+                <a:ea typeface="Times New Roman" pitchFamily="34" charset="-122"/>
+                <a:cs typeface="Times New Roman" pitchFamily="34" charset="-120"/>
+              </a:rPr>
+              <a:t>Stage 5, declining: </a:t>
+            </a:r>
+            <a:pPr algn="l" indent="0" marL="0">
+              <a:spcAft>
+                <a:spcPts val="800"/>
+              </a:spcAft>
+              <a:buNone/>
+            </a:pPr>
+            <a:r>
+              <a:rPr lang="en-US" sz="3200" dirty="0">
+                <a:solidFill>
+                  <a:srgbClr val="111111"/>
+                </a:solidFill>
+                <a:latin typeface="Times New Roman" pitchFamily="34" charset="0"/>
+                <a:ea typeface="Times New Roman" pitchFamily="34" charset="-122"/>
+                <a:cs typeface="Times New Roman" pitchFamily="34" charset="-120"/>
+              </a:rPr>
+              <a:t>The birth rate falls below the death rate, so the population declines. The population becomes very old, and there are fewer young workers each year. Japan, Germany and Italy are in this stage.</a:t>
+            </a:r>
+            <a:endParaRPr lang="en-US" sz="3200" dirty="0"/>
+          </a:p>
+        </p:txBody>
+      </p:sp>
       <p:pic>
         <p:nvPicPr>
-          <p:cNvPr id="3" name="Image 0" descr="/home/claude/f4/img/minesec_sheet.png">    </p:cNvPr>
+          <p:cNvPr id="6" name="Image 0" descr="/home/claude/f4/img/v2/dtm_countries_big.png">    </p:cNvPr>
           <p:cNvPicPr>
             <a:picLocks noChangeAspect="1"/>
           </p:cNvPicPr>
@@ -18049,8 +18288,8 @@
         </p:blipFill>
         <p:spPr>
           <a:xfrm>
-            <a:off x="0" y="658368"/>
-            <a:ext cx="2468880" cy="5833872"/>
+            <a:off x="6537960" y="2849678"/>
+            <a:ext cx="5470855" cy="2137053"/>
           </a:xfrm>
           <a:prstGeom prst="rect">
             <a:avLst/>
@@ -18059,14 +18298,14 @@
       </p:pic>
       <p:sp>
         <p:nvSpPr>
-          <p:cNvPr id="4" name="Text 1"/>
+          <p:cNvPr id="7" name="Text 4"/>
           <p:cNvSpPr/>
           <p:nvPr/>
         </p:nvSpPr>
         <p:spPr>
           <a:xfrm>
-            <a:off x="2697480" y="1005840"/>
-            <a:ext cx="9174175" cy="731520"/>
+            <a:off x="6537960" y="6089904"/>
+            <a:ext cx="5470855" cy="347472"/>
           </a:xfrm>
           <a:prstGeom prst="rect">
             <a:avLst/>
@@ -18075,144 +18314,24 @@
           <a:ln/>
         </p:spPr>
         <p:txBody>
-          <a:bodyPr wrap="square" lIns="0" tIns="0" rIns="0" bIns="0" rtlCol="0" anchor="ctr">
-            <a:normAutofit/>
-          </a:bodyPr>
+          <a:bodyPr wrap="square" lIns="0" tIns="0" rIns="0" bIns="0" rtlCol="0" anchor="ctr"/>
           <a:lstStyle/>
           <a:p>
             <a:pPr algn="ctr" indent="0" marL="0">
               <a:buNone/>
             </a:pPr>
             <a:r>
-              <a:rPr lang="en-US" sz="3600" b="1" dirty="0">
-                <a:solidFill>
-                  <a:srgbClr val="990011"/>
+              <a:rPr lang="en-US" sz="1600" i="1" dirty="0">
+                <a:solidFill>
+                  <a:srgbClr val="555555"/>
                 </a:solidFill>
                 <a:latin typeface="Times New Roman" pitchFamily="34" charset="0"/>
                 <a:ea typeface="Times New Roman" pitchFamily="34" charset="-122"/>
                 <a:cs typeface="Times New Roman" pitchFamily="34" charset="-120"/>
               </a:rPr>
-              <a:t>3. Appraisal of the Model</a:t>
-            </a:r>
-            <a:endParaRPr lang="en-US" sz="3600" dirty="0"/>
-          </a:p>
-        </p:txBody>
-      </p:sp>
-      <p:sp>
-        <p:nvSpPr>
-          <p:cNvPr id="5" name="Text 2"/>
-          <p:cNvSpPr/>
-          <p:nvPr/>
-        </p:nvSpPr>
-        <p:spPr>
-          <a:xfrm>
-            <a:off x="2697480" y="1737360"/>
-            <a:ext cx="9174175" cy="457200"/>
-          </a:xfrm>
-          <a:prstGeom prst="rect">
-            <a:avLst/>
-          </a:prstGeom>
-          <a:noFill/>
-          <a:ln/>
-        </p:spPr>
-        <p:txBody>
-          <a:bodyPr wrap="square" lIns="0" tIns="0" rIns="0" bIns="0" rtlCol="0" anchor="ctr"/>
-          <a:lstStyle/>
-          <a:p>
-            <a:pPr algn="l" indent="0" marL="0">
-              <a:buNone/>
-            </a:pPr>
-            <a:r>
-              <a:rPr lang="en-US" sz="3200" b="1" dirty="0">
-                <a:solidFill>
-                  <a:srgbClr val="990011"/>
-                </a:solidFill>
-                <a:latin typeface="Times New Roman" pitchFamily="34" charset="0"/>
-                <a:ea typeface="Times New Roman" pitchFamily="34" charset="-122"/>
-                <a:cs typeface="Times New Roman" pitchFamily="34" charset="-120"/>
-              </a:rPr>
-              <a:t>A) Strengths</a:t>
-            </a:r>
-            <a:endParaRPr lang="en-US" sz="3200" dirty="0"/>
-          </a:p>
-        </p:txBody>
-      </p:sp>
-      <p:sp>
-        <p:nvSpPr>
-          <p:cNvPr id="6" name="Text 3"/>
-          <p:cNvSpPr/>
-          <p:nvPr/>
-        </p:nvSpPr>
-        <p:spPr>
-          <a:xfrm>
-            <a:off x="2697480" y="2240280"/>
-            <a:ext cx="9174175" cy="4206240"/>
-          </a:xfrm>
-          <a:prstGeom prst="rect">
-            <a:avLst/>
-          </a:prstGeom>
-          <a:noFill/>
-          <a:ln/>
-        </p:spPr>
-        <p:txBody>
-          <a:bodyPr wrap="square" lIns="0" tIns="0" rIns="0" bIns="0" rtlCol="0" anchor="t"/>
-          <a:lstStyle/>
-          <a:p>
-            <a:pPr algn="l" indent="0" marL="0">
-              <a:spcAft>
-                <a:spcPts val="800"/>
-              </a:spcAft>
-              <a:buNone/>
-            </a:pPr>
-            <a:r>
-              <a:rPr lang="en-US" sz="4000" i="1" dirty="0">
-                <a:solidFill>
-                  <a:srgbClr val="111111"/>
-                </a:solidFill>
-                <a:latin typeface="Times New Roman" pitchFamily="34" charset="0"/>
-                <a:ea typeface="Times New Roman" pitchFamily="34" charset="-122"/>
-                <a:cs typeface="Times New Roman" pitchFamily="34" charset="-120"/>
-              </a:rPr>
-              <a:t>The model has the following strengths:</a:t>
-            </a:r>
-            <a:endParaRPr lang="en-US" sz="4000" dirty="0"/>
-          </a:p>
-          <a:p>
-            <a:pPr algn="l" indent="0" marL="0">
-              <a:spcAft>
-                <a:spcPts val="800"/>
-              </a:spcAft>
-              <a:buNone/>
-            </a:pPr>
-            <a:r>
-              <a:rPr lang="en-US" sz="4000" b="1" dirty="0">
-                <a:solidFill>
-                  <a:srgbClr val="111111"/>
-                </a:solidFill>
-                <a:latin typeface="Times New Roman" pitchFamily="34" charset="0"/>
-                <a:ea typeface="Times New Roman" pitchFamily="34" charset="-122"/>
-                <a:cs typeface="Times New Roman" pitchFamily="34" charset="-120"/>
-              </a:rPr>
-              <a:t>A simple framework: </a:t>
-            </a:r>
-            <a:pPr algn="l" indent="0" marL="0">
-              <a:spcAft>
-                <a:spcPts val="800"/>
-              </a:spcAft>
-              <a:buNone/>
-            </a:pPr>
-            <a:r>
-              <a:rPr lang="en-US" sz="4000" dirty="0">
-                <a:solidFill>
-                  <a:srgbClr val="111111"/>
-                </a:solidFill>
-                <a:latin typeface="Times New Roman" pitchFamily="34" charset="0"/>
-                <a:ea typeface="Times New Roman" pitchFamily="34" charset="-122"/>
-                <a:cs typeface="Times New Roman" pitchFamily="34" charset="-120"/>
-              </a:rPr>
-              <a:t>It gives a simple way to understand how population changes with development. It is easy to apply to most countries and to compare them.</a:t>
-            </a:r>
-            <a:endParaRPr lang="en-US" sz="4000" dirty="0"/>
+              <a:t>Illustration: countries at each stage</a:t>
+            </a:r>
+            <a:endParaRPr lang="en-US" sz="1600" dirty="0"/>
           </a:p>
         </p:txBody>
       </p:sp>
@@ -18460,7 +18579,7 @@
               <a:buNone/>
             </a:pPr>
             <a:r>
-              <a:rPr lang="en-US" sz="4000" b="1" dirty="0">
+              <a:rPr lang="en-US" sz="4000" i="1" dirty="0">
                 <a:solidFill>
                   <a:srgbClr val="111111"/>
                 </a:solidFill>
@@ -18468,8 +18587,11 @@
                 <a:ea typeface="Times New Roman" pitchFamily="34" charset="-122"/>
                 <a:cs typeface="Times New Roman" pitchFamily="34" charset="-120"/>
               </a:rPr>
-              <a:t>The role of development: </a:t>
-            </a:r>
+              <a:t>The model has the following strengths:</a:t>
+            </a:r>
+            <a:endParaRPr lang="en-US" sz="4000" dirty="0"/>
+          </a:p>
+          <a:p>
             <a:pPr algn="l" indent="0" marL="0">
               <a:spcAft>
                 <a:spcPts val="800"/>
@@ -18477,7 +18599,7 @@
               <a:buNone/>
             </a:pPr>
             <a:r>
-              <a:rPr lang="en-US" sz="4000" dirty="0">
+              <a:rPr lang="en-US" sz="4000" b="1" dirty="0">
                 <a:solidFill>
                   <a:srgbClr val="111111"/>
                 </a:solidFill>
@@ -18485,7 +18607,24 @@
                 <a:ea typeface="Times New Roman" pitchFamily="34" charset="-122"/>
                 <a:cs typeface="Times New Roman" pitchFamily="34" charset="-120"/>
               </a:rPr>
-              <a:t>It shows the importance of social and economic factors, such as health, education and urbanisation. It helps to predict how the population of a country will change.</a:t>
+              <a:t>A simple framework: </a:t>
+            </a:r>
+            <a:pPr algn="l" indent="0" marL="0">
+              <a:spcAft>
+                <a:spcPts val="800"/>
+              </a:spcAft>
+              <a:buNone/>
+            </a:pPr>
+            <a:r>
+              <a:rPr lang="en-US" sz="4000" dirty="0">
+                <a:solidFill>
+                  <a:srgbClr val="111111"/>
+                </a:solidFill>
+                <a:latin typeface="Times New Roman" pitchFamily="34" charset="0"/>
+                <a:ea typeface="Times New Roman" pitchFamily="34" charset="-122"/>
+                <a:cs typeface="Times New Roman" pitchFamily="34" charset="-120"/>
+              </a:rPr>
+              <a:t>It gives a simple way to understand how population changes with development. It is easy to apply to most countries and to compare them.</a:t>
             </a:r>
             <a:endParaRPr lang="en-US" sz="4000" dirty="0"/>
           </a:p>
@@ -18620,7 +18759,7 @@
         <p:spPr>
           <a:xfrm>
             <a:off x="0" y="658368"/>
-            <a:ext cx="1463040" cy="5833872"/>
+            <a:ext cx="2468880" cy="5833872"/>
           </a:xfrm>
           <a:prstGeom prst="rect">
             <a:avLst/>
@@ -18635,8 +18774,8 @@
         </p:nvSpPr>
         <p:spPr>
           <a:xfrm>
-            <a:off x="1691640" y="1005840"/>
-            <a:ext cx="10180015" cy="731520"/>
+            <a:off x="2697480" y="1005840"/>
+            <a:ext cx="9174175" cy="731520"/>
           </a:xfrm>
           <a:prstGeom prst="rect">
             <a:avLst/>
@@ -18676,8 +18815,8 @@
         </p:nvSpPr>
         <p:spPr>
           <a:xfrm>
-            <a:off x="1691640" y="1737360"/>
-            <a:ext cx="10180015" cy="457200"/>
+            <a:off x="2697480" y="1737360"/>
+            <a:ext cx="9174175" cy="457200"/>
           </a:xfrm>
           <a:prstGeom prst="rect">
             <a:avLst/>
@@ -18701,7 +18840,7 @@
                 <a:ea typeface="Times New Roman" pitchFamily="34" charset="-122"/>
                 <a:cs typeface="Times New Roman" pitchFamily="34" charset="-120"/>
               </a:rPr>
-              <a:t>B) Weaknesses</a:t>
+              <a:t>A) Strengths</a:t>
             </a:r>
             <a:endParaRPr lang="en-US" sz="3200" dirty="0"/>
           </a:p>
@@ -18715,8 +18854,8 @@
         </p:nvSpPr>
         <p:spPr>
           <a:xfrm>
-            <a:off x="1691640" y="2240280"/>
-            <a:ext cx="10180015" cy="4206240"/>
+            <a:off x="2697480" y="2240280"/>
+            <a:ext cx="9174175" cy="4206240"/>
           </a:xfrm>
           <a:prstGeom prst="rect">
             <a:avLst/>
@@ -18735,7 +18874,7 @@
               <a:buNone/>
             </a:pPr>
             <a:r>
-              <a:rPr lang="en-US" sz="4000" i="1" dirty="0">
+              <a:rPr lang="en-US" sz="4000" b="1" dirty="0">
                 <a:solidFill>
                   <a:srgbClr val="111111"/>
                 </a:solidFill>
@@ -18743,11 +18882,8 @@
                 <a:ea typeface="Times New Roman" pitchFamily="34" charset="-122"/>
                 <a:cs typeface="Times New Roman" pitchFamily="34" charset="-120"/>
               </a:rPr>
-              <a:t>The model has the following weaknesses:</a:t>
-            </a:r>
-            <a:endParaRPr lang="en-US" sz="4000" dirty="0"/>
-          </a:p>
-          <a:p>
+              <a:t>The role of development: </a:t>
+            </a:r>
             <a:pPr algn="l" indent="0" marL="0">
               <a:spcAft>
                 <a:spcPts val="800"/>
@@ -18755,7 +18891,7 @@
               <a:buNone/>
             </a:pPr>
             <a:r>
-              <a:rPr lang="en-US" sz="4000" b="1" dirty="0">
+              <a:rPr lang="en-US" sz="4000" dirty="0">
                 <a:solidFill>
                   <a:srgbClr val="111111"/>
                 </a:solidFill>
@@ -18763,24 +18899,7 @@
                 <a:ea typeface="Times New Roman" pitchFamily="34" charset="-122"/>
                 <a:cs typeface="Times New Roman" pitchFamily="34" charset="-120"/>
               </a:rPr>
-              <a:t>It is Eurocentric: </a:t>
-            </a:r>
-            <a:pPr algn="l" indent="0" marL="0">
-              <a:spcAft>
-                <a:spcPts val="800"/>
-              </a:spcAft>
-              <a:buNone/>
-            </a:pPr>
-            <a:r>
-              <a:rPr lang="en-US" sz="4000" dirty="0">
-                <a:solidFill>
-                  <a:srgbClr val="111111"/>
-                </a:solidFill>
-                <a:latin typeface="Times New Roman" pitchFamily="34" charset="0"/>
-                <a:ea typeface="Times New Roman" pitchFamily="34" charset="-122"/>
-                <a:cs typeface="Times New Roman" pitchFamily="34" charset="-120"/>
-              </a:rPr>
-              <a:t>It is based on the history of Western countries. In Africa, deaths fell because of imported medicine, not because of industrialisation, so the stages do not happen in the same way.</a:t>
+              <a:t>It shows the importance of social and economic factors, such as health, education and urbanisation. It helps to predict how the population of a country will change.</a:t>
             </a:r>
             <a:endParaRPr lang="en-US" sz="4000" dirty="0"/>
           </a:p>
@@ -18898,150 +19017,9 @@
           </a:p>
         </p:txBody>
       </p:sp>
-      <p:sp>
-        <p:nvSpPr>
-          <p:cNvPr id="3" name="Text 1"/>
-          <p:cNvSpPr/>
-          <p:nvPr/>
-        </p:nvSpPr>
-        <p:spPr>
-          <a:xfrm>
-            <a:off x="365760" y="1005840"/>
-            <a:ext cx="11460175" cy="731520"/>
-          </a:xfrm>
-          <a:prstGeom prst="rect">
-            <a:avLst/>
-          </a:prstGeom>
-          <a:noFill/>
-          <a:ln/>
-        </p:spPr>
-        <p:txBody>
-          <a:bodyPr wrap="square" lIns="0" tIns="0" rIns="0" bIns="0" rtlCol="0" anchor="ctr">
-            <a:normAutofit/>
-          </a:bodyPr>
-          <a:lstStyle/>
-          <a:p>
-            <a:pPr algn="ctr" indent="0" marL="0">
-              <a:buNone/>
-            </a:pPr>
-            <a:r>
-              <a:rPr lang="en-US" sz="3600" b="1" dirty="0">
-                <a:solidFill>
-                  <a:srgbClr val="990011"/>
-                </a:solidFill>
-                <a:latin typeface="Times New Roman" pitchFamily="34" charset="0"/>
-                <a:ea typeface="Times New Roman" pitchFamily="34" charset="-122"/>
-                <a:cs typeface="Times New Roman" pitchFamily="34" charset="-120"/>
-              </a:rPr>
-              <a:t>3. Appraisal of the Model</a:t>
-            </a:r>
-            <a:endParaRPr lang="en-US" sz="3600" dirty="0"/>
-          </a:p>
-        </p:txBody>
-      </p:sp>
-      <p:sp>
-        <p:nvSpPr>
-          <p:cNvPr id="4" name="Text 2"/>
-          <p:cNvSpPr/>
-          <p:nvPr/>
-        </p:nvSpPr>
-        <p:spPr>
-          <a:xfrm>
-            <a:off x="365760" y="1737360"/>
-            <a:ext cx="6035040" cy="457200"/>
-          </a:xfrm>
-          <a:prstGeom prst="rect">
-            <a:avLst/>
-          </a:prstGeom>
-          <a:noFill/>
-          <a:ln/>
-        </p:spPr>
-        <p:txBody>
-          <a:bodyPr wrap="square" lIns="0" tIns="0" rIns="0" bIns="0" rtlCol="0" anchor="ctr">
-            <a:normAutofit/>
-          </a:bodyPr>
-          <a:lstStyle/>
-          <a:p>
-            <a:pPr algn="l" indent="0" marL="0">
-              <a:buNone/>
-            </a:pPr>
-            <a:r>
-              <a:rPr lang="en-US" sz="3000" b="1" dirty="0">
-                <a:solidFill>
-                  <a:srgbClr val="990011"/>
-                </a:solidFill>
-                <a:latin typeface="Times New Roman" pitchFamily="34" charset="0"/>
-                <a:ea typeface="Times New Roman" pitchFamily="34" charset="-122"/>
-                <a:cs typeface="Times New Roman" pitchFamily="34" charset="-120"/>
-              </a:rPr>
-              <a:t>B) Weaknesses</a:t>
-            </a:r>
-            <a:endParaRPr lang="en-US" sz="3000" dirty="0"/>
-          </a:p>
-        </p:txBody>
-      </p:sp>
-      <p:sp>
-        <p:nvSpPr>
-          <p:cNvPr id="5" name="Text 3"/>
-          <p:cNvSpPr/>
-          <p:nvPr/>
-        </p:nvSpPr>
-        <p:spPr>
-          <a:xfrm>
-            <a:off x="365760" y="2240280"/>
-            <a:ext cx="6035040" cy="4160520"/>
-          </a:xfrm>
-          <a:prstGeom prst="rect">
-            <a:avLst/>
-          </a:prstGeom>
-          <a:noFill/>
-          <a:ln/>
-        </p:spPr>
-        <p:txBody>
-          <a:bodyPr wrap="square" lIns="0" tIns="0" rIns="0" bIns="0" rtlCol="0" anchor="t"/>
-          <a:lstStyle/>
-          <a:p>
-            <a:pPr algn="l" indent="0" marL="0">
-              <a:spcAft>
-                <a:spcPts val="800"/>
-              </a:spcAft>
-              <a:buNone/>
-            </a:pPr>
-            <a:r>
-              <a:rPr lang="en-US" sz="3600" b="1" dirty="0">
-                <a:solidFill>
-                  <a:srgbClr val="111111"/>
-                </a:solidFill>
-                <a:latin typeface="Times New Roman" pitchFamily="34" charset="0"/>
-                <a:ea typeface="Times New Roman" pitchFamily="34" charset="-122"/>
-                <a:cs typeface="Times New Roman" pitchFamily="34" charset="-120"/>
-              </a:rPr>
-              <a:t>It ignores other causes: </a:t>
-            </a:r>
-            <a:pPr algn="l" indent="0" marL="0">
-              <a:spcAft>
-                <a:spcPts val="800"/>
-              </a:spcAft>
-              <a:buNone/>
-            </a:pPr>
-            <a:r>
-              <a:rPr lang="en-US" sz="3600" dirty="0">
-                <a:solidFill>
-                  <a:srgbClr val="111111"/>
-                </a:solidFill>
-                <a:latin typeface="Times New Roman" pitchFamily="34" charset="0"/>
-                <a:ea typeface="Times New Roman" pitchFamily="34" charset="-122"/>
-                <a:cs typeface="Times New Roman" pitchFamily="34" charset="-120"/>
-              </a:rPr>
-              <a:t>It does not include wars, epidemics such as HIV/AIDS, migration or policies such as China's one-child policy. These can change population very quickly.</a:t>
-            </a:r>
-            <a:endParaRPr lang="en-US" sz="3600" dirty="0"/>
-          </a:p>
-        </p:txBody>
-      </p:sp>
       <p:pic>
         <p:nvPicPr>
-          <p:cNvPr id="6" name="Image 0" descr="/home/claude/f4/img/v2/usa_onechild.jpg">    </p:cNvPr>
+          <p:cNvPr id="3" name="Image 0" descr="/home/claude/f4/img/minesec_sheet.png">    </p:cNvPr>
           <p:cNvPicPr>
             <a:picLocks noChangeAspect="1"/>
           </p:cNvPicPr>
@@ -19055,8 +19033,8 @@
         </p:blipFill>
         <p:spPr>
           <a:xfrm>
-            <a:off x="6537960" y="2400897"/>
-            <a:ext cx="5470855" cy="3034615"/>
+            <a:off x="0" y="658368"/>
+            <a:ext cx="1463040" cy="5833872"/>
           </a:xfrm>
           <a:prstGeom prst="rect">
             <a:avLst/>
@@ -19065,14 +19043,14 @@
       </p:pic>
       <p:sp>
         <p:nvSpPr>
-          <p:cNvPr id="7" name="Text 4"/>
+          <p:cNvPr id="4" name="Text 1"/>
           <p:cNvSpPr/>
           <p:nvPr/>
         </p:nvSpPr>
         <p:spPr>
           <a:xfrm>
-            <a:off x="6537960" y="6089904"/>
-            <a:ext cx="5470855" cy="347472"/>
+            <a:off x="1691640" y="1005840"/>
+            <a:ext cx="10180015" cy="731520"/>
           </a:xfrm>
           <a:prstGeom prst="rect">
             <a:avLst/>
@@ -19081,24 +19059,144 @@
           <a:ln/>
         </p:spPr>
         <p:txBody>
-          <a:bodyPr wrap="square" lIns="0" tIns="0" rIns="0" bIns="0" rtlCol="0" anchor="ctr"/>
+          <a:bodyPr wrap="square" lIns="0" tIns="0" rIns="0" bIns="0" rtlCol="0" anchor="ctr">
+            <a:normAutofit/>
+          </a:bodyPr>
           <a:lstStyle/>
           <a:p>
             <a:pPr algn="ctr" indent="0" marL="0">
               <a:buNone/>
             </a:pPr>
             <a:r>
-              <a:rPr lang="en-US" sz="1600" i="1" dirty="0">
-                <a:solidFill>
-                  <a:srgbClr val="555555"/>
+              <a:rPr lang="en-US" sz="3600" b="1" dirty="0">
+                <a:solidFill>
+                  <a:srgbClr val="990011"/>
                 </a:solidFill>
                 <a:latin typeface="Times New Roman" pitchFamily="34" charset="0"/>
                 <a:ea typeface="Times New Roman" pitchFamily="34" charset="-122"/>
                 <a:cs typeface="Times New Roman" pitchFamily="34" charset="-120"/>
               </a:rPr>
-              <a:t>Illustration: the one-child policy</a:t>
-            </a:r>
-            <a:endParaRPr lang="en-US" sz="1600" dirty="0"/>
+              <a:t>3. Appraisal of the Model</a:t>
+            </a:r>
+            <a:endParaRPr lang="en-US" sz="3600" dirty="0"/>
+          </a:p>
+        </p:txBody>
+      </p:sp>
+      <p:sp>
+        <p:nvSpPr>
+          <p:cNvPr id="5" name="Text 2"/>
+          <p:cNvSpPr/>
+          <p:nvPr/>
+        </p:nvSpPr>
+        <p:spPr>
+          <a:xfrm>
+            <a:off x="1691640" y="1737360"/>
+            <a:ext cx="10180015" cy="457200"/>
+          </a:xfrm>
+          <a:prstGeom prst="rect">
+            <a:avLst/>
+          </a:prstGeom>
+          <a:noFill/>
+          <a:ln/>
+        </p:spPr>
+        <p:txBody>
+          <a:bodyPr wrap="square" lIns="0" tIns="0" rIns="0" bIns="0" rtlCol="0" anchor="ctr"/>
+          <a:lstStyle/>
+          <a:p>
+            <a:pPr algn="l" indent="0" marL="0">
+              <a:buNone/>
+            </a:pPr>
+            <a:r>
+              <a:rPr lang="en-US" sz="3200" b="1" dirty="0">
+                <a:solidFill>
+                  <a:srgbClr val="990011"/>
+                </a:solidFill>
+                <a:latin typeface="Times New Roman" pitchFamily="34" charset="0"/>
+                <a:ea typeface="Times New Roman" pitchFamily="34" charset="-122"/>
+                <a:cs typeface="Times New Roman" pitchFamily="34" charset="-120"/>
+              </a:rPr>
+              <a:t>B) Weaknesses</a:t>
+            </a:r>
+            <a:endParaRPr lang="en-US" sz="3200" dirty="0"/>
+          </a:p>
+        </p:txBody>
+      </p:sp>
+      <p:sp>
+        <p:nvSpPr>
+          <p:cNvPr id="6" name="Text 3"/>
+          <p:cNvSpPr/>
+          <p:nvPr/>
+        </p:nvSpPr>
+        <p:spPr>
+          <a:xfrm>
+            <a:off x="1691640" y="2240280"/>
+            <a:ext cx="10180015" cy="4206240"/>
+          </a:xfrm>
+          <a:prstGeom prst="rect">
+            <a:avLst/>
+          </a:prstGeom>
+          <a:noFill/>
+          <a:ln/>
+        </p:spPr>
+        <p:txBody>
+          <a:bodyPr wrap="square" lIns="0" tIns="0" rIns="0" bIns="0" rtlCol="0" anchor="t"/>
+          <a:lstStyle/>
+          <a:p>
+            <a:pPr algn="l" indent="0" marL="0">
+              <a:spcAft>
+                <a:spcPts val="800"/>
+              </a:spcAft>
+              <a:buNone/>
+            </a:pPr>
+            <a:r>
+              <a:rPr lang="en-US" sz="4000" i="1" dirty="0">
+                <a:solidFill>
+                  <a:srgbClr val="111111"/>
+                </a:solidFill>
+                <a:latin typeface="Times New Roman" pitchFamily="34" charset="0"/>
+                <a:ea typeface="Times New Roman" pitchFamily="34" charset="-122"/>
+                <a:cs typeface="Times New Roman" pitchFamily="34" charset="-120"/>
+              </a:rPr>
+              <a:t>The model has the following weaknesses:</a:t>
+            </a:r>
+            <a:endParaRPr lang="en-US" sz="4000" dirty="0"/>
+          </a:p>
+          <a:p>
+            <a:pPr algn="l" indent="0" marL="0">
+              <a:spcAft>
+                <a:spcPts val="800"/>
+              </a:spcAft>
+              <a:buNone/>
+            </a:pPr>
+            <a:r>
+              <a:rPr lang="en-US" sz="4000" b="1" dirty="0">
+                <a:solidFill>
+                  <a:srgbClr val="111111"/>
+                </a:solidFill>
+                <a:latin typeface="Times New Roman" pitchFamily="34" charset="0"/>
+                <a:ea typeface="Times New Roman" pitchFamily="34" charset="-122"/>
+                <a:cs typeface="Times New Roman" pitchFamily="34" charset="-120"/>
+              </a:rPr>
+              <a:t>It is Eurocentric: </a:t>
+            </a:r>
+            <a:pPr algn="l" indent="0" marL="0">
+              <a:spcAft>
+                <a:spcPts val="800"/>
+              </a:spcAft>
+              <a:buNone/>
+            </a:pPr>
+            <a:r>
+              <a:rPr lang="en-US" sz="4000" dirty="0">
+                <a:solidFill>
+                  <a:srgbClr val="111111"/>
+                </a:solidFill>
+                <a:latin typeface="Times New Roman" pitchFamily="34" charset="0"/>
+                <a:ea typeface="Times New Roman" pitchFamily="34" charset="-122"/>
+                <a:cs typeface="Times New Roman" pitchFamily="34" charset="-120"/>
+              </a:rPr>
+              <a:t>It is based on the history of Western countries. In Africa, deaths fell because of imported medicine, not because of industrialisation, so the stages do not happen in the same way.</a:t>
+            </a:r>
+            <a:endParaRPr lang="en-US" sz="4000" dirty="0"/>
           </a:p>
         </p:txBody>
       </p:sp>
@@ -19433,9 +19531,150 @@
           </a:p>
         </p:txBody>
       </p:sp>
+      <p:sp>
+        <p:nvSpPr>
+          <p:cNvPr id="3" name="Text 1"/>
+          <p:cNvSpPr/>
+          <p:nvPr/>
+        </p:nvSpPr>
+        <p:spPr>
+          <a:xfrm>
+            <a:off x="365760" y="1005840"/>
+            <a:ext cx="11460175" cy="731520"/>
+          </a:xfrm>
+          <a:prstGeom prst="rect">
+            <a:avLst/>
+          </a:prstGeom>
+          <a:noFill/>
+          <a:ln/>
+        </p:spPr>
+        <p:txBody>
+          <a:bodyPr wrap="square" lIns="0" tIns="0" rIns="0" bIns="0" rtlCol="0" anchor="ctr">
+            <a:normAutofit/>
+          </a:bodyPr>
+          <a:lstStyle/>
+          <a:p>
+            <a:pPr algn="ctr" indent="0" marL="0">
+              <a:buNone/>
+            </a:pPr>
+            <a:r>
+              <a:rPr lang="en-US" sz="3600" b="1" dirty="0">
+                <a:solidFill>
+                  <a:srgbClr val="990011"/>
+                </a:solidFill>
+                <a:latin typeface="Times New Roman" pitchFamily="34" charset="0"/>
+                <a:ea typeface="Times New Roman" pitchFamily="34" charset="-122"/>
+                <a:cs typeface="Times New Roman" pitchFamily="34" charset="-120"/>
+              </a:rPr>
+              <a:t>3. Appraisal of the Model</a:t>
+            </a:r>
+            <a:endParaRPr lang="en-US" sz="3600" dirty="0"/>
+          </a:p>
+        </p:txBody>
+      </p:sp>
+      <p:sp>
+        <p:nvSpPr>
+          <p:cNvPr id="4" name="Text 2"/>
+          <p:cNvSpPr/>
+          <p:nvPr/>
+        </p:nvSpPr>
+        <p:spPr>
+          <a:xfrm>
+            <a:off x="365760" y="1737360"/>
+            <a:ext cx="6035040" cy="457200"/>
+          </a:xfrm>
+          <a:prstGeom prst="rect">
+            <a:avLst/>
+          </a:prstGeom>
+          <a:noFill/>
+          <a:ln/>
+        </p:spPr>
+        <p:txBody>
+          <a:bodyPr wrap="square" lIns="0" tIns="0" rIns="0" bIns="0" rtlCol="0" anchor="ctr">
+            <a:normAutofit/>
+          </a:bodyPr>
+          <a:lstStyle/>
+          <a:p>
+            <a:pPr algn="l" indent="0" marL="0">
+              <a:buNone/>
+            </a:pPr>
+            <a:r>
+              <a:rPr lang="en-US" sz="3000" b="1" dirty="0">
+                <a:solidFill>
+                  <a:srgbClr val="990011"/>
+                </a:solidFill>
+                <a:latin typeface="Times New Roman" pitchFamily="34" charset="0"/>
+                <a:ea typeface="Times New Roman" pitchFamily="34" charset="-122"/>
+                <a:cs typeface="Times New Roman" pitchFamily="34" charset="-120"/>
+              </a:rPr>
+              <a:t>B) Weaknesses</a:t>
+            </a:r>
+            <a:endParaRPr lang="en-US" sz="3000" dirty="0"/>
+          </a:p>
+        </p:txBody>
+      </p:sp>
+      <p:sp>
+        <p:nvSpPr>
+          <p:cNvPr id="5" name="Text 3"/>
+          <p:cNvSpPr/>
+          <p:nvPr/>
+        </p:nvSpPr>
+        <p:spPr>
+          <a:xfrm>
+            <a:off x="365760" y="2240280"/>
+            <a:ext cx="6035040" cy="4160520"/>
+          </a:xfrm>
+          <a:prstGeom prst="rect">
+            <a:avLst/>
+          </a:prstGeom>
+          <a:noFill/>
+          <a:ln/>
+        </p:spPr>
+        <p:txBody>
+          <a:bodyPr wrap="square" lIns="0" tIns="0" rIns="0" bIns="0" rtlCol="0" anchor="t"/>
+          <a:lstStyle/>
+          <a:p>
+            <a:pPr algn="l" indent="0" marL="0">
+              <a:spcAft>
+                <a:spcPts val="800"/>
+              </a:spcAft>
+              <a:buNone/>
+            </a:pPr>
+            <a:r>
+              <a:rPr lang="en-US" sz="3600" b="1" dirty="0">
+                <a:solidFill>
+                  <a:srgbClr val="111111"/>
+                </a:solidFill>
+                <a:latin typeface="Times New Roman" pitchFamily="34" charset="0"/>
+                <a:ea typeface="Times New Roman" pitchFamily="34" charset="-122"/>
+                <a:cs typeface="Times New Roman" pitchFamily="34" charset="-120"/>
+              </a:rPr>
+              <a:t>It ignores other causes: </a:t>
+            </a:r>
+            <a:pPr algn="l" indent="0" marL="0">
+              <a:spcAft>
+                <a:spcPts val="800"/>
+              </a:spcAft>
+              <a:buNone/>
+            </a:pPr>
+            <a:r>
+              <a:rPr lang="en-US" sz="3600" dirty="0">
+                <a:solidFill>
+                  <a:srgbClr val="111111"/>
+                </a:solidFill>
+                <a:latin typeface="Times New Roman" pitchFamily="34" charset="0"/>
+                <a:ea typeface="Times New Roman" pitchFamily="34" charset="-122"/>
+                <a:cs typeface="Times New Roman" pitchFamily="34" charset="-120"/>
+              </a:rPr>
+              <a:t>It does not include wars, epidemics such as HIV/AIDS, migration or policies such as China's one-child policy. These can change population very quickly.</a:t>
+            </a:r>
+            <a:endParaRPr lang="en-US" sz="3600" dirty="0"/>
+          </a:p>
+        </p:txBody>
+      </p:sp>
       <p:pic>
         <p:nvPicPr>
-          <p:cNvPr id="3" name="Image 0" descr="/home/claude/f4/img/minesec_sheet.png">    </p:cNvPr>
+          <p:cNvPr id="6" name="Image 0" descr="/home/claude/f4/img/v2/usa_onechild.jpg">    </p:cNvPr>
           <p:cNvPicPr>
             <a:picLocks noChangeAspect="1"/>
           </p:cNvPicPr>
@@ -19449,8 +19688,8 @@
         </p:blipFill>
         <p:spPr>
           <a:xfrm>
-            <a:off x="0" y="658368"/>
-            <a:ext cx="2468880" cy="5833872"/>
+            <a:off x="6537960" y="2400897"/>
+            <a:ext cx="5470855" cy="3034615"/>
           </a:xfrm>
           <a:prstGeom prst="rect">
             <a:avLst/>
@@ -19459,14 +19698,14 @@
       </p:pic>
       <p:sp>
         <p:nvSpPr>
-          <p:cNvPr id="4" name="Text 1"/>
+          <p:cNvPr id="7" name="Text 4"/>
           <p:cNvSpPr/>
           <p:nvPr/>
         </p:nvSpPr>
         <p:spPr>
           <a:xfrm>
-            <a:off x="2697480" y="1005840"/>
-            <a:ext cx="9174175" cy="731520"/>
+            <a:off x="6537960" y="6089904"/>
+            <a:ext cx="5470855" cy="347472"/>
           </a:xfrm>
           <a:prstGeom prst="rect">
             <a:avLst/>
@@ -19475,124 +19714,24 @@
           <a:ln/>
         </p:spPr>
         <p:txBody>
-          <a:bodyPr wrap="square" lIns="0" tIns="0" rIns="0" bIns="0" rtlCol="0" anchor="ctr">
-            <a:normAutofit/>
-          </a:bodyPr>
+          <a:bodyPr wrap="square" lIns="0" tIns="0" rIns="0" bIns="0" rtlCol="0" anchor="ctr"/>
           <a:lstStyle/>
           <a:p>
             <a:pPr algn="ctr" indent="0" marL="0">
               <a:buNone/>
             </a:pPr>
             <a:r>
-              <a:rPr lang="en-US" sz="3600" b="1" dirty="0">
-                <a:solidFill>
-                  <a:srgbClr val="990011"/>
+              <a:rPr lang="en-US" sz="1600" i="1" dirty="0">
+                <a:solidFill>
+                  <a:srgbClr val="555555"/>
                 </a:solidFill>
                 <a:latin typeface="Times New Roman" pitchFamily="34" charset="0"/>
                 <a:ea typeface="Times New Roman" pitchFamily="34" charset="-122"/>
                 <a:cs typeface="Times New Roman" pitchFamily="34" charset="-120"/>
               </a:rPr>
-              <a:t>3. Appraisal of the Model</a:t>
-            </a:r>
-            <a:endParaRPr lang="en-US" sz="3600" dirty="0"/>
-          </a:p>
-        </p:txBody>
-      </p:sp>
-      <p:sp>
-        <p:nvSpPr>
-          <p:cNvPr id="5" name="Text 2"/>
-          <p:cNvSpPr/>
-          <p:nvPr/>
-        </p:nvSpPr>
-        <p:spPr>
-          <a:xfrm>
-            <a:off x="2697480" y="1737360"/>
-            <a:ext cx="9174175" cy="457200"/>
-          </a:xfrm>
-          <a:prstGeom prst="rect">
-            <a:avLst/>
-          </a:prstGeom>
-          <a:noFill/>
-          <a:ln/>
-        </p:spPr>
-        <p:txBody>
-          <a:bodyPr wrap="square" lIns="0" tIns="0" rIns="0" bIns="0" rtlCol="0" anchor="ctr"/>
-          <a:lstStyle/>
-          <a:p>
-            <a:pPr algn="l" indent="0" marL="0">
-              <a:buNone/>
-            </a:pPr>
-            <a:r>
-              <a:rPr lang="en-US" sz="3200" b="1" dirty="0">
-                <a:solidFill>
-                  <a:srgbClr val="990011"/>
-                </a:solidFill>
-                <a:latin typeface="Times New Roman" pitchFamily="34" charset="0"/>
-                <a:ea typeface="Times New Roman" pitchFamily="34" charset="-122"/>
-                <a:cs typeface="Times New Roman" pitchFamily="34" charset="-120"/>
-              </a:rPr>
-              <a:t>B) Weaknesses</a:t>
-            </a:r>
-            <a:endParaRPr lang="en-US" sz="3200" dirty="0"/>
-          </a:p>
-        </p:txBody>
-      </p:sp>
-      <p:sp>
-        <p:nvSpPr>
-          <p:cNvPr id="6" name="Text 3"/>
-          <p:cNvSpPr/>
-          <p:nvPr/>
-        </p:nvSpPr>
-        <p:spPr>
-          <a:xfrm>
-            <a:off x="2697480" y="2240280"/>
-            <a:ext cx="9174175" cy="4206240"/>
-          </a:xfrm>
-          <a:prstGeom prst="rect">
-            <a:avLst/>
-          </a:prstGeom>
-          <a:noFill/>
-          <a:ln/>
-        </p:spPr>
-        <p:txBody>
-          <a:bodyPr wrap="square" lIns="0" tIns="0" rIns="0" bIns="0" rtlCol="0" anchor="t"/>
-          <a:lstStyle/>
-          <a:p>
-            <a:pPr algn="l" indent="0" marL="0">
-              <a:spcAft>
-                <a:spcPts val="800"/>
-              </a:spcAft>
-              <a:buNone/>
-            </a:pPr>
-            <a:r>
-              <a:rPr lang="en-US" sz="4000" b="1" dirty="0">
-                <a:solidFill>
-                  <a:srgbClr val="111111"/>
-                </a:solidFill>
-                <a:latin typeface="Times New Roman" pitchFamily="34" charset="0"/>
-                <a:ea typeface="Times New Roman" pitchFamily="34" charset="-122"/>
-                <a:cs typeface="Times New Roman" pitchFamily="34" charset="-120"/>
-              </a:rPr>
-              <a:t>Time scales and stage 5: </a:t>
-            </a:r>
-            <a:pPr algn="l" indent="0" marL="0">
-              <a:spcAft>
-                <a:spcPts val="800"/>
-              </a:spcAft>
-              <a:buNone/>
-            </a:pPr>
-            <a:r>
-              <a:rPr lang="en-US" sz="4000" dirty="0">
-                <a:solidFill>
-                  <a:srgbClr val="111111"/>
-                </a:solidFill>
-                <a:latin typeface="Times New Roman" pitchFamily="34" charset="0"/>
-                <a:ea typeface="Times New Roman" pitchFamily="34" charset="-122"/>
-                <a:cs typeface="Times New Roman" pitchFamily="34" charset="-120"/>
-              </a:rPr>
-              <a:t>Countries pass through the stages at very different speeds, much faster today than Europe did. The original model had only four stages, and the fifth was added when some countries began to decline.</a:t>
-            </a:r>
-            <a:endParaRPr lang="en-US" sz="4000" dirty="0"/>
+              <a:t>Illustration: the one-child policy</a:t>
+            </a:r>
+            <a:endParaRPr lang="en-US" sz="1600" dirty="0"/>
           </a:p>
         </p:txBody>
       </p:sp>
@@ -19708,129 +19847,9 @@
           </a:p>
         </p:txBody>
       </p:sp>
-      <p:sp>
-        <p:nvSpPr>
-          <p:cNvPr id="3" name="Text 1"/>
-          <p:cNvSpPr/>
-          <p:nvPr/>
-        </p:nvSpPr>
-        <p:spPr>
-          <a:xfrm>
-            <a:off x="365760" y="1005840"/>
-            <a:ext cx="11460175" cy="731520"/>
-          </a:xfrm>
-          <a:prstGeom prst="rect">
-            <a:avLst/>
-          </a:prstGeom>
-          <a:noFill/>
-          <a:ln/>
-        </p:spPr>
-        <p:txBody>
-          <a:bodyPr wrap="square" lIns="0" tIns="0" rIns="0" bIns="0" rtlCol="0" anchor="ctr">
-            <a:normAutofit/>
-          </a:bodyPr>
-          <a:lstStyle/>
-          <a:p>
-            <a:pPr algn="ctr" indent="0" marL="0">
-              <a:buNone/>
-            </a:pPr>
-            <a:r>
-              <a:rPr lang="en-US" sz="3600" b="1" dirty="0">
-                <a:solidFill>
-                  <a:srgbClr val="990011"/>
-                </a:solidFill>
-                <a:latin typeface="Times New Roman" pitchFamily="34" charset="0"/>
-                <a:ea typeface="Times New Roman" pitchFamily="34" charset="-122"/>
-                <a:cs typeface="Times New Roman" pitchFamily="34" charset="-120"/>
-              </a:rPr>
-              <a:t>4. Application to Cameroon</a:t>
-            </a:r>
-            <a:endParaRPr lang="en-US" sz="3600" dirty="0"/>
-          </a:p>
-        </p:txBody>
-      </p:sp>
-      <p:sp>
-        <p:nvSpPr>
-          <p:cNvPr id="4" name="Text 2"/>
-          <p:cNvSpPr/>
-          <p:nvPr/>
-        </p:nvSpPr>
-        <p:spPr>
-          <a:xfrm>
-            <a:off x="365760" y="1783080"/>
-            <a:ext cx="6035040" cy="4617720"/>
-          </a:xfrm>
-          <a:prstGeom prst="rect">
-            <a:avLst/>
-          </a:prstGeom>
-          <a:noFill/>
-          <a:ln/>
-        </p:spPr>
-        <p:txBody>
-          <a:bodyPr wrap="square" lIns="0" tIns="0" rIns="0" bIns="0" rtlCol="0" anchor="t"/>
-          <a:lstStyle/>
-          <a:p>
-            <a:pPr algn="l" indent="0" marL="0">
-              <a:spcAft>
-                <a:spcPts val="800"/>
-              </a:spcAft>
-              <a:buNone/>
-            </a:pPr>
-            <a:r>
-              <a:rPr lang="en-US" sz="3600" i="1" dirty="0">
-                <a:solidFill>
-                  <a:srgbClr val="111111"/>
-                </a:solidFill>
-                <a:latin typeface="Times New Roman" pitchFamily="34" charset="0"/>
-                <a:ea typeface="Times New Roman" pitchFamily="34" charset="-122"/>
-                <a:cs typeface="Times New Roman" pitchFamily="34" charset="-120"/>
-              </a:rPr>
-              <a:t>The model applies to Cameroon as follows:</a:t>
-            </a:r>
-            <a:endParaRPr lang="en-US" sz="3600" dirty="0"/>
-          </a:p>
-          <a:p>
-            <a:pPr algn="l" indent="0" marL="0">
-              <a:spcAft>
-                <a:spcPts val="800"/>
-              </a:spcAft>
-              <a:buNone/>
-            </a:pPr>
-            <a:r>
-              <a:rPr lang="en-US" sz="3600" b="1" dirty="0">
-                <a:solidFill>
-                  <a:srgbClr val="111111"/>
-                </a:solidFill>
-                <a:latin typeface="Times New Roman" pitchFamily="34" charset="0"/>
-                <a:ea typeface="Times New Roman" pitchFamily="34" charset="-122"/>
-                <a:cs typeface="Times New Roman" pitchFamily="34" charset="-120"/>
-              </a:rPr>
-              <a:t>Current stage: </a:t>
-            </a:r>
-            <a:pPr algn="l" indent="0" marL="0">
-              <a:spcAft>
-                <a:spcPts val="800"/>
-              </a:spcAft>
-              <a:buNone/>
-            </a:pPr>
-            <a:r>
-              <a:rPr lang="en-US" sz="3600" dirty="0">
-                <a:solidFill>
-                  <a:srgbClr val="111111"/>
-                </a:solidFill>
-                <a:latin typeface="Times New Roman" pitchFamily="34" charset="0"/>
-                <a:ea typeface="Times New Roman" pitchFamily="34" charset="-122"/>
-                <a:cs typeface="Times New Roman" pitchFamily="34" charset="-120"/>
-              </a:rPr>
-              <a:t>Cameroon is at the end of stage 2 and entering stage 3. Its death rate has fallen a lot, and its birth rate is beginning to fall.</a:t>
-            </a:r>
-            <a:endParaRPr lang="en-US" sz="3600" dirty="0"/>
-          </a:p>
-        </p:txBody>
-      </p:sp>
       <p:pic>
         <p:nvPicPr>
-          <p:cNvPr id="5" name="Image 0" descr="/home/claude/f4/img/v2/cmr_rates_big.png">    </p:cNvPr>
+          <p:cNvPr id="3" name="Image 0" descr="/home/claude/f4/img/minesec_sheet.png">    </p:cNvPr>
           <p:cNvPicPr>
             <a:picLocks noChangeAspect="1"/>
           </p:cNvPicPr>
@@ -19844,8 +19863,8 @@
         </p:blipFill>
         <p:spPr>
           <a:xfrm>
-            <a:off x="6537960" y="2721454"/>
-            <a:ext cx="5470855" cy="2393499"/>
+            <a:off x="0" y="658368"/>
+            <a:ext cx="3840480" cy="5833872"/>
           </a:xfrm>
           <a:prstGeom prst="rect">
             <a:avLst/>
@@ -19854,14 +19873,14 @@
       </p:pic>
       <p:sp>
         <p:nvSpPr>
-          <p:cNvPr id="6" name="Text 3"/>
+          <p:cNvPr id="4" name="Text 1"/>
           <p:cNvSpPr/>
           <p:nvPr/>
         </p:nvSpPr>
         <p:spPr>
           <a:xfrm>
-            <a:off x="6537960" y="6089904"/>
-            <a:ext cx="5470855" cy="347472"/>
+            <a:off x="4069080" y="1005840"/>
+            <a:ext cx="7802575" cy="731520"/>
           </a:xfrm>
           <a:prstGeom prst="rect">
             <a:avLst/>
@@ -19870,24 +19889,124 @@
           <a:ln/>
         </p:spPr>
         <p:txBody>
-          <a:bodyPr wrap="square" lIns="0" tIns="0" rIns="0" bIns="0" rtlCol="0" anchor="ctr"/>
+          <a:bodyPr wrap="square" lIns="0" tIns="0" rIns="0" bIns="0" rtlCol="0" anchor="ctr">
+            <a:normAutofit/>
+          </a:bodyPr>
           <a:lstStyle/>
           <a:p>
             <a:pPr algn="ctr" indent="0" marL="0">
               <a:buNone/>
             </a:pPr>
             <a:r>
-              <a:rPr lang="en-US" sz="1600" i="1" dirty="0">
-                <a:solidFill>
-                  <a:srgbClr val="555555"/>
+              <a:rPr lang="en-US" sz="3600" b="1" dirty="0">
+                <a:solidFill>
+                  <a:srgbClr val="990011"/>
                 </a:solidFill>
                 <a:latin typeface="Times New Roman" pitchFamily="34" charset="0"/>
                 <a:ea typeface="Times New Roman" pitchFamily="34" charset="-122"/>
                 <a:cs typeface="Times New Roman" pitchFamily="34" charset="-120"/>
               </a:rPr>
-              <a:t>Illustration: birth and death rates of Cameroon</a:t>
-            </a:r>
-            <a:endParaRPr lang="en-US" sz="1600" dirty="0"/>
+              <a:t>3. Appraisal of the Model</a:t>
+            </a:r>
+            <a:endParaRPr lang="en-US" sz="3600" dirty="0"/>
+          </a:p>
+        </p:txBody>
+      </p:sp>
+      <p:sp>
+        <p:nvSpPr>
+          <p:cNvPr id="5" name="Text 2"/>
+          <p:cNvSpPr/>
+          <p:nvPr/>
+        </p:nvSpPr>
+        <p:spPr>
+          <a:xfrm>
+            <a:off x="4069080" y="1737360"/>
+            <a:ext cx="7802575" cy="457200"/>
+          </a:xfrm>
+          <a:prstGeom prst="rect">
+            <a:avLst/>
+          </a:prstGeom>
+          <a:noFill/>
+          <a:ln/>
+        </p:spPr>
+        <p:txBody>
+          <a:bodyPr wrap="square" lIns="0" tIns="0" rIns="0" bIns="0" rtlCol="0" anchor="ctr"/>
+          <a:lstStyle/>
+          <a:p>
+            <a:pPr algn="l" indent="0" marL="0">
+              <a:buNone/>
+            </a:pPr>
+            <a:r>
+              <a:rPr lang="en-US" sz="3200" b="1" dirty="0">
+                <a:solidFill>
+                  <a:srgbClr val="990011"/>
+                </a:solidFill>
+                <a:latin typeface="Times New Roman" pitchFamily="34" charset="0"/>
+                <a:ea typeface="Times New Roman" pitchFamily="34" charset="-122"/>
+                <a:cs typeface="Times New Roman" pitchFamily="34" charset="-120"/>
+              </a:rPr>
+              <a:t>B) Weaknesses</a:t>
+            </a:r>
+            <a:endParaRPr lang="en-US" sz="3200" dirty="0"/>
+          </a:p>
+        </p:txBody>
+      </p:sp>
+      <p:sp>
+        <p:nvSpPr>
+          <p:cNvPr id="6" name="Text 3"/>
+          <p:cNvSpPr/>
+          <p:nvPr/>
+        </p:nvSpPr>
+        <p:spPr>
+          <a:xfrm>
+            <a:off x="4069080" y="2240280"/>
+            <a:ext cx="7802575" cy="4206240"/>
+          </a:xfrm>
+          <a:prstGeom prst="rect">
+            <a:avLst/>
+          </a:prstGeom>
+          <a:noFill/>
+          <a:ln/>
+        </p:spPr>
+        <p:txBody>
+          <a:bodyPr wrap="square" lIns="0" tIns="0" rIns="0" bIns="0" rtlCol="0" anchor="t"/>
+          <a:lstStyle/>
+          <a:p>
+            <a:pPr algn="l" indent="0" marL="0">
+              <a:spcAft>
+                <a:spcPts val="800"/>
+              </a:spcAft>
+              <a:buNone/>
+            </a:pPr>
+            <a:r>
+              <a:rPr lang="en-US" sz="4000" b="1" dirty="0">
+                <a:solidFill>
+                  <a:srgbClr val="111111"/>
+                </a:solidFill>
+                <a:latin typeface="Times New Roman" pitchFamily="34" charset="0"/>
+                <a:ea typeface="Times New Roman" pitchFamily="34" charset="-122"/>
+                <a:cs typeface="Times New Roman" pitchFamily="34" charset="-120"/>
+              </a:rPr>
+              <a:t>Different speeds: </a:t>
+            </a:r>
+            <a:pPr algn="l" indent="0" marL="0">
+              <a:spcAft>
+                <a:spcPts val="800"/>
+              </a:spcAft>
+              <a:buNone/>
+            </a:pPr>
+            <a:r>
+              <a:rPr lang="en-US" sz="4000" dirty="0">
+                <a:solidFill>
+                  <a:srgbClr val="111111"/>
+                </a:solidFill>
+                <a:latin typeface="Times New Roman" pitchFamily="34" charset="0"/>
+                <a:ea typeface="Times New Roman" pitchFamily="34" charset="-122"/>
+                <a:cs typeface="Times New Roman" pitchFamily="34" charset="-120"/>
+              </a:rPr>
+              <a:t>Countries pass through the stages at very different speeds, and much faster today than Europe did. The model does not say how long each stage lasts.</a:t>
+            </a:r>
+            <a:endParaRPr lang="en-US" sz="4000" dirty="0"/>
           </a:p>
         </p:txBody>
       </p:sp>
@@ -20020,7 +20139,7 @@
         <p:spPr>
           <a:xfrm>
             <a:off x="0" y="658368"/>
-            <a:ext cx="5120640" cy="5833872"/>
+            <a:ext cx="3840480" cy="5833872"/>
           </a:xfrm>
           <a:prstGeom prst="rect">
             <a:avLst/>
@@ -20035,8 +20154,8 @@
         </p:nvSpPr>
         <p:spPr>
           <a:xfrm>
-            <a:off x="5349240" y="1005840"/>
-            <a:ext cx="6522415" cy="731520"/>
+            <a:off x="4069080" y="1005840"/>
+            <a:ext cx="7802575" cy="731520"/>
           </a:xfrm>
           <a:prstGeom prst="rect">
             <a:avLst/>
@@ -20062,7 +20181,7 @@
                 <a:ea typeface="Times New Roman" pitchFamily="34" charset="-122"/>
                 <a:cs typeface="Times New Roman" pitchFamily="34" charset="-120"/>
               </a:rPr>
-              <a:t>4. Application to Cameroon</a:t>
+              <a:t>3. Appraisal of the Model</a:t>
             </a:r>
             <a:endParaRPr lang="en-US" sz="3600" dirty="0"/>
           </a:p>
@@ -20076,8 +20195,47 @@
         </p:nvSpPr>
         <p:spPr>
           <a:xfrm>
-            <a:off x="5349240" y="1783080"/>
-            <a:ext cx="6522415" cy="4663440"/>
+            <a:off x="4069080" y="1737360"/>
+            <a:ext cx="7802575" cy="457200"/>
+          </a:xfrm>
+          <a:prstGeom prst="rect">
+            <a:avLst/>
+          </a:prstGeom>
+          <a:noFill/>
+          <a:ln/>
+        </p:spPr>
+        <p:txBody>
+          <a:bodyPr wrap="square" lIns="0" tIns="0" rIns="0" bIns="0" rtlCol="0" anchor="ctr"/>
+          <a:lstStyle/>
+          <a:p>
+            <a:pPr algn="l" indent="0" marL="0">
+              <a:buNone/>
+            </a:pPr>
+            <a:r>
+              <a:rPr lang="en-US" sz="3200" b="1" dirty="0">
+                <a:solidFill>
+                  <a:srgbClr val="990011"/>
+                </a:solidFill>
+                <a:latin typeface="Times New Roman" pitchFamily="34" charset="0"/>
+                <a:ea typeface="Times New Roman" pitchFamily="34" charset="-122"/>
+                <a:cs typeface="Times New Roman" pitchFamily="34" charset="-120"/>
+              </a:rPr>
+              <a:t>B) Weaknesses</a:t>
+            </a:r>
+            <a:endParaRPr lang="en-US" sz="3200" dirty="0"/>
+          </a:p>
+        </p:txBody>
+      </p:sp>
+      <p:sp>
+        <p:nvSpPr>
+          <p:cNvPr id="6" name="Text 3"/>
+          <p:cNvSpPr/>
+          <p:nvPr/>
+        </p:nvSpPr>
+        <p:spPr>
+          <a:xfrm>
+            <a:off x="4069080" y="2240280"/>
+            <a:ext cx="7802575" cy="4206240"/>
           </a:xfrm>
           <a:prstGeom prst="rect">
             <a:avLst/>
@@ -20104,7 +20262,7 @@
                 <a:ea typeface="Times New Roman" pitchFamily="34" charset="-122"/>
                 <a:cs typeface="Times New Roman" pitchFamily="34" charset="-120"/>
               </a:rPr>
-              <a:t>A high birth rate: </a:t>
+              <a:t>A stage added later: </a:t>
             </a:r>
             <a:pPr algn="l" indent="0" marL="0">
               <a:spcAft>
@@ -20121,7 +20279,7 @@
                 <a:ea typeface="Times New Roman" pitchFamily="34" charset="-122"/>
                 <a:cs typeface="Times New Roman" pitchFamily="34" charset="-120"/>
               </a:rPr>
-              <a:t>The birth rate is still about 35 per 1,000, because of traditions, early marriage and limited family planning. It is falling slowly in the towns.</a:t>
+              <a:t>The original model had only four stages. The fifth stage was added when some countries began to decline, which shows that the model cannot predict the future.</a:t>
             </a:r>
             <a:endParaRPr lang="en-US" sz="4000" dirty="0"/>
           </a:p>
@@ -20239,9 +20397,129 @@
           </a:p>
         </p:txBody>
       </p:sp>
+      <p:sp>
+        <p:nvSpPr>
+          <p:cNvPr id="3" name="Text 1"/>
+          <p:cNvSpPr/>
+          <p:nvPr/>
+        </p:nvSpPr>
+        <p:spPr>
+          <a:xfrm>
+            <a:off x="365760" y="1005840"/>
+            <a:ext cx="11460175" cy="731520"/>
+          </a:xfrm>
+          <a:prstGeom prst="rect">
+            <a:avLst/>
+          </a:prstGeom>
+          <a:noFill/>
+          <a:ln/>
+        </p:spPr>
+        <p:txBody>
+          <a:bodyPr wrap="square" lIns="0" tIns="0" rIns="0" bIns="0" rtlCol="0" anchor="ctr">
+            <a:normAutofit/>
+          </a:bodyPr>
+          <a:lstStyle/>
+          <a:p>
+            <a:pPr algn="ctr" indent="0" marL="0">
+              <a:buNone/>
+            </a:pPr>
+            <a:r>
+              <a:rPr lang="en-US" sz="3600" b="1" dirty="0">
+                <a:solidFill>
+                  <a:srgbClr val="990011"/>
+                </a:solidFill>
+                <a:latin typeface="Times New Roman" pitchFamily="34" charset="0"/>
+                <a:ea typeface="Times New Roman" pitchFamily="34" charset="-122"/>
+                <a:cs typeface="Times New Roman" pitchFamily="34" charset="-120"/>
+              </a:rPr>
+              <a:t>4. Application to Cameroon</a:t>
+            </a:r>
+            <a:endParaRPr lang="en-US" sz="3600" dirty="0"/>
+          </a:p>
+        </p:txBody>
+      </p:sp>
+      <p:sp>
+        <p:nvSpPr>
+          <p:cNvPr id="4" name="Text 2"/>
+          <p:cNvSpPr/>
+          <p:nvPr/>
+        </p:nvSpPr>
+        <p:spPr>
+          <a:xfrm>
+            <a:off x="365760" y="1783080"/>
+            <a:ext cx="6035040" cy="4617720"/>
+          </a:xfrm>
+          <a:prstGeom prst="rect">
+            <a:avLst/>
+          </a:prstGeom>
+          <a:noFill/>
+          <a:ln/>
+        </p:spPr>
+        <p:txBody>
+          <a:bodyPr wrap="square" lIns="0" tIns="0" rIns="0" bIns="0" rtlCol="0" anchor="t"/>
+          <a:lstStyle/>
+          <a:p>
+            <a:pPr algn="l" indent="0" marL="0">
+              <a:spcAft>
+                <a:spcPts val="800"/>
+              </a:spcAft>
+              <a:buNone/>
+            </a:pPr>
+            <a:r>
+              <a:rPr lang="en-US" sz="3600" i="1" dirty="0">
+                <a:solidFill>
+                  <a:srgbClr val="111111"/>
+                </a:solidFill>
+                <a:latin typeface="Times New Roman" pitchFamily="34" charset="0"/>
+                <a:ea typeface="Times New Roman" pitchFamily="34" charset="-122"/>
+                <a:cs typeface="Times New Roman" pitchFamily="34" charset="-120"/>
+              </a:rPr>
+              <a:t>The model applies to Cameroon as follows:</a:t>
+            </a:r>
+            <a:endParaRPr lang="en-US" sz="3600" dirty="0"/>
+          </a:p>
+          <a:p>
+            <a:pPr algn="l" indent="0" marL="0">
+              <a:spcAft>
+                <a:spcPts val="800"/>
+              </a:spcAft>
+              <a:buNone/>
+            </a:pPr>
+            <a:r>
+              <a:rPr lang="en-US" sz="3600" b="1" dirty="0">
+                <a:solidFill>
+                  <a:srgbClr val="111111"/>
+                </a:solidFill>
+                <a:latin typeface="Times New Roman" pitchFamily="34" charset="0"/>
+                <a:ea typeface="Times New Roman" pitchFamily="34" charset="-122"/>
+                <a:cs typeface="Times New Roman" pitchFamily="34" charset="-120"/>
+              </a:rPr>
+              <a:t>Current stage: </a:t>
+            </a:r>
+            <a:pPr algn="l" indent="0" marL="0">
+              <a:spcAft>
+                <a:spcPts val="800"/>
+              </a:spcAft>
+              <a:buNone/>
+            </a:pPr>
+            <a:r>
+              <a:rPr lang="en-US" sz="3600" dirty="0">
+                <a:solidFill>
+                  <a:srgbClr val="111111"/>
+                </a:solidFill>
+                <a:latin typeface="Times New Roman" pitchFamily="34" charset="0"/>
+                <a:ea typeface="Times New Roman" pitchFamily="34" charset="-122"/>
+                <a:cs typeface="Times New Roman" pitchFamily="34" charset="-120"/>
+              </a:rPr>
+              <a:t>Cameroon is at the end of stage 2 and entering stage 3. Its death rate has fallen a lot, and its birth rate is beginning to fall.</a:t>
+            </a:r>
+            <a:endParaRPr lang="en-US" sz="3600" dirty="0"/>
+          </a:p>
+        </p:txBody>
+      </p:sp>
       <p:pic>
         <p:nvPicPr>
-          <p:cNvPr id="3" name="Image 0" descr="/home/claude/f4/img/minesec_sheet.png">    </p:cNvPr>
+          <p:cNvPr id="5" name="Image 0" descr="/home/claude/f4/img/v2/cmr_rates_big.png">    </p:cNvPr>
           <p:cNvPicPr>
             <a:picLocks noChangeAspect="1"/>
           </p:cNvPicPr>
@@ -20255,8 +20533,8 @@
         </p:blipFill>
         <p:spPr>
           <a:xfrm>
-            <a:off x="0" y="658368"/>
-            <a:ext cx="3840480" cy="5833872"/>
+            <a:off x="6537960" y="2721454"/>
+            <a:ext cx="5470855" cy="2393499"/>
           </a:xfrm>
           <a:prstGeom prst="rect">
             <a:avLst/>
@@ -20265,14 +20543,14 @@
       </p:pic>
       <p:sp>
         <p:nvSpPr>
-          <p:cNvPr id="4" name="Text 1"/>
+          <p:cNvPr id="6" name="Text 3"/>
           <p:cNvSpPr/>
           <p:nvPr/>
         </p:nvSpPr>
         <p:spPr>
           <a:xfrm>
-            <a:off x="4069080" y="1005840"/>
-            <a:ext cx="7802575" cy="731520"/>
+            <a:off x="6537960" y="6089904"/>
+            <a:ext cx="5470855" cy="347472"/>
           </a:xfrm>
           <a:prstGeom prst="rect">
             <a:avLst/>
@@ -20281,85 +20559,24 @@
           <a:ln/>
         </p:spPr>
         <p:txBody>
-          <a:bodyPr wrap="square" lIns="0" tIns="0" rIns="0" bIns="0" rtlCol="0" anchor="ctr">
-            <a:normAutofit/>
-          </a:bodyPr>
+          <a:bodyPr wrap="square" lIns="0" tIns="0" rIns="0" bIns="0" rtlCol="0" anchor="ctr"/>
           <a:lstStyle/>
           <a:p>
             <a:pPr algn="ctr" indent="0" marL="0">
               <a:buNone/>
             </a:pPr>
             <a:r>
-              <a:rPr lang="en-US" sz="3600" b="1" dirty="0">
-                <a:solidFill>
-                  <a:srgbClr val="990011"/>
+              <a:rPr lang="en-US" sz="1600" i="1" dirty="0">
+                <a:solidFill>
+                  <a:srgbClr val="555555"/>
                 </a:solidFill>
                 <a:latin typeface="Times New Roman" pitchFamily="34" charset="0"/>
                 <a:ea typeface="Times New Roman" pitchFamily="34" charset="-122"/>
                 <a:cs typeface="Times New Roman" pitchFamily="34" charset="-120"/>
               </a:rPr>
-              <a:t>4. Application to Cameroon</a:t>
-            </a:r>
-            <a:endParaRPr lang="en-US" sz="3600" dirty="0"/>
-          </a:p>
-        </p:txBody>
-      </p:sp>
-      <p:sp>
-        <p:nvSpPr>
-          <p:cNvPr id="5" name="Text 2"/>
-          <p:cNvSpPr/>
-          <p:nvPr/>
-        </p:nvSpPr>
-        <p:spPr>
-          <a:xfrm>
-            <a:off x="4069080" y="1783080"/>
-            <a:ext cx="7802575" cy="4663440"/>
-          </a:xfrm>
-          <a:prstGeom prst="rect">
-            <a:avLst/>
-          </a:prstGeom>
-          <a:noFill/>
-          <a:ln/>
-        </p:spPr>
-        <p:txBody>
-          <a:bodyPr wrap="square" lIns="0" tIns="0" rIns="0" bIns="0" rtlCol="0" anchor="t"/>
-          <a:lstStyle/>
-          <a:p>
-            <a:pPr algn="l" indent="0" marL="0">
-              <a:spcAft>
-                <a:spcPts val="800"/>
-              </a:spcAft>
-              <a:buNone/>
-            </a:pPr>
-            <a:r>
-              <a:rPr lang="en-US" sz="4000" b="1" dirty="0">
-                <a:solidFill>
-                  <a:srgbClr val="111111"/>
-                </a:solidFill>
-                <a:latin typeface="Times New Roman" pitchFamily="34" charset="0"/>
-                <a:ea typeface="Times New Roman" pitchFamily="34" charset="-122"/>
-                <a:cs typeface="Times New Roman" pitchFamily="34" charset="-120"/>
-              </a:rPr>
-              <a:t>A low death rate and rapid growth: </a:t>
-            </a:r>
-            <a:pPr algn="l" indent="0" marL="0">
-              <a:spcAft>
-                <a:spcPts val="800"/>
-              </a:spcAft>
-              <a:buNone/>
-            </a:pPr>
-            <a:r>
-              <a:rPr lang="en-US" sz="4000" dirty="0">
-                <a:solidFill>
-                  <a:srgbClr val="111111"/>
-                </a:solidFill>
-                <a:latin typeface="Times New Roman" pitchFamily="34" charset="0"/>
-                <a:ea typeface="Times New Roman" pitchFamily="34" charset="-122"/>
-                <a:cs typeface="Times New Roman" pitchFamily="34" charset="-120"/>
-              </a:rPr>
-              <a:t>The death rate is now about 8 per 1,000 thanks to vaccination, health posts and boreholes. The gap between births and deaths gives a growth of about 2.6 % a year.</a:t>
-            </a:r>
-            <a:endParaRPr lang="en-US" sz="4000" dirty="0"/>
+              <a:t>Illustration: birth and death rates of Cameroon</a:t>
+            </a:r>
+            <a:endParaRPr lang="en-US" sz="1600" dirty="0"/>
           </a:p>
         </p:txBody>
       </p:sp>
@@ -20576,7 +20793,7 @@
                 <a:ea typeface="Times New Roman" pitchFamily="34" charset="-122"/>
                 <a:cs typeface="Times New Roman" pitchFamily="34" charset="-120"/>
               </a:rPr>
-              <a:t>Future: </a:t>
+              <a:t>A high birth rate: </a:t>
             </a:r>
             <a:pPr algn="l" indent="0" marL="0">
               <a:spcAft>
@@ -20593,7 +20810,7 @@
                 <a:ea typeface="Times New Roman" pitchFamily="34" charset="-122"/>
                 <a:cs typeface="Times New Roman" pitchFamily="34" charset="-120"/>
               </a:rPr>
-              <a:t>With more education for girls and better health care, births should fall further. Growth should then slow down as Cameroon moves through stage 3.</a:t>
+              <a:t>The birth rate is still about 35 per 1,000, because of traditions, early marriage and limited family planning. It is falling slowly in the towns.</a:t>
             </a:r>
             <a:endParaRPr lang="en-US" sz="4000" dirty="0"/>
           </a:p>
@@ -20705,7 +20922,7 @@
                 <a:ea typeface="Calibri" pitchFamily="34" charset="-122"/>
                 <a:cs typeface="Calibri" pitchFamily="34" charset="-120"/>
               </a:rPr>
-              <a:t>FORMATIVE EVALUATION</a:t>
+              <a:t>BOARD SUMMARY</a:t>
             </a:r>
             <a:endParaRPr lang="en-US" sz="1400" dirty="0"/>
           </a:p>
@@ -20728,7 +20945,7 @@
         <p:spPr>
           <a:xfrm>
             <a:off x="0" y="658368"/>
-            <a:ext cx="5120640" cy="5833872"/>
+            <a:ext cx="3840480" cy="5833872"/>
           </a:xfrm>
           <a:prstGeom prst="rect">
             <a:avLst/>
@@ -20743,8 +20960,8 @@
         </p:nvSpPr>
         <p:spPr>
           <a:xfrm>
-            <a:off x="5349240" y="1005840"/>
-            <a:ext cx="6522415" cy="731520"/>
+            <a:off x="4069080" y="1005840"/>
+            <a:ext cx="7802575" cy="731520"/>
           </a:xfrm>
           <a:prstGeom prst="rect">
             <a:avLst/>
@@ -20770,7 +20987,7 @@
                 <a:ea typeface="Times New Roman" pitchFamily="34" charset="-122"/>
                 <a:cs typeface="Times New Roman" pitchFamily="34" charset="-120"/>
               </a:rPr>
-              <a:t>Evaluation 1</a:t>
+              <a:t>4. Application to Cameroon</a:t>
             </a:r>
             <a:endParaRPr lang="en-US" sz="3600" dirty="0"/>
           </a:p>
@@ -20784,8 +21001,8 @@
         </p:nvSpPr>
         <p:spPr>
           <a:xfrm>
-            <a:off x="5349240" y="1783080"/>
-            <a:ext cx="6522415" cy="4663440"/>
+            <a:off x="4069080" y="1783080"/>
+            <a:ext cx="7802575" cy="4663440"/>
           </a:xfrm>
           <a:prstGeom prst="rect">
             <a:avLst/>
@@ -20804,7 +21021,7 @@
               <a:buNone/>
             </a:pPr>
             <a:r>
-              <a:rPr lang="en-US" sz="4000" dirty="0">
+              <a:rPr lang="en-US" sz="4000" b="1" dirty="0">
                 <a:solidFill>
                   <a:srgbClr val="111111"/>
                 </a:solidFill>
@@ -20812,7 +21029,24 @@
                 <a:ea typeface="Times New Roman" pitchFamily="34" charset="-122"/>
                 <a:cs typeface="Times New Roman" pitchFamily="34" charset="-120"/>
               </a:rPr>
-              <a:t>Describe Stage 2 of the demographic transition model.</a:t>
+              <a:t>A low death rate and rapid growth: </a:t>
+            </a:r>
+            <a:pPr algn="l" indent="0" marL="0">
+              <a:spcAft>
+                <a:spcPts val="800"/>
+              </a:spcAft>
+              <a:buNone/>
+            </a:pPr>
+            <a:r>
+              <a:rPr lang="en-US" sz="4000" dirty="0">
+                <a:solidFill>
+                  <a:srgbClr val="111111"/>
+                </a:solidFill>
+                <a:latin typeface="Times New Roman" pitchFamily="34" charset="0"/>
+                <a:ea typeface="Times New Roman" pitchFamily="34" charset="-122"/>
+                <a:cs typeface="Times New Roman" pitchFamily="34" charset="-120"/>
+              </a:rPr>
+              <a:t>The death rate is now about 8 per 1,000 thanks to vaccination, health posts and boreholes. The gap between births and deaths gives a growth of about 2.6 % a year.</a:t>
             </a:r>
             <a:endParaRPr lang="en-US" sz="4000" dirty="0"/>
           </a:p>
@@ -20924,7 +21158,7 @@
                 <a:ea typeface="Calibri" pitchFamily="34" charset="-122"/>
                 <a:cs typeface="Calibri" pitchFamily="34" charset="-120"/>
               </a:rPr>
-              <a:t>FORMATIVE EVALUATION</a:t>
+              <a:t>BOARD SUMMARY</a:t>
             </a:r>
             <a:endParaRPr lang="en-US" sz="1400" dirty="0"/>
           </a:p>
@@ -20989,7 +21223,7 @@
                 <a:ea typeface="Times New Roman" pitchFamily="34" charset="-122"/>
                 <a:cs typeface="Times New Roman" pitchFamily="34" charset="-120"/>
               </a:rPr>
-              <a:t>Expected Answer</a:t>
+              <a:t>4. Application to Cameroon</a:t>
             </a:r>
             <a:endParaRPr lang="en-US" sz="3600" dirty="0"/>
           </a:p>
@@ -21023,7 +21257,7 @@
               <a:buNone/>
             </a:pPr>
             <a:r>
-              <a:rPr lang="en-US" sz="4000" dirty="0">
+              <a:rPr lang="en-US" sz="4000" b="1" dirty="0">
                 <a:solidFill>
                   <a:srgbClr val="111111"/>
                 </a:solidFill>
@@ -21031,7 +21265,24 @@
                 <a:ea typeface="Times New Roman" pitchFamily="34" charset="-122"/>
                 <a:cs typeface="Times New Roman" pitchFamily="34" charset="-120"/>
               </a:rPr>
-              <a:t>Death rates fall quickly while birth rates remain high, so the population grows very fast.</a:t>
+              <a:t>Future: </a:t>
+            </a:r>
+            <a:pPr algn="l" indent="0" marL="0">
+              <a:spcAft>
+                <a:spcPts val="800"/>
+              </a:spcAft>
+              <a:buNone/>
+            </a:pPr>
+            <a:r>
+              <a:rPr lang="en-US" sz="4000" dirty="0">
+                <a:solidFill>
+                  <a:srgbClr val="111111"/>
+                </a:solidFill>
+                <a:latin typeface="Times New Roman" pitchFamily="34" charset="0"/>
+                <a:ea typeface="Times New Roman" pitchFamily="34" charset="-122"/>
+                <a:cs typeface="Times New Roman" pitchFamily="34" charset="-120"/>
+              </a:rPr>
+              <a:t>With more education for girls and better health care, births should fall further. Growth should then slow down as Cameroon moves through stage 3.</a:t>
             </a:r>
             <a:endParaRPr lang="en-US" sz="4000" dirty="0"/>
           </a:p>
@@ -21208,7 +21459,7 @@
                 <a:ea typeface="Times New Roman" pitchFamily="34" charset="-122"/>
                 <a:cs typeface="Times New Roman" pitchFamily="34" charset="-120"/>
               </a:rPr>
-              <a:t>Evaluation 2</a:t>
+              <a:t>Evaluation 1</a:t>
             </a:r>
             <a:endParaRPr lang="en-US" sz="3600" dirty="0"/>
           </a:p>
@@ -21250,7 +21501,7 @@
                 <a:ea typeface="Times New Roman" pitchFamily="34" charset="-122"/>
                 <a:cs typeface="Times New Roman" pitchFamily="34" charset="-120"/>
               </a:rPr>
-              <a:t>Give two weaknesses of the demographic transition model.</a:t>
+              <a:t>Describe Stage 2 of the demographic transition model.</a:t>
             </a:r>
             <a:endParaRPr lang="en-US" sz="4000" dirty="0"/>
           </a:p>
@@ -21469,7 +21720,7 @@
                 <a:ea typeface="Times New Roman" pitchFamily="34" charset="-122"/>
                 <a:cs typeface="Times New Roman" pitchFamily="34" charset="-120"/>
               </a:rPr>
-              <a:t>It is Eurocentric; it ignores wars, epidemics, migration and policies; countries move at different speeds (any two).</a:t>
+              <a:t>Death rates fall quickly while birth rates remain high, so the population grows very fast.</a:t>
             </a:r>
             <a:endParaRPr lang="en-US" sz="4000" dirty="0"/>
           </a:p>
@@ -21581,7 +21832,7 @@
                 <a:ea typeface="Calibri" pitchFamily="34" charset="-122"/>
                 <a:cs typeface="Calibri" pitchFamily="34" charset="-120"/>
               </a:rPr>
-              <a:t>REMEDIATION</a:t>
+              <a:t>FORMATIVE EVALUATION</a:t>
             </a:r>
             <a:endParaRPr lang="en-US" sz="1400" dirty="0"/>
           </a:p>
@@ -21604,7 +21855,7 @@
         <p:spPr>
           <a:xfrm>
             <a:off x="0" y="658368"/>
-            <a:ext cx="3840480" cy="5833872"/>
+            <a:ext cx="5120640" cy="5833872"/>
           </a:xfrm>
           <a:prstGeom prst="rect">
             <a:avLst/>
@@ -21619,8 +21870,8 @@
         </p:nvSpPr>
         <p:spPr>
           <a:xfrm>
-            <a:off x="4069080" y="1005840"/>
-            <a:ext cx="7802575" cy="731520"/>
+            <a:off x="5349240" y="1005840"/>
+            <a:ext cx="6522415" cy="731520"/>
           </a:xfrm>
           <a:prstGeom prst="rect">
             <a:avLst/>
@@ -21646,7 +21897,7 @@
                 <a:ea typeface="Times New Roman" pitchFamily="34" charset="-122"/>
                 <a:cs typeface="Times New Roman" pitchFamily="34" charset="-120"/>
               </a:rPr>
-              <a:t>Remediation</a:t>
+              <a:t>Evaluation 2</a:t>
             </a:r>
             <a:endParaRPr lang="en-US" sz="3600" dirty="0"/>
           </a:p>
@@ -21660,8 +21911,8 @@
         </p:nvSpPr>
         <p:spPr>
           <a:xfrm>
-            <a:off x="4069080" y="1783080"/>
-            <a:ext cx="7802575" cy="4663440"/>
+            <a:off x="5349240" y="1783080"/>
+            <a:ext cx="6522415" cy="4663440"/>
           </a:xfrm>
           <a:prstGeom prst="rect">
             <a:avLst/>
@@ -21680,7 +21931,7 @@
               <a:buNone/>
             </a:pPr>
             <a:r>
-              <a:rPr lang="en-US" sz="4000" b="1" dirty="0">
+              <a:rPr lang="en-US" sz="4000" dirty="0">
                 <a:solidFill>
                   <a:srgbClr val="111111"/>
                 </a:solidFill>
@@ -21688,73 +21939,7 @@
                 <a:ea typeface="Times New Roman" pitchFamily="34" charset="-122"/>
                 <a:cs typeface="Times New Roman" pitchFamily="34" charset="-120"/>
               </a:rPr>
-              <a:t>Fill in the blanks:</a:t>
-            </a:r>
-            <a:endParaRPr lang="en-US" sz="4000" dirty="0"/>
-          </a:p>
-          <a:p>
-            <a:pPr algn="l" marL="342900" indent="-342900">
-              <a:spcAft>
-                <a:spcPts val="800"/>
-              </a:spcAft>
-              <a:buSzPct val="100000"/>
-              <a:buFont typeface="+mj-lt"/>
-              <a:buAutoNum type="arabicPeriod" startAt="1"/>
-            </a:pPr>
-            <a:r>
-              <a:rPr lang="en-US" sz="4000" dirty="0">
-                <a:solidFill>
-                  <a:srgbClr val="111111"/>
-                </a:solidFill>
-                <a:latin typeface="Times New Roman" pitchFamily="34" charset="0"/>
-                <a:ea typeface="Times New Roman" pitchFamily="34" charset="-122"/>
-                <a:cs typeface="Times New Roman" pitchFamily="34" charset="-120"/>
-              </a:rPr>
-              <a:t>In Stage 1, birth and death rates are both ______.</a:t>
-            </a:r>
-            <a:endParaRPr lang="en-US" sz="4000" dirty="0"/>
-          </a:p>
-          <a:p>
-            <a:pPr algn="l" marL="342900" indent="-342900">
-              <a:spcAft>
-                <a:spcPts val="800"/>
-              </a:spcAft>
-              <a:buSzPct val="100000"/>
-              <a:buFont typeface="+mj-lt"/>
-              <a:buAutoNum type="arabicPeriod" startAt="1"/>
-            </a:pPr>
-            <a:r>
-              <a:rPr lang="en-US" sz="4000" dirty="0">
-                <a:solidFill>
-                  <a:srgbClr val="111111"/>
-                </a:solidFill>
-                <a:latin typeface="Times New Roman" pitchFamily="34" charset="0"/>
-                <a:ea typeface="Times New Roman" pitchFamily="34" charset="-122"/>
-                <a:cs typeface="Times New Roman" pitchFamily="34" charset="-120"/>
-              </a:rPr>
-              <a:t>Japan is in Stage ______.</a:t>
-            </a:r>
-            <a:endParaRPr lang="en-US" sz="4000" dirty="0"/>
-          </a:p>
-          <a:p>
-            <a:pPr algn="l" marL="342900" indent="-342900">
-              <a:spcAft>
-                <a:spcPts val="800"/>
-              </a:spcAft>
-              <a:buSzPct val="100000"/>
-              <a:buFont typeface="+mj-lt"/>
-              <a:buAutoNum type="arabicPeriod" startAt="1"/>
-            </a:pPr>
-            <a:r>
-              <a:rPr lang="en-US" sz="4000" dirty="0">
-                <a:solidFill>
-                  <a:srgbClr val="111111"/>
-                </a:solidFill>
-                <a:latin typeface="Times New Roman" pitchFamily="34" charset="0"/>
-                <a:ea typeface="Times New Roman" pitchFamily="34" charset="-122"/>
-                <a:cs typeface="Times New Roman" pitchFamily="34" charset="-120"/>
-              </a:rPr>
-              <a:t>Cameroon is entering Stage ______.</a:t>
+              <a:t>Give two weaknesses of the demographic transition model.</a:t>
             </a:r>
             <a:endParaRPr lang="en-US" sz="4000" dirty="0"/>
           </a:p>
@@ -22197,7 +22382,7 @@
                 <a:ea typeface="Calibri" pitchFamily="34" charset="-122"/>
                 <a:cs typeface="Calibri" pitchFamily="34" charset="-120"/>
               </a:rPr>
-              <a:t>HOMEWORK</a:t>
+              <a:t>FORMATIVE EVALUATION</a:t>
             </a:r>
             <a:endParaRPr lang="en-US" sz="1400" dirty="0"/>
           </a:p>
@@ -22262,7 +22447,7 @@
                 <a:ea typeface="Times New Roman" pitchFamily="34" charset="-122"/>
                 <a:cs typeface="Times New Roman" pitchFamily="34" charset="-120"/>
               </a:rPr>
-              <a:t>Homework</a:t>
+              <a:t>Expected Answer</a:t>
             </a:r>
             <a:endParaRPr lang="en-US" sz="3600" dirty="0"/>
           </a:p>
@@ -22304,7 +22489,7 @@
                 <a:ea typeface="Times New Roman" pitchFamily="34" charset="-122"/>
                 <a:cs typeface="Times New Roman" pitchFamily="34" charset="-120"/>
               </a:rPr>
-              <a:t>Define migration.</a:t>
+              <a:t>It is Eurocentric; it ignores wars, epidemics, migration and policies; countries move at different speeds (any two).</a:t>
             </a:r>
             <a:endParaRPr lang="en-US" sz="4000" dirty="0"/>
           </a:p>
@@ -22416,7 +22601,7 @@
                 <a:ea typeface="Calibri" pitchFamily="34" charset="-122"/>
                 <a:cs typeface="Calibri" pitchFamily="34" charset="-120"/>
               </a:rPr>
-              <a:t>NEXT LESSON</a:t>
+              <a:t>REMEDIATION</a:t>
             </a:r>
             <a:endParaRPr lang="en-US" sz="1400" dirty="0"/>
           </a:p>
@@ -22439,7 +22624,7 @@
         <p:spPr>
           <a:xfrm>
             <a:off x="0" y="658368"/>
-            <a:ext cx="5120640" cy="5833872"/>
+            <a:ext cx="3840480" cy="5833872"/>
           </a:xfrm>
           <a:prstGeom prst="rect">
             <a:avLst/>
@@ -22454,8 +22639,8 @@
         </p:nvSpPr>
         <p:spPr>
           <a:xfrm>
-            <a:off x="5349240" y="1005840"/>
-            <a:ext cx="6522415" cy="731520"/>
+            <a:off x="4069080" y="1005840"/>
+            <a:ext cx="7802575" cy="731520"/>
           </a:xfrm>
           <a:prstGeom prst="rect">
             <a:avLst/>
@@ -22481,7 +22666,7 @@
                 <a:ea typeface="Times New Roman" pitchFamily="34" charset="-122"/>
                 <a:cs typeface="Times New Roman" pitchFamily="34" charset="-120"/>
               </a:rPr>
-              <a:t>Next Lesson</a:t>
+              <a:t>Remediation</a:t>
             </a:r>
             <a:endParaRPr lang="en-US" sz="3600" dirty="0"/>
           </a:p>
@@ -22495,8 +22680,8 @@
         </p:nvSpPr>
         <p:spPr>
           <a:xfrm>
-            <a:off x="5349240" y="1783080"/>
-            <a:ext cx="6522415" cy="4663440"/>
+            <a:off x="4069080" y="1783080"/>
+            <a:ext cx="7802575" cy="4663440"/>
           </a:xfrm>
           <a:prstGeom prst="rect">
             <a:avLst/>
@@ -22505,10 +22690,10 @@
           <a:ln/>
         </p:spPr>
         <p:txBody>
-          <a:bodyPr wrap="square" lIns="0" tIns="0" rIns="0" bIns="0" rtlCol="0" anchor="ctr"/>
-          <a:lstStyle/>
-          <a:p>
-            <a:pPr algn="ctr" indent="0" marL="0">
+          <a:bodyPr wrap="square" lIns="0" tIns="0" rIns="0" bIns="0" rtlCol="0" anchor="t"/>
+          <a:lstStyle/>
+          <a:p>
+            <a:pPr algn="l" indent="0" marL="0">
               <a:spcAft>
                 <a:spcPts val="800"/>
               </a:spcAft>
@@ -22523,27 +22708,73 @@
                 <a:ea typeface="Times New Roman" pitchFamily="34" charset="-122"/>
                 <a:cs typeface="Times New Roman" pitchFamily="34" charset="-120"/>
               </a:rPr>
-              <a:t>Our next lesson will be on:</a:t>
+              <a:t>Fill in the blanks:</a:t>
             </a:r>
             <a:endParaRPr lang="en-US" sz="4000" dirty="0"/>
           </a:p>
           <a:p>
-            <a:pPr algn="ctr" indent="0" marL="0">
+            <a:pPr algn="l" marL="342900" indent="-342900">
               <a:spcAft>
                 <a:spcPts val="800"/>
               </a:spcAft>
-              <a:buNone/>
-            </a:pPr>
-            <a:r>
-              <a:rPr lang="en-US" sz="4000" b="1" dirty="0">
-                <a:solidFill>
-                  <a:srgbClr val="990011"/>
+              <a:buSzPct val="100000"/>
+              <a:buFont typeface="+mj-lt"/>
+              <a:buAutoNum type="arabicPeriod" startAt="1"/>
+            </a:pPr>
+            <a:r>
+              <a:rPr lang="en-US" sz="4000" dirty="0">
+                <a:solidFill>
+                  <a:srgbClr val="111111"/>
                 </a:solidFill>
                 <a:latin typeface="Times New Roman" pitchFamily="34" charset="0"/>
                 <a:ea typeface="Times New Roman" pitchFamily="34" charset="-122"/>
                 <a:cs typeface="Times New Roman" pitchFamily="34" charset="-120"/>
               </a:rPr>
-              <a:t>Lesson 13: Migration: Characteristics, Laws and Models</a:t>
+              <a:t>In Stage 1, birth and death rates are both ______.</a:t>
+            </a:r>
+            <a:endParaRPr lang="en-US" sz="4000" dirty="0"/>
+          </a:p>
+          <a:p>
+            <a:pPr algn="l" marL="342900" indent="-342900">
+              <a:spcAft>
+                <a:spcPts val="800"/>
+              </a:spcAft>
+              <a:buSzPct val="100000"/>
+              <a:buFont typeface="+mj-lt"/>
+              <a:buAutoNum type="arabicPeriod" startAt="1"/>
+            </a:pPr>
+            <a:r>
+              <a:rPr lang="en-US" sz="4000" dirty="0">
+                <a:solidFill>
+                  <a:srgbClr val="111111"/>
+                </a:solidFill>
+                <a:latin typeface="Times New Roman" pitchFamily="34" charset="0"/>
+                <a:ea typeface="Times New Roman" pitchFamily="34" charset="-122"/>
+                <a:cs typeface="Times New Roman" pitchFamily="34" charset="-120"/>
+              </a:rPr>
+              <a:t>Japan is in Stage ______.</a:t>
+            </a:r>
+            <a:endParaRPr lang="en-US" sz="4000" dirty="0"/>
+          </a:p>
+          <a:p>
+            <a:pPr algn="l" marL="342900" indent="-342900">
+              <a:spcAft>
+                <a:spcPts val="800"/>
+              </a:spcAft>
+              <a:buSzPct val="100000"/>
+              <a:buFont typeface="+mj-lt"/>
+              <a:buAutoNum type="arabicPeriod" startAt="1"/>
+            </a:pPr>
+            <a:r>
+              <a:rPr lang="en-US" sz="4000" dirty="0">
+                <a:solidFill>
+                  <a:srgbClr val="111111"/>
+                </a:solidFill>
+                <a:latin typeface="Times New Roman" pitchFamily="34" charset="0"/>
+                <a:ea typeface="Times New Roman" pitchFamily="34" charset="-122"/>
+                <a:cs typeface="Times New Roman" pitchFamily="34" charset="-120"/>
+              </a:rPr>
+              <a:t>Cameroon is entering Stage ______.</a:t>
             </a:r>
             <a:endParaRPr lang="en-US" sz="4000" dirty="0"/>
           </a:p>
@@ -22655,22 +22886,46 @@
                 <a:ea typeface="Calibri" pitchFamily="34" charset="-122"/>
                 <a:cs typeface="Calibri" pitchFamily="34" charset="-120"/>
               </a:rPr>
-              <a:t>BILINGUAL GAME</a:t>
+              <a:t>HOMEWORK</a:t>
             </a:r>
             <a:endParaRPr lang="en-US" sz="1400" dirty="0"/>
           </a:p>
         </p:txBody>
       </p:sp>
-      <p:sp>
-        <p:nvSpPr>
-          <p:cNvPr id="3" name="Text 1"/>
+      <p:pic>
+        <p:nvPicPr>
+          <p:cNvPr id="3" name="Image 0" descr="/home/claude/f4/img/minesec_sheet.png">    </p:cNvPr>
+          <p:cNvPicPr>
+            <a:picLocks noChangeAspect="1"/>
+          </p:cNvPicPr>
+          <p:nvPr/>
+        </p:nvPicPr>
+        <p:blipFill>
+          <a:blip r:embed="rId1"/>
+          <a:stretch>
+            <a:fillRect/>
+          </a:stretch>
+        </p:blipFill>
+        <p:spPr>
+          <a:xfrm>
+            <a:off x="0" y="658368"/>
+            <a:ext cx="5120640" cy="5833872"/>
+          </a:xfrm>
+          <a:prstGeom prst="rect">
+            <a:avLst/>
+          </a:prstGeom>
+        </p:spPr>
+      </p:pic>
+      <p:sp>
+        <p:nvSpPr>
+          <p:cNvPr id="4" name="Text 1"/>
           <p:cNvSpPr/>
           <p:nvPr/>
         </p:nvSpPr>
         <p:spPr>
           <a:xfrm>
-            <a:off x="457200" y="1005840"/>
-            <a:ext cx="11277295" cy="731520"/>
+            <a:off x="5349240" y="1005840"/>
+            <a:ext cx="6522415" cy="731520"/>
           </a:xfrm>
           <a:prstGeom prst="rect">
             <a:avLst/>
@@ -22679,7 +22934,9 @@
           <a:ln/>
         </p:spPr>
         <p:txBody>
-          <a:bodyPr wrap="square" lIns="0" tIns="0" rIns="0" bIns="0" rtlCol="0" anchor="ctr"/>
+          <a:bodyPr wrap="square" lIns="0" tIns="0" rIns="0" bIns="0" rtlCol="0" anchor="ctr">
+            <a:normAutofit/>
+          </a:bodyPr>
           <a:lstStyle/>
           <a:p>
             <a:pPr algn="ctr" indent="0" marL="0">
@@ -22694,6 +22951,438 @@
                 <a:ea typeface="Times New Roman" pitchFamily="34" charset="-122"/>
                 <a:cs typeface="Times New Roman" pitchFamily="34" charset="-120"/>
               </a:rPr>
+              <a:t>Homework</a:t>
+            </a:r>
+            <a:endParaRPr lang="en-US" sz="3600" dirty="0"/>
+          </a:p>
+        </p:txBody>
+      </p:sp>
+      <p:sp>
+        <p:nvSpPr>
+          <p:cNvPr id="5" name="Text 2"/>
+          <p:cNvSpPr/>
+          <p:nvPr/>
+        </p:nvSpPr>
+        <p:spPr>
+          <a:xfrm>
+            <a:off x="5349240" y="1783080"/>
+            <a:ext cx="6522415" cy="4663440"/>
+          </a:xfrm>
+          <a:prstGeom prst="rect">
+            <a:avLst/>
+          </a:prstGeom>
+          <a:noFill/>
+          <a:ln/>
+        </p:spPr>
+        <p:txBody>
+          <a:bodyPr wrap="square" lIns="0" tIns="0" rIns="0" bIns="0" rtlCol="0" anchor="t"/>
+          <a:lstStyle/>
+          <a:p>
+            <a:pPr algn="l" indent="0" marL="0">
+              <a:spcAft>
+                <a:spcPts val="800"/>
+              </a:spcAft>
+              <a:buNone/>
+            </a:pPr>
+            <a:r>
+              <a:rPr lang="en-US" sz="4000" dirty="0">
+                <a:solidFill>
+                  <a:srgbClr val="111111"/>
+                </a:solidFill>
+                <a:latin typeface="Times New Roman" pitchFamily="34" charset="0"/>
+                <a:ea typeface="Times New Roman" pitchFamily="34" charset="-122"/>
+                <a:cs typeface="Times New Roman" pitchFamily="34" charset="-120"/>
+              </a:rPr>
+              <a:t>Define migration.</a:t>
+            </a:r>
+            <a:endParaRPr lang="en-US" sz="4000" dirty="0"/>
+          </a:p>
+        </p:txBody>
+      </p:sp>
+      <p:sp>
+        <p:nvSpPr>
+          <p:cNvPr id="25" name="Slide Number Placeholder 0"/>
+          <p:cNvSpPr>
+            <a:spLocks noGrp="1"/>
+          </p:cNvSpPr>
+          <p:nvPr>
+            <p:ph type="sldNum" sz="quarter" idx="4294967295"/>
+          </p:nvPr>
+        </p:nvSpPr>
+        <p:spPr>
+          <a:xfrm>
+            <a:off x="27432" y="91440"/>
+            <a:ext cx="585216" cy="475488"/>
+          </a:xfrm>
+          <a:prstGeom prst="rect">
+            <a:avLst/>
+          </a:prstGeom>
+          <a:extLst>
+            <a:ext uri="{C572A759-6A51-4108-AA02-DFA0A04FC94B}">
+              <ma14:wrappingTextBoxFlag xmlns:ma14="http://schemas.microsoft.com/office/mac/drawingml/2011/main" val="0"/>
+            </a:ext>
+          </a:extLst>
+        </p:spPr>
+        <p:txBody>
+          <a:bodyPr/>
+          <a:lstStyle>
+            <a:lvl1pPr>
+              <a:defRPr sz="2000">
+                <a:solidFill>
+                  <a:srgbClr val="FFFFFF"/>
+                </a:solidFill>
+                <a:latin typeface="Calibri"/>
+                <a:ea typeface="Calibri"/>
+                <a:cs typeface="Calibri"/>
+              </a:defRPr>
+            </a:lvl1pPr>
+          </a:lstStyle>
+          <a:p>
+            <a:pPr algn="ctr"/>
+            <a:fld id="{F7021451-1387-4CA6-816F-3879F97B5CBC}" type="slidenum">
+              <a:rPr b="1" lang="en-US"/>
+              <a:t>62</a:t>
+            </a:fld>
+            <a:endParaRPr lang="en-US"/>
+          </a:p>
+        </p:txBody>
+      </p:sp>
+    </p:spTree>
+  </p:cSld>
+  <p:clrMapOvr>
+    <a:masterClrMapping/>
+  </p:clrMapOvr>
+</p:sld>
+</file>
+
+<file path=ppt/slides/slide63.xml><?xml version="1.0" encoding="utf-8"?>
+<p:sld xmlns:a="http://schemas.openxmlformats.org/drawingml/2006/main" xmlns:r="http://schemas.openxmlformats.org/officeDocument/2006/relationships" xmlns:p="http://schemas.openxmlformats.org/presentationml/2006/main">
+  <p:cSld name="Slide 63">
+    <p:spTree>
+      <p:nvGrpSpPr>
+        <p:cNvPr id="1" name=""/>
+        <p:cNvGrpSpPr/>
+        <p:nvPr/>
+      </p:nvGrpSpPr>
+      <p:grpSpPr>
+        <a:xfrm>
+          <a:off x="0" y="0"/>
+          <a:ext cx="0" cy="0"/>
+          <a:chOff x="0" y="0"/>
+          <a:chExt cx="0" cy="0"/>
+        </a:xfrm>
+      </p:grpSpPr>
+      <p:sp>
+        <p:nvSpPr>
+          <p:cNvPr id="2" name="Text 0"/>
+          <p:cNvSpPr/>
+          <p:nvPr/>
+        </p:nvSpPr>
+        <p:spPr>
+          <a:xfrm>
+            <a:off x="457200" y="713232"/>
+            <a:ext cx="11368735" cy="274320"/>
+          </a:xfrm>
+          <a:prstGeom prst="rect">
+            <a:avLst/>
+          </a:prstGeom>
+          <a:noFill/>
+          <a:ln/>
+        </p:spPr>
+        <p:txBody>
+          <a:bodyPr wrap="square" lIns="0" tIns="0" rIns="0" bIns="0" rtlCol="0" anchor="ctr"/>
+          <a:lstStyle/>
+          <a:p>
+            <a:pPr algn="r" indent="0" marL="0">
+              <a:buNone/>
+            </a:pPr>
+            <a:r>
+              <a:rPr lang="en-US" sz="1400" b="1" dirty="0">
+                <a:solidFill>
+                  <a:srgbClr val="1C3F6E"/>
+                </a:solidFill>
+                <a:latin typeface="Calibri" pitchFamily="34" charset="0"/>
+                <a:ea typeface="Calibri" pitchFamily="34" charset="-122"/>
+                <a:cs typeface="Calibri" pitchFamily="34" charset="-120"/>
+              </a:rPr>
+              <a:t>NEXT LESSON</a:t>
+            </a:r>
+            <a:endParaRPr lang="en-US" sz="1400" dirty="0"/>
+          </a:p>
+        </p:txBody>
+      </p:sp>
+      <p:pic>
+        <p:nvPicPr>
+          <p:cNvPr id="3" name="Image 0" descr="/home/claude/f4/img/minesec_sheet.png">    </p:cNvPr>
+          <p:cNvPicPr>
+            <a:picLocks noChangeAspect="1"/>
+          </p:cNvPicPr>
+          <p:nvPr/>
+        </p:nvPicPr>
+        <p:blipFill>
+          <a:blip r:embed="rId1"/>
+          <a:stretch>
+            <a:fillRect/>
+          </a:stretch>
+        </p:blipFill>
+        <p:spPr>
+          <a:xfrm>
+            <a:off x="0" y="658368"/>
+            <a:ext cx="5120640" cy="5833872"/>
+          </a:xfrm>
+          <a:prstGeom prst="rect">
+            <a:avLst/>
+          </a:prstGeom>
+        </p:spPr>
+      </p:pic>
+      <p:sp>
+        <p:nvSpPr>
+          <p:cNvPr id="4" name="Text 1"/>
+          <p:cNvSpPr/>
+          <p:nvPr/>
+        </p:nvSpPr>
+        <p:spPr>
+          <a:xfrm>
+            <a:off x="5349240" y="1005840"/>
+            <a:ext cx="6522415" cy="731520"/>
+          </a:xfrm>
+          <a:prstGeom prst="rect">
+            <a:avLst/>
+          </a:prstGeom>
+          <a:noFill/>
+          <a:ln/>
+        </p:spPr>
+        <p:txBody>
+          <a:bodyPr wrap="square" lIns="0" tIns="0" rIns="0" bIns="0" rtlCol="0" anchor="ctr">
+            <a:normAutofit/>
+          </a:bodyPr>
+          <a:lstStyle/>
+          <a:p>
+            <a:pPr algn="ctr" indent="0" marL="0">
+              <a:buNone/>
+            </a:pPr>
+            <a:r>
+              <a:rPr lang="en-US" sz="3600" b="1" dirty="0">
+                <a:solidFill>
+                  <a:srgbClr val="990011"/>
+                </a:solidFill>
+                <a:latin typeface="Times New Roman" pitchFamily="34" charset="0"/>
+                <a:ea typeface="Times New Roman" pitchFamily="34" charset="-122"/>
+                <a:cs typeface="Times New Roman" pitchFamily="34" charset="-120"/>
+              </a:rPr>
+              <a:t>Next Lesson</a:t>
+            </a:r>
+            <a:endParaRPr lang="en-US" sz="3600" dirty="0"/>
+          </a:p>
+        </p:txBody>
+      </p:sp>
+      <p:sp>
+        <p:nvSpPr>
+          <p:cNvPr id="5" name="Text 2"/>
+          <p:cNvSpPr/>
+          <p:nvPr/>
+        </p:nvSpPr>
+        <p:spPr>
+          <a:xfrm>
+            <a:off x="5349240" y="1783080"/>
+            <a:ext cx="6522415" cy="4663440"/>
+          </a:xfrm>
+          <a:prstGeom prst="rect">
+            <a:avLst/>
+          </a:prstGeom>
+          <a:noFill/>
+          <a:ln/>
+        </p:spPr>
+        <p:txBody>
+          <a:bodyPr wrap="square" lIns="0" tIns="0" rIns="0" bIns="0" rtlCol="0" anchor="ctr"/>
+          <a:lstStyle/>
+          <a:p>
+            <a:pPr algn="ctr" indent="0" marL="0">
+              <a:spcAft>
+                <a:spcPts val="800"/>
+              </a:spcAft>
+              <a:buNone/>
+            </a:pPr>
+            <a:r>
+              <a:rPr lang="en-US" sz="4000" b="1" dirty="0">
+                <a:solidFill>
+                  <a:srgbClr val="111111"/>
+                </a:solidFill>
+                <a:latin typeface="Times New Roman" pitchFamily="34" charset="0"/>
+                <a:ea typeface="Times New Roman" pitchFamily="34" charset="-122"/>
+                <a:cs typeface="Times New Roman" pitchFamily="34" charset="-120"/>
+              </a:rPr>
+              <a:t>Our next lesson will be on:</a:t>
+            </a:r>
+            <a:endParaRPr lang="en-US" sz="4000" dirty="0"/>
+          </a:p>
+          <a:p>
+            <a:pPr algn="ctr" indent="0" marL="0">
+              <a:spcAft>
+                <a:spcPts val="800"/>
+              </a:spcAft>
+              <a:buNone/>
+            </a:pPr>
+            <a:r>
+              <a:rPr lang="en-US" sz="4000" b="1" dirty="0">
+                <a:solidFill>
+                  <a:srgbClr val="990011"/>
+                </a:solidFill>
+                <a:latin typeface="Times New Roman" pitchFamily="34" charset="0"/>
+                <a:ea typeface="Times New Roman" pitchFamily="34" charset="-122"/>
+                <a:cs typeface="Times New Roman" pitchFamily="34" charset="-120"/>
+              </a:rPr>
+              <a:t>Lesson 13: Migration: Characteristics, Laws and Models</a:t>
+            </a:r>
+            <a:endParaRPr lang="en-US" sz="4000" dirty="0"/>
+          </a:p>
+        </p:txBody>
+      </p:sp>
+      <p:sp>
+        <p:nvSpPr>
+          <p:cNvPr id="25" name="Slide Number Placeholder 0"/>
+          <p:cNvSpPr>
+            <a:spLocks noGrp="1"/>
+          </p:cNvSpPr>
+          <p:nvPr>
+            <p:ph type="sldNum" sz="quarter" idx="4294967295"/>
+          </p:nvPr>
+        </p:nvSpPr>
+        <p:spPr>
+          <a:xfrm>
+            <a:off x="27432" y="91440"/>
+            <a:ext cx="585216" cy="475488"/>
+          </a:xfrm>
+          <a:prstGeom prst="rect">
+            <a:avLst/>
+          </a:prstGeom>
+          <a:extLst>
+            <a:ext uri="{C572A759-6A51-4108-AA02-DFA0A04FC94B}">
+              <ma14:wrappingTextBoxFlag xmlns:ma14="http://schemas.microsoft.com/office/mac/drawingml/2011/main" val="0"/>
+            </a:ext>
+          </a:extLst>
+        </p:spPr>
+        <p:txBody>
+          <a:bodyPr/>
+          <a:lstStyle>
+            <a:lvl1pPr>
+              <a:defRPr sz="2000">
+                <a:solidFill>
+                  <a:srgbClr val="FFFFFF"/>
+                </a:solidFill>
+                <a:latin typeface="Calibri"/>
+                <a:ea typeface="Calibri"/>
+                <a:cs typeface="Calibri"/>
+              </a:defRPr>
+            </a:lvl1pPr>
+          </a:lstStyle>
+          <a:p>
+            <a:pPr algn="ctr"/>
+            <a:fld id="{F7021451-1387-4CA6-816F-3879F97B5CBC}" type="slidenum">
+              <a:rPr b="1" lang="en-US"/>
+              <a:t>63</a:t>
+            </a:fld>
+            <a:endParaRPr lang="en-US"/>
+          </a:p>
+        </p:txBody>
+      </p:sp>
+    </p:spTree>
+  </p:cSld>
+  <p:clrMapOvr>
+    <a:masterClrMapping/>
+  </p:clrMapOvr>
+</p:sld>
+</file>
+
+<file path=ppt/slides/slide64.xml><?xml version="1.0" encoding="utf-8"?>
+<p:sld xmlns:a="http://schemas.openxmlformats.org/drawingml/2006/main" xmlns:r="http://schemas.openxmlformats.org/officeDocument/2006/relationships" xmlns:p="http://schemas.openxmlformats.org/presentationml/2006/main">
+  <p:cSld name="Slide 64">
+    <p:spTree>
+      <p:nvGrpSpPr>
+        <p:cNvPr id="1" name=""/>
+        <p:cNvGrpSpPr/>
+        <p:nvPr/>
+      </p:nvGrpSpPr>
+      <p:grpSpPr>
+        <a:xfrm>
+          <a:off x="0" y="0"/>
+          <a:ext cx="0" cy="0"/>
+          <a:chOff x="0" y="0"/>
+          <a:chExt cx="0" cy="0"/>
+        </a:xfrm>
+      </p:grpSpPr>
+      <p:sp>
+        <p:nvSpPr>
+          <p:cNvPr id="2" name="Text 0"/>
+          <p:cNvSpPr/>
+          <p:nvPr/>
+        </p:nvSpPr>
+        <p:spPr>
+          <a:xfrm>
+            <a:off x="457200" y="713232"/>
+            <a:ext cx="11368735" cy="274320"/>
+          </a:xfrm>
+          <a:prstGeom prst="rect">
+            <a:avLst/>
+          </a:prstGeom>
+          <a:noFill/>
+          <a:ln/>
+        </p:spPr>
+        <p:txBody>
+          <a:bodyPr wrap="square" lIns="0" tIns="0" rIns="0" bIns="0" rtlCol="0" anchor="ctr"/>
+          <a:lstStyle/>
+          <a:p>
+            <a:pPr algn="r" indent="0" marL="0">
+              <a:buNone/>
+            </a:pPr>
+            <a:r>
+              <a:rPr lang="en-US" sz="1400" b="1" dirty="0">
+                <a:solidFill>
+                  <a:srgbClr val="1C3F6E"/>
+                </a:solidFill>
+                <a:latin typeface="Calibri" pitchFamily="34" charset="0"/>
+                <a:ea typeface="Calibri" pitchFamily="34" charset="-122"/>
+                <a:cs typeface="Calibri" pitchFamily="34" charset="-120"/>
+              </a:rPr>
+              <a:t>BILINGUAL GAME</a:t>
+            </a:r>
+            <a:endParaRPr lang="en-US" sz="1400" dirty="0"/>
+          </a:p>
+        </p:txBody>
+      </p:sp>
+      <p:sp>
+        <p:nvSpPr>
+          <p:cNvPr id="3" name="Text 1"/>
+          <p:cNvSpPr/>
+          <p:nvPr/>
+        </p:nvSpPr>
+        <p:spPr>
+          <a:xfrm>
+            <a:off x="457200" y="1005840"/>
+            <a:ext cx="11277295" cy="731520"/>
+          </a:xfrm>
+          <a:prstGeom prst="rect">
+            <a:avLst/>
+          </a:prstGeom>
+          <a:noFill/>
+          <a:ln/>
+        </p:spPr>
+        <p:txBody>
+          <a:bodyPr wrap="square" lIns="0" tIns="0" rIns="0" bIns="0" rtlCol="0" anchor="ctr"/>
+          <a:lstStyle/>
+          <a:p>
+            <a:pPr algn="ctr" indent="0" marL="0">
+              <a:buNone/>
+            </a:pPr>
+            <a:r>
+              <a:rPr lang="en-US" sz="3600" b="1" dirty="0">
+                <a:solidFill>
+                  <a:srgbClr val="990011"/>
+                </a:solidFill>
+                <a:latin typeface="Times New Roman" pitchFamily="34" charset="0"/>
+                <a:ea typeface="Times New Roman" pitchFamily="34" charset="-122"/>
+                <a:cs typeface="Times New Roman" pitchFamily="34" charset="-120"/>
+              </a:rPr>
               <a:t>Bilingual Game (Jeu Bilingue)</a:t>
             </a:r>
             <a:endParaRPr lang="en-US" sz="3600" dirty="0"/>
@@ -22702,7 +23391,7 @@
       </p:sp>
       <p:graphicFrame>
         <p:nvGraphicFramePr>
-          <p:cNvPr id="63" name="Table 0"/>
+          <p:cNvPr id="65" name="Table 0"/>
           <p:cNvGraphicFramePr>
             <a:graphicFrameLocks noGrp="1"/>
           </p:cNvGraphicFramePr>
@@ -23738,7 +24427,7 @@
             <a:pPr algn="ctr"/>
             <a:fld id="{F7021451-1387-4CA6-816F-3879F97B5CBC}" type="slidenum">
               <a:rPr b="1" lang="en-US"/>
-              <a:t>62</a:t>
+              <a:t>64</a:t>
             </a:fld>
             <a:endParaRPr lang="en-US"/>
           </a:p>
@@ -23752,9 +24441,9 @@
 </p:sld>
 </file>
 
-<file path=ppt/slides/slide63.xml><?xml version="1.0" encoding="utf-8"?>
+<file path=ppt/slides/slide65.xml><?xml version="1.0" encoding="utf-8"?>
 <p:sld xmlns:a="http://schemas.openxmlformats.org/drawingml/2006/main" xmlns:r="http://schemas.openxmlformats.org/officeDocument/2006/relationships" xmlns:p="http://schemas.openxmlformats.org/presentationml/2006/main">
-  <p:cSld name="Slide 63">
+  <p:cSld name="Slide 65">
     <p:spTree>
       <p:nvGrpSpPr>
         <p:cNvPr id="1" name=""/>
@@ -23849,7 +24538,7 @@
       </p:sp>
       <p:graphicFrame>
         <p:nvGraphicFramePr>
-          <p:cNvPr id="64" name="Table 0"/>
+          <p:cNvPr id="66" name="Table 0"/>
           <p:cNvGraphicFramePr>
             <a:graphicFrameLocks noGrp="1"/>
           </p:cNvGraphicFramePr>
@@ -24471,7 +25160,7 @@
             <a:pPr algn="ctr"/>
             <a:fld id="{F7021451-1387-4CA6-816F-3879F97B5CBC}" type="slidenum">
               <a:rPr b="1" lang="en-US"/>
-              <a:t>63</a:t>
+              <a:t>65</a:t>
             </a:fld>
             <a:endParaRPr lang="en-US"/>
           </a:p>
@@ -24485,9 +25174,9 @@
 </p:sld>
 </file>
 
-<file path=ppt/slides/slide64.xml><?xml version="1.0" encoding="utf-8"?>
+<file path=ppt/slides/slide66.xml><?xml version="1.0" encoding="utf-8"?>
 <p:sld xmlns:a="http://schemas.openxmlformats.org/drawingml/2006/main" xmlns:r="http://schemas.openxmlformats.org/officeDocument/2006/relationships" xmlns:p="http://schemas.openxmlformats.org/presentationml/2006/main">
-  <p:cSld name="Slide 64">
+  <p:cSld name="Slide 66">
     <p:spTree>
       <p:nvGrpSpPr>
         <p:cNvPr id="1" name=""/>
@@ -24582,7 +25271,7 @@
       </p:sp>
       <p:graphicFrame>
         <p:nvGraphicFramePr>
-          <p:cNvPr id="65" name="Table 0"/>
+          <p:cNvPr id="67" name="Table 0"/>
           <p:cNvGraphicFramePr>
             <a:graphicFrameLocks noGrp="1"/>
           </p:cNvGraphicFramePr>
@@ -25342,7 +26031,7 @@
             <a:pPr algn="ctr"/>
             <a:fld id="{F7021451-1387-4CA6-816F-3879F97B5CBC}" type="slidenum">
               <a:rPr b="1" lang="en-US"/>
-              <a:t>64</a:t>
+              <a:t>66</a:t>
             </a:fld>
             <a:endParaRPr lang="en-US"/>
           </a:p>
@@ -25356,9 +26045,9 @@
 </p:sld>
 </file>
 
-<file path=ppt/slides/slide65.xml><?xml version="1.0" encoding="utf-8"?>
+<file path=ppt/slides/slide67.xml><?xml version="1.0" encoding="utf-8"?>
 <p:sld xmlns:a="http://schemas.openxmlformats.org/drawingml/2006/main" xmlns:r="http://schemas.openxmlformats.org/officeDocument/2006/relationships" xmlns:p="http://schemas.openxmlformats.org/presentationml/2006/main">
-  <p:cSld name="Slide 65">
+  <p:cSld name="Slide 67">
     <p:spTree>
       <p:nvGrpSpPr>
         <p:cNvPr id="1" name=""/>
@@ -25667,7 +26356,7 @@
             <a:pPr algn="ctr"/>
             <a:fld id="{F7021451-1387-4CA6-816F-3879F97B5CBC}" type="slidenum">
               <a:rPr b="1" lang="en-US"/>
-              <a:t>65</a:t>
+              <a:t>67</a:t>
             </a:fld>
             <a:endParaRPr lang="en-US"/>
           </a:p>
@@ -25681,9 +26370,9 @@
 </p:sld>
 </file>
 
-<file path=ppt/slides/slide66.xml><?xml version="1.0" encoding="utf-8"?>
+<file path=ppt/slides/slide68.xml><?xml version="1.0" encoding="utf-8"?>
 <p:sld xmlns:a="http://schemas.openxmlformats.org/drawingml/2006/main" xmlns:r="http://schemas.openxmlformats.org/officeDocument/2006/relationships" xmlns:p="http://schemas.openxmlformats.org/presentationml/2006/main">
-  <p:cSld name="Slide 66">
+  <p:cSld name="Slide 68">
     <p:spTree>
       <p:nvGrpSpPr>
         <p:cNvPr id="1" name=""/>
@@ -25971,7 +26660,7 @@
             <a:pPr algn="ctr"/>
             <a:fld id="{F7021451-1387-4CA6-816F-3879F97B5CBC}" type="slidenum">
               <a:rPr b="1" lang="en-US"/>
-              <a:t>66</a:t>
+              <a:t>68</a:t>
             </a:fld>
             <a:endParaRPr lang="en-US"/>
           </a:p>
